--- a/media/exports/reports/2026-01/program-cost.pptx
+++ b/media/exports/reports/2026-01/program-cost.pptx
@@ -286,7 +286,9 @@
     <a:lstStyle/>
     <a:p>
       <a:pPr>
-        <a:defRPr sz="1800"/>
+        <a:defRPr sz="1800">
+          <a:latin typeface="Roboto"/>
+        </a:defRPr>
       </a:pPr>
       <a:endParaRPr lang="en-US"/>
     </a:p>
@@ -468,7 +470,9 @@
     <a:lstStyle/>
     <a:p>
       <a:pPr>
-        <a:defRPr sz="1800"/>
+        <a:defRPr sz="1800">
+          <a:latin typeface="Roboto"/>
+        </a:defRPr>
       </a:pPr>
       <a:endParaRPr lang="en-US"/>
     </a:p>
@@ -716,7 +720,9 @@
     <a:lstStyle/>
     <a:p>
       <a:pPr>
-        <a:defRPr sz="1800"/>
+        <a:defRPr sz="1800">
+          <a:latin typeface="Roboto"/>
+        </a:defRPr>
       </a:pPr>
       <a:endParaRPr/>
     </a:p>
@@ -3747,11 +3753,17 @@
           <a:bodyPr rtlCol="0" anchor="ctr"/>
           <a:lstStyle/>
           <a:p>
+            <a:pPr>
+              <a:defRPr>
+                <a:latin typeface="Roboto"/>
+              </a:defRPr>
+            </a:pPr>
             <a:r>
               <a:rPr sz="1600" b="1">
                 <a:solidFill>
                   <a:srgbClr val="FFFFFF"/>
                 </a:solidFill>
+                <a:latin typeface="Roboto"/>
               </a:rPr>
               <a:t>4th</a:t>
             </a:r>
@@ -3780,14 +3792,19 @@
           </a:bodyPr>
           <a:lstStyle/>
           <a:p>
+            <a:pPr>
+              <a:defRPr>
+                <a:latin typeface="Roboto"/>
+              </a:defRPr>
+            </a:pPr>
             <a:r>
               <a:rPr sz="1800" b="1">
                 <a:solidFill>
                   <a:srgbClr val="25342A"/>
                 </a:solidFill>
-                <a:latin typeface="Arial"/>
+                <a:latin typeface="Roboto"/>
               </a:rPr>
-              <a:t>The 4th Sheet</a:t>
+              <a:t>The Fourth Sheet</a:t>
             </a:r>
           </a:p>
         </p:txBody>
@@ -3814,12 +3831,17 @@
           </a:bodyPr>
           <a:lstStyle/>
           <a:p>
+            <a:pPr>
+              <a:defRPr>
+                <a:latin typeface="Roboto"/>
+              </a:defRPr>
+            </a:pPr>
             <a:r>
               <a:rPr sz="1100" b="1">
                 <a:solidFill>
                   <a:srgbClr val="8A7A52"/>
                 </a:solidFill>
-                <a:latin typeface="Arial"/>
+                <a:latin typeface="Roboto"/>
               </a:rPr>
               <a:t>SAMPLE DATA · invented figures for demonstration</a:t>
             </a:r>
@@ -3848,12 +3870,17 @@
           </a:bodyPr>
           <a:lstStyle/>
           <a:p>
+            <a:pPr>
+              <a:defRPr>
+                <a:latin typeface="Roboto"/>
+              </a:defRPr>
+            </a:pPr>
             <a:r>
               <a:rPr sz="3400" b="1">
                 <a:solidFill>
                   <a:srgbClr val="25342A"/>
                 </a:solidFill>
-                <a:latin typeface="Arial"/>
+                <a:latin typeface="Roboto"/>
               </a:rPr>
               <a:t>What does each program really cost?</a:t>
             </a:r>
@@ -3882,12 +3909,17 @@
           </a:bodyPr>
           <a:lstStyle/>
           <a:p>
+            <a:pPr>
+              <a:defRPr>
+                <a:latin typeface="Roboto"/>
+              </a:defRPr>
+            </a:pPr>
             <a:r>
               <a:rPr sz="1600" b="0">
                 <a:solidFill>
                   <a:srgbClr val="5F6F63"/>
                 </a:solidFill>
-                <a:latin typeface="Arial"/>
+                <a:latin typeface="Roboto"/>
               </a:rPr>
               <a:t>Sample Community Services Ltd</a:t>
             </a:r>
@@ -3916,12 +3948,17 @@
           </a:bodyPr>
           <a:lstStyle/>
           <a:p>
+            <a:pPr>
+              <a:defRPr>
+                <a:latin typeface="Roboto"/>
+              </a:defRPr>
+            </a:pPr>
             <a:r>
               <a:rPr sz="1400" b="0">
                 <a:solidFill>
                   <a:srgbClr val="25342A"/>
                 </a:solidFill>
-                <a:latin typeface="Arial"/>
+                <a:latin typeface="Roboto"/>
               </a:rPr>
               <a:t>Period: January 2026. Each program's full cost: what its grant pays for, plus its fair share of the costs no single grant covers (untied program costs and administration, shared by grant spending). Pick a program and every chart and note follows it.</a:t>
             </a:r>
@@ -3950,45 +3987,65 @@
           </a:bodyPr>
           <a:lstStyle/>
           <a:p>
+            <a:pPr>
+              <a:defRPr>
+                <a:latin typeface="Roboto"/>
+              </a:defRPr>
+            </a:pPr>
             <a:r>
               <a:rPr sz="1100" b="0">
                 <a:solidFill>
                   <a:srgbClr val="5F6F63"/>
                 </a:solidFill>
-                <a:latin typeface="Arial"/>
+                <a:latin typeface="Roboto"/>
               </a:rPr>
               <a:t>How final is this data?</a:t>
             </a:r>
           </a:p>
           <a:p>
+            <a:pPr>
+              <a:defRPr>
+                <a:latin typeface="Roboto"/>
+              </a:defRPr>
+            </a:pPr>
             <a:r>
               <a:rPr sz="1100" b="0">
                 <a:solidFill>
                   <a:srgbClr val="5F6F63"/>
                 </a:solidFill>
-                <a:latin typeface="Arial"/>
+                <a:latin typeface="Roboto"/>
               </a:rPr>
               <a:t>December 2025: Locked. December 2025 is locked (closed 5 Jan 2026). These numbers won't change.</a:t>
             </a:r>
           </a:p>
           <a:p>
+            <a:pPr>
+              <a:defRPr>
+                <a:latin typeface="Roboto"/>
+              </a:defRPr>
+            </a:pPr>
             <a:r>
               <a:rPr sz="1100" b="0">
                 <a:solidFill>
                   <a:srgbClr val="5F6F63"/>
                 </a:solidFill>
-                <a:latin typeface="Arial"/>
+                <a:latin typeface="Roboto"/>
               </a:rPr>
               <a:t>January 2026: Locked. January 2026 is locked (closed 3 Feb 2026). These numbers won't change.</a:t>
             </a:r>
           </a:p>
           <a:p>
+            <a:pPr>
+              <a:defRPr>
+                <a:latin typeface="Roboto"/>
+              </a:defRPr>
+            </a:pPr>
             <a:r>
               <a:rPr sz="1100" b="0">
                 <a:solidFill>
                   <a:srgbClr val="5F6F63"/>
                 </a:solidFill>
-                <a:latin typeface="Arial"/>
+                <a:latin typeface="Roboto"/>
               </a:rPr>
               <a:t>October 2026: Incomplete. October 2026 is still in progress: figures to 6 Oct only.</a:t>
             </a:r>
@@ -4017,12 +4074,17 @@
           </a:bodyPr>
           <a:lstStyle/>
           <a:p>
+            <a:pPr>
+              <a:defRPr>
+                <a:latin typeface="Roboto"/>
+              </a:defRPr>
+            </a:pPr>
             <a:r>
               <a:rPr sz="900" b="0">
                 <a:solidFill>
                   <a:srgbClr val="5F6F63"/>
                 </a:solidFill>
-                <a:latin typeface="Arial"/>
+                <a:latin typeface="Roboto"/>
               </a:rPr>
               <a:t>program-cost.pptx</a:t>
             </a:r>
@@ -4051,13 +4113,17 @@
           </a:bodyPr>
           <a:lstStyle/>
           <a:p>
-            <a:pPr algn="ctr"/>
+            <a:pPr algn="ctr">
+              <a:defRPr>
+                <a:latin typeface="Roboto"/>
+              </a:defRPr>
+            </a:pPr>
             <a:r>
               <a:rPr sz="900" b="0">
                 <a:solidFill>
                   <a:srgbClr val="5F6F63"/>
                 </a:solidFill>
-                <a:latin typeface="Arial"/>
+                <a:latin typeface="Roboto"/>
               </a:rPr>
               <a:t>Data retrieved 2pm, Tue 6 Oct 2026 · Sample data</a:t>
             </a:r>
@@ -4086,13 +4152,17 @@
           </a:bodyPr>
           <a:lstStyle/>
           <a:p>
-            <a:pPr algn="r"/>
+            <a:pPr algn="r">
+              <a:defRPr>
+                <a:latin typeface="Roboto"/>
+              </a:defRPr>
+            </a:pPr>
             <a:r>
               <a:rPr sz="900" b="0">
                 <a:solidFill>
                   <a:srgbClr val="5F6F63"/>
                 </a:solidFill>
-                <a:latin typeface="Arial"/>
+                <a:latin typeface="Roboto"/>
               </a:rPr>
               <a:t>Slide 1 of 9</a:t>
             </a:r>
@@ -4156,7 +4226,11 @@
           <a:bodyPr rtlCol="0" anchor="ctr"/>
           <a:lstStyle/>
           <a:p>
-            <a:pPr algn="ctr"/>
+            <a:pPr algn="ctr">
+              <a:defRPr>
+                <a:latin typeface="Roboto"/>
+              </a:defRPr>
+            </a:pPr>
           </a:p>
         </p:txBody>
       </p:sp>
@@ -4182,12 +4256,17 @@
           </a:bodyPr>
           <a:lstStyle/>
           <a:p>
+            <a:pPr>
+              <a:defRPr>
+                <a:latin typeface="Roboto"/>
+              </a:defRPr>
+            </a:pPr>
             <a:r>
               <a:rPr sz="1000" b="0">
                 <a:solidFill>
                   <a:srgbClr val="5F6F63"/>
                 </a:solidFill>
-                <a:latin typeface="Arial"/>
+                <a:latin typeface="Roboto"/>
               </a:rPr>
               <a:t>Sample Community Services Ltd · What does each program really cost?</a:t>
             </a:r>
@@ -4216,12 +4295,17 @@
           </a:bodyPr>
           <a:lstStyle/>
           <a:p>
+            <a:pPr>
+              <a:defRPr>
+                <a:latin typeface="Roboto"/>
+              </a:defRPr>
+            </a:pPr>
             <a:r>
               <a:rPr sz="2400" b="1">
                 <a:solidFill>
                   <a:srgbClr val="25342A"/>
                 </a:solidFill>
-                <a:latin typeface="Arial"/>
+                <a:latin typeface="Roboto"/>
               </a:rPr>
               <a:t>Full cost of each program, January 2026 · $ · Program: All programs</a:t>
             </a:r>
@@ -4268,12 +4352,17 @@
           </a:bodyPr>
           <a:lstStyle/>
           <a:p>
+            <a:pPr>
+              <a:defRPr>
+                <a:latin typeface="Roboto"/>
+              </a:defRPr>
+            </a:pPr>
             <a:r>
               <a:rPr sz="900" b="0">
                 <a:solidFill>
                   <a:srgbClr val="5F6F63"/>
                 </a:solidFill>
-                <a:latin typeface="Arial"/>
+                <a:latin typeface="Roboto"/>
               </a:rPr>
               <a:t>program-cost.pptx</a:t>
             </a:r>
@@ -4302,13 +4391,17 @@
           </a:bodyPr>
           <a:lstStyle/>
           <a:p>
-            <a:pPr algn="ctr"/>
+            <a:pPr algn="ctr">
+              <a:defRPr>
+                <a:latin typeface="Roboto"/>
+              </a:defRPr>
+            </a:pPr>
             <a:r>
               <a:rPr sz="900" b="0">
                 <a:solidFill>
                   <a:srgbClr val="5F6F63"/>
                 </a:solidFill>
-                <a:latin typeface="Arial"/>
+                <a:latin typeface="Roboto"/>
               </a:rPr>
               <a:t>Data retrieved 2pm, Tue 6 Oct 2026 · Sample data</a:t>
             </a:r>
@@ -4337,13 +4430,17 @@
           </a:bodyPr>
           <a:lstStyle/>
           <a:p>
-            <a:pPr algn="r"/>
+            <a:pPr algn="r">
+              <a:defRPr>
+                <a:latin typeface="Roboto"/>
+              </a:defRPr>
+            </a:pPr>
             <a:r>
               <a:rPr sz="900" b="0">
                 <a:solidFill>
                   <a:srgbClr val="5F6F63"/>
                 </a:solidFill>
-                <a:latin typeface="Arial"/>
+                <a:latin typeface="Roboto"/>
               </a:rPr>
               <a:t>Slide 2 of 9</a:t>
             </a:r>
@@ -4407,7 +4504,11 @@
           <a:bodyPr rtlCol="0" anchor="ctr"/>
           <a:lstStyle/>
           <a:p>
-            <a:pPr algn="ctr"/>
+            <a:pPr algn="ctr">
+              <a:defRPr>
+                <a:latin typeface="Roboto"/>
+              </a:defRPr>
+            </a:pPr>
           </a:p>
         </p:txBody>
       </p:sp>
@@ -4433,12 +4534,17 @@
           </a:bodyPr>
           <a:lstStyle/>
           <a:p>
+            <a:pPr>
+              <a:defRPr>
+                <a:latin typeface="Roboto"/>
+              </a:defRPr>
+            </a:pPr>
             <a:r>
               <a:rPr sz="1000" b="0">
                 <a:solidFill>
                   <a:srgbClr val="5F6F63"/>
                 </a:solidFill>
-                <a:latin typeface="Arial"/>
+                <a:latin typeface="Roboto"/>
               </a:rPr>
               <a:t>Sample Community Services Ltd · What does each program really cost?</a:t>
             </a:r>
@@ -4467,12 +4573,17 @@
           </a:bodyPr>
           <a:lstStyle/>
           <a:p>
+            <a:pPr>
+              <a:defRPr>
+                <a:latin typeface="Roboto"/>
+              </a:defRPr>
+            </a:pPr>
             <a:r>
               <a:rPr sz="2400" b="1">
                 <a:solidFill>
                   <a:srgbClr val="25342A"/>
                 </a:solidFill>
-                <a:latin typeface="Arial"/>
+                <a:latin typeface="Roboto"/>
               </a:rPr>
               <a:t>Full cost of each program, January 2026 · % of total · Program: All programs</a:t>
             </a:r>
@@ -4519,12 +4630,17 @@
           </a:bodyPr>
           <a:lstStyle/>
           <a:p>
+            <a:pPr>
+              <a:defRPr>
+                <a:latin typeface="Roboto"/>
+              </a:defRPr>
+            </a:pPr>
             <a:r>
               <a:rPr sz="900" b="0">
                 <a:solidFill>
                   <a:srgbClr val="5F6F63"/>
                 </a:solidFill>
-                <a:latin typeface="Arial"/>
+                <a:latin typeface="Roboto"/>
               </a:rPr>
               <a:t>program-cost.pptx</a:t>
             </a:r>
@@ -4553,13 +4669,17 @@
           </a:bodyPr>
           <a:lstStyle/>
           <a:p>
-            <a:pPr algn="ctr"/>
+            <a:pPr algn="ctr">
+              <a:defRPr>
+                <a:latin typeface="Roboto"/>
+              </a:defRPr>
+            </a:pPr>
             <a:r>
               <a:rPr sz="900" b="0">
                 <a:solidFill>
                   <a:srgbClr val="5F6F63"/>
                 </a:solidFill>
-                <a:latin typeface="Arial"/>
+                <a:latin typeface="Roboto"/>
               </a:rPr>
               <a:t>Data retrieved 2pm, Tue 6 Oct 2026 · Sample data</a:t>
             </a:r>
@@ -4588,13 +4708,17 @@
           </a:bodyPr>
           <a:lstStyle/>
           <a:p>
-            <a:pPr algn="r"/>
+            <a:pPr algn="r">
+              <a:defRPr>
+                <a:latin typeface="Roboto"/>
+              </a:defRPr>
+            </a:pPr>
             <a:r>
               <a:rPr sz="900" b="0">
                 <a:solidFill>
                   <a:srgbClr val="5F6F63"/>
                 </a:solidFill>
-                <a:latin typeface="Arial"/>
+                <a:latin typeface="Roboto"/>
               </a:rPr>
               <a:t>Slide 3 of 9</a:t>
             </a:r>
@@ -4658,7 +4782,11 @@
           <a:bodyPr rtlCol="0" anchor="ctr"/>
           <a:lstStyle/>
           <a:p>
-            <a:pPr algn="ctr"/>
+            <a:pPr algn="ctr">
+              <a:defRPr>
+                <a:latin typeface="Roboto"/>
+              </a:defRPr>
+            </a:pPr>
           </a:p>
         </p:txBody>
       </p:sp>
@@ -4684,12 +4812,17 @@
           </a:bodyPr>
           <a:lstStyle/>
           <a:p>
+            <a:pPr>
+              <a:defRPr>
+                <a:latin typeface="Roboto"/>
+              </a:defRPr>
+            </a:pPr>
             <a:r>
               <a:rPr sz="1000" b="0">
                 <a:solidFill>
                   <a:srgbClr val="5F6F63"/>
                 </a:solidFill>
-                <a:latin typeface="Arial"/>
+                <a:latin typeface="Roboto"/>
               </a:rPr>
               <a:t>Sample Community Services Ltd · What does each program really cost?</a:t>
             </a:r>
@@ -4718,12 +4851,17 @@
           </a:bodyPr>
           <a:lstStyle/>
           <a:p>
+            <a:pPr>
+              <a:defRPr>
+                <a:latin typeface="Roboto"/>
+              </a:defRPr>
+            </a:pPr>
             <a:r>
               <a:rPr sz="2400" b="1">
                 <a:solidFill>
                   <a:srgbClr val="25342A"/>
                 </a:solidFill>
-                <a:latin typeface="Arial"/>
+                <a:latin typeface="Roboto"/>
               </a:rPr>
               <a:t>What it shows · Program: All programs</a:t>
             </a:r>
@@ -4771,7 +4909,11 @@
           <a:bodyPr rtlCol="0" anchor="ctr"/>
           <a:lstStyle/>
           <a:p>
-            <a:pPr algn="ctr"/>
+            <a:pPr algn="ctr">
+              <a:defRPr>
+                <a:latin typeface="Roboto"/>
+              </a:defRPr>
+            </a:pPr>
           </a:p>
         </p:txBody>
       </p:sp>
@@ -4797,12 +4939,17 @@
           </a:bodyPr>
           <a:lstStyle/>
           <a:p>
+            <a:pPr>
+              <a:defRPr>
+                <a:latin typeface="Roboto"/>
+              </a:defRPr>
+            </a:pPr>
             <a:r>
               <a:rPr sz="1100" b="1">
                 <a:solidFill>
                   <a:srgbClr val="5F6F63"/>
                 </a:solidFill>
-                <a:latin typeface="Arial"/>
+                <a:latin typeface="Roboto"/>
               </a:rPr>
               <a:t>WHAT IT SHOWS</a:t>
             </a:r>
@@ -4831,12 +4978,17 @@
           </a:bodyPr>
           <a:lstStyle/>
           <a:p>
+            <a:pPr>
+              <a:defRPr>
+                <a:latin typeface="Roboto"/>
+              </a:defRPr>
+            </a:pPr>
             <a:r>
               <a:rPr sz="1600" b="0">
                 <a:solidFill>
                   <a:srgbClr val="25342A"/>
                 </a:solidFill>
-                <a:latin typeface="Arial"/>
+                <a:latin typeface="Roboto"/>
               </a:rPr>
               <a:t>Housing support is the biggest program: $57,236 in January once its share of untied program costs and administration is added to $30,502 of grant spending. Shared costs add 87.6% on top of grant spending across all programs.</a:t>
             </a:r>
@@ -4884,7 +5036,11 @@
           <a:bodyPr rtlCol="0" anchor="ctr"/>
           <a:lstStyle/>
           <a:p>
-            <a:pPr algn="ctr"/>
+            <a:pPr algn="ctr">
+              <a:defRPr>
+                <a:latin typeface="Roboto"/>
+              </a:defRPr>
+            </a:pPr>
           </a:p>
         </p:txBody>
       </p:sp>
@@ -4910,12 +5066,17 @@
           </a:bodyPr>
           <a:lstStyle/>
           <a:p>
+            <a:pPr>
+              <a:defRPr>
+                <a:latin typeface="Roboto"/>
+              </a:defRPr>
+            </a:pPr>
             <a:r>
               <a:rPr sz="1100" b="1">
                 <a:solidFill>
                   <a:srgbClr val="5F6F63"/>
                 </a:solidFill>
-                <a:latin typeface="Arial"/>
+                <a:latin typeface="Roboto"/>
               </a:rPr>
               <a:t>WHAT YOU'D DO ABOUT IT</a:t>
             </a:r>
@@ -4944,12 +5105,17 @@
           </a:bodyPr>
           <a:lstStyle/>
           <a:p>
+            <a:pPr>
+              <a:defRPr>
+                <a:latin typeface="Roboto"/>
+              </a:defRPr>
+            </a:pPr>
             <a:r>
               <a:rPr sz="1600" b="0">
                 <a:solidFill>
                   <a:srgbClr val="25342A"/>
                 </a:solidFill>
-                <a:latin typeface="Arial"/>
+                <a:latin typeface="Roboto"/>
               </a:rPr>
               <a:t>The full cost (not just the grant line) is the number for renewal applications, where the funder lets you recover a share of overheads. Pick a program above to see it on its own.</a:t>
             </a:r>
@@ -4978,12 +5144,17 @@
           </a:bodyPr>
           <a:lstStyle/>
           <a:p>
+            <a:pPr>
+              <a:defRPr>
+                <a:latin typeface="Roboto"/>
+              </a:defRPr>
+            </a:pPr>
             <a:r>
               <a:rPr sz="900" b="0">
                 <a:solidFill>
                   <a:srgbClr val="5F6F63"/>
                 </a:solidFill>
-                <a:latin typeface="Arial"/>
+                <a:latin typeface="Roboto"/>
               </a:rPr>
               <a:t>program-cost.pptx</a:t>
             </a:r>
@@ -5012,13 +5183,17 @@
           </a:bodyPr>
           <a:lstStyle/>
           <a:p>
-            <a:pPr algn="ctr"/>
+            <a:pPr algn="ctr">
+              <a:defRPr>
+                <a:latin typeface="Roboto"/>
+              </a:defRPr>
+            </a:pPr>
             <a:r>
               <a:rPr sz="900" b="0">
                 <a:solidFill>
                   <a:srgbClr val="5F6F63"/>
                 </a:solidFill>
-                <a:latin typeface="Arial"/>
+                <a:latin typeface="Roboto"/>
               </a:rPr>
               <a:t>Data retrieved 2pm, Tue 6 Oct 2026 · Sample data</a:t>
             </a:r>
@@ -5047,13 +5222,17 @@
           </a:bodyPr>
           <a:lstStyle/>
           <a:p>
-            <a:pPr algn="r"/>
+            <a:pPr algn="r">
+              <a:defRPr>
+                <a:latin typeface="Roboto"/>
+              </a:defRPr>
+            </a:pPr>
             <a:r>
               <a:rPr sz="900" b="0">
                 <a:solidFill>
                   <a:srgbClr val="5F6F63"/>
                 </a:solidFill>
-                <a:latin typeface="Arial"/>
+                <a:latin typeface="Roboto"/>
               </a:rPr>
               <a:t>Slide 4 of 9</a:t>
             </a:r>
@@ -5117,7 +5296,11 @@
           <a:bodyPr rtlCol="0" anchor="ctr"/>
           <a:lstStyle/>
           <a:p>
-            <a:pPr algn="ctr"/>
+            <a:pPr algn="ctr">
+              <a:defRPr>
+                <a:latin typeface="Roboto"/>
+              </a:defRPr>
+            </a:pPr>
           </a:p>
         </p:txBody>
       </p:sp>
@@ -5143,12 +5326,17 @@
           </a:bodyPr>
           <a:lstStyle/>
           <a:p>
+            <a:pPr>
+              <a:defRPr>
+                <a:latin typeface="Roboto"/>
+              </a:defRPr>
+            </a:pPr>
             <a:r>
               <a:rPr sz="1000" b="0">
                 <a:solidFill>
                   <a:srgbClr val="5F6F63"/>
                 </a:solidFill>
-                <a:latin typeface="Arial"/>
+                <a:latin typeface="Roboto"/>
               </a:rPr>
               <a:t>Sample Community Services Ltd · What does each program really cost?</a:t>
             </a:r>
@@ -5177,12 +5365,17 @@
           </a:bodyPr>
           <a:lstStyle/>
           <a:p>
+            <a:pPr>
+              <a:defRPr>
+                <a:latin typeface="Roboto"/>
+              </a:defRPr>
+            </a:pPr>
             <a:r>
               <a:rPr sz="2400" b="1">
                 <a:solidFill>
                   <a:srgbClr val="25342A"/>
                 </a:solidFill>
-                <a:latin typeface="Arial"/>
+                <a:latin typeface="Roboto"/>
               </a:rPr>
               <a:t>What it shows · Program: Housing support</a:t>
             </a:r>
@@ -5230,7 +5423,11 @@
           <a:bodyPr rtlCol="0" anchor="ctr"/>
           <a:lstStyle/>
           <a:p>
-            <a:pPr algn="ctr"/>
+            <a:pPr algn="ctr">
+              <a:defRPr>
+                <a:latin typeface="Roboto"/>
+              </a:defRPr>
+            </a:pPr>
           </a:p>
         </p:txBody>
       </p:sp>
@@ -5256,12 +5453,17 @@
           </a:bodyPr>
           <a:lstStyle/>
           <a:p>
+            <a:pPr>
+              <a:defRPr>
+                <a:latin typeface="Roboto"/>
+              </a:defRPr>
+            </a:pPr>
             <a:r>
               <a:rPr sz="1100" b="1">
                 <a:solidFill>
                   <a:srgbClr val="5F6F63"/>
                 </a:solidFill>
-                <a:latin typeface="Arial"/>
+                <a:latin typeface="Roboto"/>
               </a:rPr>
               <a:t>WHAT IT SHOWS</a:t>
             </a:r>
@@ -5290,12 +5492,17 @@
           </a:bodyPr>
           <a:lstStyle/>
           <a:p>
+            <a:pPr>
+              <a:defRPr>
+                <a:latin typeface="Roboto"/>
+              </a:defRPr>
+            </a:pPr>
             <a:r>
               <a:rPr sz="1600" b="0">
                 <a:solidFill>
                   <a:srgbClr val="25342A"/>
                 </a:solidFill>
-                <a:latin typeface="Arial"/>
+                <a:latin typeface="Roboto"/>
               </a:rPr>
               <a:t>Housing support cost $57,236 in full in January: $30,502 paid by the State Housing Program grant, and $26,734 of shared costs no grant covers. It has spent 101.7% of its budget to date, with $329,498 left and 11 months to go.</a:t>
             </a:r>
@@ -5343,7 +5550,11 @@
           <a:bodyPr rtlCol="0" anchor="ctr"/>
           <a:lstStyle/>
           <a:p>
-            <a:pPr algn="ctr"/>
+            <a:pPr algn="ctr">
+              <a:defRPr>
+                <a:latin typeface="Roboto"/>
+              </a:defRPr>
+            </a:pPr>
           </a:p>
         </p:txBody>
       </p:sp>
@@ -5369,12 +5580,17 @@
           </a:bodyPr>
           <a:lstStyle/>
           <a:p>
+            <a:pPr>
+              <a:defRPr>
+                <a:latin typeface="Roboto"/>
+              </a:defRPr>
+            </a:pPr>
             <a:r>
               <a:rPr sz="1100" b="1">
                 <a:solidFill>
                   <a:srgbClr val="5F6F63"/>
                 </a:solidFill>
-                <a:latin typeface="Arial"/>
+                <a:latin typeface="Roboto"/>
               </a:rPr>
               <a:t>WHAT YOU'D DO ABOUT IT</a:t>
             </a:r>
@@ -5403,12 +5619,17 @@
           </a:bodyPr>
           <a:lstStyle/>
           <a:p>
+            <a:pPr>
+              <a:defRPr>
+                <a:latin typeface="Roboto"/>
+              </a:defRPr>
+            </a:pPr>
             <a:r>
               <a:rPr sz="1600" b="0">
                 <a:solidFill>
                   <a:srgbClr val="25342A"/>
                 </a:solidFill>
-                <a:latin typeface="Arial"/>
+                <a:latin typeface="Roboto"/>
               </a:rPr>
               <a:t>The full cost is $57,236 a month; $26,734 of it is shared cost the grant doesn't pay for. Worth asking for as much of it as the funder allows at renewal.</a:t>
             </a:r>
@@ -5437,12 +5658,17 @@
           </a:bodyPr>
           <a:lstStyle/>
           <a:p>
+            <a:pPr>
+              <a:defRPr>
+                <a:latin typeface="Roboto"/>
+              </a:defRPr>
+            </a:pPr>
             <a:r>
               <a:rPr sz="900" b="0">
                 <a:solidFill>
                   <a:srgbClr val="5F6F63"/>
                 </a:solidFill>
-                <a:latin typeface="Arial"/>
+                <a:latin typeface="Roboto"/>
               </a:rPr>
               <a:t>program-cost.pptx</a:t>
             </a:r>
@@ -5471,13 +5697,17 @@
           </a:bodyPr>
           <a:lstStyle/>
           <a:p>
-            <a:pPr algn="ctr"/>
+            <a:pPr algn="ctr">
+              <a:defRPr>
+                <a:latin typeface="Roboto"/>
+              </a:defRPr>
+            </a:pPr>
             <a:r>
               <a:rPr sz="900" b="0">
                 <a:solidFill>
                   <a:srgbClr val="5F6F63"/>
                 </a:solidFill>
-                <a:latin typeface="Arial"/>
+                <a:latin typeface="Roboto"/>
               </a:rPr>
               <a:t>Data retrieved 2pm, Tue 6 Oct 2026 · Sample data</a:t>
             </a:r>
@@ -5506,13 +5736,17 @@
           </a:bodyPr>
           <a:lstStyle/>
           <a:p>
-            <a:pPr algn="r"/>
+            <a:pPr algn="r">
+              <a:defRPr>
+                <a:latin typeface="Roboto"/>
+              </a:defRPr>
+            </a:pPr>
             <a:r>
               <a:rPr sz="900" b="0">
                 <a:solidFill>
                   <a:srgbClr val="5F6F63"/>
                 </a:solidFill>
-                <a:latin typeface="Arial"/>
+                <a:latin typeface="Roboto"/>
               </a:rPr>
               <a:t>Slide 5 of 9</a:t>
             </a:r>
@@ -5576,7 +5810,11 @@
           <a:bodyPr rtlCol="0" anchor="ctr"/>
           <a:lstStyle/>
           <a:p>
-            <a:pPr algn="ctr"/>
+            <a:pPr algn="ctr">
+              <a:defRPr>
+                <a:latin typeface="Roboto"/>
+              </a:defRPr>
+            </a:pPr>
           </a:p>
         </p:txBody>
       </p:sp>
@@ -5602,12 +5840,17 @@
           </a:bodyPr>
           <a:lstStyle/>
           <a:p>
+            <a:pPr>
+              <a:defRPr>
+                <a:latin typeface="Roboto"/>
+              </a:defRPr>
+            </a:pPr>
             <a:r>
               <a:rPr sz="1000" b="0">
                 <a:solidFill>
                   <a:srgbClr val="5F6F63"/>
                 </a:solidFill>
-                <a:latin typeface="Arial"/>
+                <a:latin typeface="Roboto"/>
               </a:rPr>
               <a:t>Sample Community Services Ltd · What does each program really cost?</a:t>
             </a:r>
@@ -5636,12 +5879,17 @@
           </a:bodyPr>
           <a:lstStyle/>
           <a:p>
+            <a:pPr>
+              <a:defRPr>
+                <a:latin typeface="Roboto"/>
+              </a:defRPr>
+            </a:pPr>
             <a:r>
               <a:rPr sz="2400" b="1">
                 <a:solidFill>
                   <a:srgbClr val="25342A"/>
                 </a:solidFill>
-                <a:latin typeface="Arial"/>
+                <a:latin typeface="Roboto"/>
               </a:rPr>
               <a:t>What it shows · Program: Youth outreach</a:t>
             </a:r>
@@ -5689,7 +5937,11 @@
           <a:bodyPr rtlCol="0" anchor="ctr"/>
           <a:lstStyle/>
           <a:p>
-            <a:pPr algn="ctr"/>
+            <a:pPr algn="ctr">
+              <a:defRPr>
+                <a:latin typeface="Roboto"/>
+              </a:defRPr>
+            </a:pPr>
           </a:p>
         </p:txBody>
       </p:sp>
@@ -5715,12 +5967,17 @@
           </a:bodyPr>
           <a:lstStyle/>
           <a:p>
+            <a:pPr>
+              <a:defRPr>
+                <a:latin typeface="Roboto"/>
+              </a:defRPr>
+            </a:pPr>
             <a:r>
               <a:rPr sz="1100" b="1">
                 <a:solidFill>
                   <a:srgbClr val="5F6F63"/>
                 </a:solidFill>
-                <a:latin typeface="Arial"/>
+                <a:latin typeface="Roboto"/>
               </a:rPr>
               <a:t>WHAT IT SHOWS</a:t>
             </a:r>
@@ -5749,12 +6006,17 @@
           </a:bodyPr>
           <a:lstStyle/>
           <a:p>
+            <a:pPr>
+              <a:defRPr>
+                <a:latin typeface="Roboto"/>
+              </a:defRPr>
+            </a:pPr>
             <a:r>
               <a:rPr sz="1600" b="0">
                 <a:solidFill>
                   <a:srgbClr val="25342A"/>
                 </a:solidFill>
-                <a:latin typeface="Arial"/>
+                <a:latin typeface="Roboto"/>
               </a:rPr>
               <a:t>Youth outreach cost $39,701 in full in January: $21,157 paid by the State Department of Families grant, and $18,544 of shared costs no grant covers. It has spent 99.6% of its budget to date, with $340,523 left and 17 months to go.</a:t>
             </a:r>
@@ -5802,7 +6064,11 @@
           <a:bodyPr rtlCol="0" anchor="ctr"/>
           <a:lstStyle/>
           <a:p>
-            <a:pPr algn="ctr"/>
+            <a:pPr algn="ctr">
+              <a:defRPr>
+                <a:latin typeface="Roboto"/>
+              </a:defRPr>
+            </a:pPr>
           </a:p>
         </p:txBody>
       </p:sp>
@@ -5828,12 +6094,17 @@
           </a:bodyPr>
           <a:lstStyle/>
           <a:p>
+            <a:pPr>
+              <a:defRPr>
+                <a:latin typeface="Roboto"/>
+              </a:defRPr>
+            </a:pPr>
             <a:r>
               <a:rPr sz="1100" b="1">
                 <a:solidFill>
                   <a:srgbClr val="5F6F63"/>
                 </a:solidFill>
-                <a:latin typeface="Arial"/>
+                <a:latin typeface="Roboto"/>
               </a:rPr>
               <a:t>WHAT YOU'D DO ABOUT IT</a:t>
             </a:r>
@@ -5862,12 +6133,17 @@
           </a:bodyPr>
           <a:lstStyle/>
           <a:p>
+            <a:pPr>
+              <a:defRPr>
+                <a:latin typeface="Roboto"/>
+              </a:defRPr>
+            </a:pPr>
             <a:r>
               <a:rPr sz="1600" b="0">
                 <a:solidFill>
                   <a:srgbClr val="25342A"/>
                 </a:solidFill>
-                <a:latin typeface="Arial"/>
+                <a:latin typeface="Roboto"/>
               </a:rPr>
               <a:t>The full cost is $39,701 a month; $18,544 of it is shared cost the grant doesn't pay for. Worth asking for as much of it as the funder allows at renewal.</a:t>
             </a:r>
@@ -5896,12 +6172,17 @@
           </a:bodyPr>
           <a:lstStyle/>
           <a:p>
+            <a:pPr>
+              <a:defRPr>
+                <a:latin typeface="Roboto"/>
+              </a:defRPr>
+            </a:pPr>
             <a:r>
               <a:rPr sz="900" b="0">
                 <a:solidFill>
                   <a:srgbClr val="5F6F63"/>
                 </a:solidFill>
-                <a:latin typeface="Arial"/>
+                <a:latin typeface="Roboto"/>
               </a:rPr>
               <a:t>program-cost.pptx</a:t>
             </a:r>
@@ -5930,13 +6211,17 @@
           </a:bodyPr>
           <a:lstStyle/>
           <a:p>
-            <a:pPr algn="ctr"/>
+            <a:pPr algn="ctr">
+              <a:defRPr>
+                <a:latin typeface="Roboto"/>
+              </a:defRPr>
+            </a:pPr>
             <a:r>
               <a:rPr sz="900" b="0">
                 <a:solidFill>
                   <a:srgbClr val="5F6F63"/>
                 </a:solidFill>
-                <a:latin typeface="Arial"/>
+                <a:latin typeface="Roboto"/>
               </a:rPr>
               <a:t>Data retrieved 2pm, Tue 6 Oct 2026 · Sample data</a:t>
             </a:r>
@@ -5965,13 +6250,17 @@
           </a:bodyPr>
           <a:lstStyle/>
           <a:p>
-            <a:pPr algn="r"/>
+            <a:pPr algn="r">
+              <a:defRPr>
+                <a:latin typeface="Roboto"/>
+              </a:defRPr>
+            </a:pPr>
             <a:r>
               <a:rPr sz="900" b="0">
                 <a:solidFill>
                   <a:srgbClr val="5F6F63"/>
                 </a:solidFill>
-                <a:latin typeface="Arial"/>
+                <a:latin typeface="Roboto"/>
               </a:rPr>
               <a:t>Slide 6 of 9</a:t>
             </a:r>
@@ -6035,7 +6324,11 @@
           <a:bodyPr rtlCol="0" anchor="ctr"/>
           <a:lstStyle/>
           <a:p>
-            <a:pPr algn="ctr"/>
+            <a:pPr algn="ctr">
+              <a:defRPr>
+                <a:latin typeface="Roboto"/>
+              </a:defRPr>
+            </a:pPr>
           </a:p>
         </p:txBody>
       </p:sp>
@@ -6061,12 +6354,17 @@
           </a:bodyPr>
           <a:lstStyle/>
           <a:p>
+            <a:pPr>
+              <a:defRPr>
+                <a:latin typeface="Roboto"/>
+              </a:defRPr>
+            </a:pPr>
             <a:r>
               <a:rPr sz="1000" b="0">
                 <a:solidFill>
                   <a:srgbClr val="5F6F63"/>
                 </a:solidFill>
-                <a:latin typeface="Arial"/>
+                <a:latin typeface="Roboto"/>
               </a:rPr>
               <a:t>Sample Community Services Ltd · What does each program really cost?</a:t>
             </a:r>
@@ -6095,12 +6393,17 @@
           </a:bodyPr>
           <a:lstStyle/>
           <a:p>
+            <a:pPr>
+              <a:defRPr>
+                <a:latin typeface="Roboto"/>
+              </a:defRPr>
+            </a:pPr>
             <a:r>
               <a:rPr sz="2400" b="1">
                 <a:solidFill>
                   <a:srgbClr val="25342A"/>
                 </a:solidFill>
-                <a:latin typeface="Arial"/>
+                <a:latin typeface="Roboto"/>
               </a:rPr>
               <a:t>What it shows · Program: Digital literacy</a:t>
             </a:r>
@@ -6148,7 +6451,11 @@
           <a:bodyPr rtlCol="0" anchor="ctr"/>
           <a:lstStyle/>
           <a:p>
-            <a:pPr algn="ctr"/>
+            <a:pPr algn="ctr">
+              <a:defRPr>
+                <a:latin typeface="Roboto"/>
+              </a:defRPr>
+            </a:pPr>
           </a:p>
         </p:txBody>
       </p:sp>
@@ -6174,12 +6481,17 @@
           </a:bodyPr>
           <a:lstStyle/>
           <a:p>
+            <a:pPr>
+              <a:defRPr>
+                <a:latin typeface="Roboto"/>
+              </a:defRPr>
+            </a:pPr>
             <a:r>
               <a:rPr sz="1100" b="1">
                 <a:solidFill>
                   <a:srgbClr val="5F6F63"/>
                 </a:solidFill>
-                <a:latin typeface="Arial"/>
+                <a:latin typeface="Roboto"/>
               </a:rPr>
               <a:t>WHAT IT SHOWS</a:t>
             </a:r>
@@ -6208,12 +6520,17 @@
           </a:bodyPr>
           <a:lstStyle/>
           <a:p>
+            <a:pPr>
+              <a:defRPr>
+                <a:latin typeface="Roboto"/>
+              </a:defRPr>
+            </a:pPr>
             <a:r>
               <a:rPr sz="1600" b="0">
                 <a:solidFill>
                   <a:srgbClr val="25342A"/>
                 </a:solidFill>
-                <a:latin typeface="Arial"/>
+                <a:latin typeface="Roboto"/>
               </a:rPr>
               <a:t>Digital literacy cost $8,305 in full in January: $4,426 paid by the Philanthropic foundation grant, and $3,879 of shared costs no grant covers. It has spent 97.0% of its budget to date, with $70,608 left and 14 months to go.</a:t>
             </a:r>
@@ -6261,7 +6578,11 @@
           <a:bodyPr rtlCol="0" anchor="ctr"/>
           <a:lstStyle/>
           <a:p>
-            <a:pPr algn="ctr"/>
+            <a:pPr algn="ctr">
+              <a:defRPr>
+                <a:latin typeface="Roboto"/>
+              </a:defRPr>
+            </a:pPr>
           </a:p>
         </p:txBody>
       </p:sp>
@@ -6287,12 +6608,17 @@
           </a:bodyPr>
           <a:lstStyle/>
           <a:p>
+            <a:pPr>
+              <a:defRPr>
+                <a:latin typeface="Roboto"/>
+              </a:defRPr>
+            </a:pPr>
             <a:r>
               <a:rPr sz="1100" b="1">
                 <a:solidFill>
                   <a:srgbClr val="5F6F63"/>
                 </a:solidFill>
-                <a:latin typeface="Arial"/>
+                <a:latin typeface="Roboto"/>
               </a:rPr>
               <a:t>WHAT YOU'D DO ABOUT IT</a:t>
             </a:r>
@@ -6321,12 +6647,17 @@
           </a:bodyPr>
           <a:lstStyle/>
           <a:p>
+            <a:pPr>
+              <a:defRPr>
+                <a:latin typeface="Roboto"/>
+              </a:defRPr>
+            </a:pPr>
             <a:r>
               <a:rPr sz="1600" b="0">
                 <a:solidFill>
                   <a:srgbClr val="25342A"/>
                 </a:solidFill>
-                <a:latin typeface="Arial"/>
+                <a:latin typeface="Roboto"/>
               </a:rPr>
               <a:t>The full cost is $8,305 a month; $3,879 of it is shared cost the grant doesn't pay for. Worth asking for as much of it as the funder allows at renewal.</a:t>
             </a:r>
@@ -6355,12 +6686,17 @@
           </a:bodyPr>
           <a:lstStyle/>
           <a:p>
+            <a:pPr>
+              <a:defRPr>
+                <a:latin typeface="Roboto"/>
+              </a:defRPr>
+            </a:pPr>
             <a:r>
               <a:rPr sz="900" b="0">
                 <a:solidFill>
                   <a:srgbClr val="5F6F63"/>
                 </a:solidFill>
-                <a:latin typeface="Arial"/>
+                <a:latin typeface="Roboto"/>
               </a:rPr>
               <a:t>program-cost.pptx</a:t>
             </a:r>
@@ -6389,13 +6725,17 @@
           </a:bodyPr>
           <a:lstStyle/>
           <a:p>
-            <a:pPr algn="ctr"/>
+            <a:pPr algn="ctr">
+              <a:defRPr>
+                <a:latin typeface="Roboto"/>
+              </a:defRPr>
+            </a:pPr>
             <a:r>
               <a:rPr sz="900" b="0">
                 <a:solidFill>
                   <a:srgbClr val="5F6F63"/>
                 </a:solidFill>
-                <a:latin typeface="Arial"/>
+                <a:latin typeface="Roboto"/>
               </a:rPr>
               <a:t>Data retrieved 2pm, Tue 6 Oct 2026 · Sample data</a:t>
             </a:r>
@@ -6424,13 +6764,17 @@
           </a:bodyPr>
           <a:lstStyle/>
           <a:p>
-            <a:pPr algn="r"/>
+            <a:pPr algn="r">
+              <a:defRPr>
+                <a:latin typeface="Roboto"/>
+              </a:defRPr>
+            </a:pPr>
             <a:r>
               <a:rPr sz="900" b="0">
                 <a:solidFill>
                   <a:srgbClr val="5F6F63"/>
                 </a:solidFill>
-                <a:latin typeface="Arial"/>
+                <a:latin typeface="Roboto"/>
               </a:rPr>
               <a:t>Slide 7 of 9</a:t>
             </a:r>
@@ -6494,7 +6838,11 @@
           <a:bodyPr rtlCol="0" anchor="ctr"/>
           <a:lstStyle/>
           <a:p>
-            <a:pPr algn="ctr"/>
+            <a:pPr algn="ctr">
+              <a:defRPr>
+                <a:latin typeface="Roboto"/>
+              </a:defRPr>
+            </a:pPr>
           </a:p>
         </p:txBody>
       </p:sp>
@@ -6520,12 +6868,17 @@
           </a:bodyPr>
           <a:lstStyle/>
           <a:p>
+            <a:pPr>
+              <a:defRPr>
+                <a:latin typeface="Roboto"/>
+              </a:defRPr>
+            </a:pPr>
             <a:r>
               <a:rPr sz="1000" b="0">
                 <a:solidFill>
                   <a:srgbClr val="5F6F63"/>
                 </a:solidFill>
-                <a:latin typeface="Arial"/>
+                <a:latin typeface="Roboto"/>
               </a:rPr>
               <a:t>Sample Community Services Ltd · What does each program really cost?</a:t>
             </a:r>
@@ -6554,12 +6907,17 @@
           </a:bodyPr>
           <a:lstStyle/>
           <a:p>
+            <a:pPr>
+              <a:defRPr>
+                <a:latin typeface="Roboto"/>
+              </a:defRPr>
+            </a:pPr>
             <a:r>
               <a:rPr sz="2400" b="1">
                 <a:solidFill>
                   <a:srgbClr val="25342A"/>
                 </a:solidFill>
-                <a:latin typeface="Arial"/>
+                <a:latin typeface="Roboto"/>
               </a:rPr>
               <a:t>What it shows · Program: Community meals (2025-26)</a:t>
             </a:r>
@@ -6607,7 +6965,11 @@
           <a:bodyPr rtlCol="0" anchor="ctr"/>
           <a:lstStyle/>
           <a:p>
-            <a:pPr algn="ctr"/>
+            <a:pPr algn="ctr">
+              <a:defRPr>
+                <a:latin typeface="Roboto"/>
+              </a:defRPr>
+            </a:pPr>
           </a:p>
         </p:txBody>
       </p:sp>
@@ -6633,12 +6995,17 @@
           </a:bodyPr>
           <a:lstStyle/>
           <a:p>
+            <a:pPr>
+              <a:defRPr>
+                <a:latin typeface="Roboto"/>
+              </a:defRPr>
+            </a:pPr>
             <a:r>
               <a:rPr sz="1100" b="1">
                 <a:solidFill>
                   <a:srgbClr val="5F6F63"/>
                 </a:solidFill>
-                <a:latin typeface="Arial"/>
+                <a:latin typeface="Roboto"/>
               </a:rPr>
               <a:t>WHAT IT SHOWS</a:t>
             </a:r>
@@ -6667,12 +7034,17 @@
           </a:bodyPr>
           <a:lstStyle/>
           <a:p>
+            <a:pPr>
+              <a:defRPr>
+                <a:latin typeface="Roboto"/>
+              </a:defRPr>
+            </a:pPr>
             <a:r>
               <a:rPr sz="1600" b="0">
                 <a:solidFill>
                   <a:srgbClr val="25342A"/>
                 </a:solidFill>
-                <a:latin typeface="Arial"/>
+                <a:latin typeface="Roboto"/>
               </a:rPr>
               <a:t>Community meals (2025-26) cost $6,943 in full in January: $3,700 paid by the Local council community grant grant, and $3,243 of shared costs no grant covers. It has spent 96.2% of its budget to date, with $19,300 left and 5 months to go.</a:t>
             </a:r>
@@ -6720,7 +7092,11 @@
           <a:bodyPr rtlCol="0" anchor="ctr"/>
           <a:lstStyle/>
           <a:p>
-            <a:pPr algn="ctr"/>
+            <a:pPr algn="ctr">
+              <a:defRPr>
+                <a:latin typeface="Roboto"/>
+              </a:defRPr>
+            </a:pPr>
           </a:p>
         </p:txBody>
       </p:sp>
@@ -6746,12 +7122,17 @@
           </a:bodyPr>
           <a:lstStyle/>
           <a:p>
+            <a:pPr>
+              <a:defRPr>
+                <a:latin typeface="Roboto"/>
+              </a:defRPr>
+            </a:pPr>
             <a:r>
               <a:rPr sz="1100" b="1">
                 <a:solidFill>
                   <a:srgbClr val="5F6F63"/>
                 </a:solidFill>
-                <a:latin typeface="Arial"/>
+                <a:latin typeface="Roboto"/>
               </a:rPr>
               <a:t>WHAT YOU'D DO ABOUT IT</a:t>
             </a:r>
@@ -6780,12 +7161,17 @@
           </a:bodyPr>
           <a:lstStyle/>
           <a:p>
+            <a:pPr>
+              <a:defRPr>
+                <a:latin typeface="Roboto"/>
+              </a:defRPr>
+            </a:pPr>
             <a:r>
               <a:rPr sz="1600" b="0">
                 <a:solidFill>
                   <a:srgbClr val="25342A"/>
                 </a:solidFill>
-                <a:latin typeface="Arial"/>
+                <a:latin typeface="Roboto"/>
               </a:rPr>
               <a:t>The full cost is $6,943 a month; $3,243 of it is shared cost the grant doesn't pay for. Worth asking for as much of it as the funder allows at renewal.</a:t>
             </a:r>
@@ -6814,12 +7200,17 @@
           </a:bodyPr>
           <a:lstStyle/>
           <a:p>
+            <a:pPr>
+              <a:defRPr>
+                <a:latin typeface="Roboto"/>
+              </a:defRPr>
+            </a:pPr>
             <a:r>
               <a:rPr sz="900" b="0">
                 <a:solidFill>
                   <a:srgbClr val="5F6F63"/>
                 </a:solidFill>
-                <a:latin typeface="Arial"/>
+                <a:latin typeface="Roboto"/>
               </a:rPr>
               <a:t>program-cost.pptx</a:t>
             </a:r>
@@ -6848,13 +7239,17 @@
           </a:bodyPr>
           <a:lstStyle/>
           <a:p>
-            <a:pPr algn="ctr"/>
+            <a:pPr algn="ctr">
+              <a:defRPr>
+                <a:latin typeface="Roboto"/>
+              </a:defRPr>
+            </a:pPr>
             <a:r>
               <a:rPr sz="900" b="0">
                 <a:solidFill>
                   <a:srgbClr val="5F6F63"/>
                 </a:solidFill>
-                <a:latin typeface="Arial"/>
+                <a:latin typeface="Roboto"/>
               </a:rPr>
               <a:t>Data retrieved 2pm, Tue 6 Oct 2026 · Sample data</a:t>
             </a:r>
@@ -6883,13 +7278,17 @@
           </a:bodyPr>
           <a:lstStyle/>
           <a:p>
-            <a:pPr algn="r"/>
+            <a:pPr algn="r">
+              <a:defRPr>
+                <a:latin typeface="Roboto"/>
+              </a:defRPr>
+            </a:pPr>
             <a:r>
               <a:rPr sz="900" b="0">
                 <a:solidFill>
                   <a:srgbClr val="5F6F63"/>
                 </a:solidFill>
-                <a:latin typeface="Arial"/>
+                <a:latin typeface="Roboto"/>
               </a:rPr>
               <a:t>Slide 8 of 9</a:t>
             </a:r>
@@ -6953,7 +7352,11 @@
           <a:bodyPr rtlCol="0" anchor="ctr"/>
           <a:lstStyle/>
           <a:p>
-            <a:pPr algn="ctr"/>
+            <a:pPr algn="ctr">
+              <a:defRPr>
+                <a:latin typeface="Roboto"/>
+              </a:defRPr>
+            </a:pPr>
           </a:p>
         </p:txBody>
       </p:sp>
@@ -6979,12 +7382,17 @@
           </a:bodyPr>
           <a:lstStyle/>
           <a:p>
+            <a:pPr>
+              <a:defRPr>
+                <a:latin typeface="Roboto"/>
+              </a:defRPr>
+            </a:pPr>
             <a:r>
               <a:rPr sz="1000" b="0">
                 <a:solidFill>
                   <a:srgbClr val="5F6F63"/>
                 </a:solidFill>
-                <a:latin typeface="Arial"/>
+                <a:latin typeface="Roboto"/>
               </a:rPr>
               <a:t>Sample Community Services Ltd · What does each program really cost?</a:t>
             </a:r>
@@ -7013,12 +7421,17 @@
           </a:bodyPr>
           <a:lstStyle/>
           <a:p>
+            <a:pPr>
+              <a:defRPr>
+                <a:latin typeface="Roboto"/>
+              </a:defRPr>
+            </a:pPr>
             <a:r>
               <a:rPr sz="2400" b="1">
                 <a:solidFill>
                   <a:srgbClr val="25342A"/>
                 </a:solidFill>
-                <a:latin typeface="Arial"/>
+                <a:latin typeface="Roboto"/>
               </a:rPr>
               <a:t>Grant spending, by month · Spend $ · Every program at once</a:t>
             </a:r>
@@ -7047,12 +7460,17 @@
           </a:bodyPr>
           <a:lstStyle/>
           <a:p>
+            <a:pPr>
+              <a:defRPr>
+                <a:latin typeface="Roboto"/>
+              </a:defRPr>
+            </a:pPr>
             <a:r>
               <a:rPr sz="1200" b="0">
                 <a:solidFill>
                   <a:srgbClr val="5F6F63"/>
                 </a:solidFill>
-                <a:latin typeface="Arial"/>
+                <a:latin typeface="Roboto"/>
               </a:rPr>
               <a:t>Grant spending only (the program's direct cost). All programs includes grants that have finished.</a:t>
             </a:r>
@@ -7099,12 +7517,17 @@
           </a:bodyPr>
           <a:lstStyle/>
           <a:p>
+            <a:pPr>
+              <a:defRPr>
+                <a:latin typeface="Roboto"/>
+              </a:defRPr>
+            </a:pPr>
             <a:r>
               <a:rPr sz="900" b="0">
                 <a:solidFill>
                   <a:srgbClr val="5F6F63"/>
                 </a:solidFill>
-                <a:latin typeface="Arial"/>
+                <a:latin typeface="Roboto"/>
               </a:rPr>
               <a:t>program-cost.pptx</a:t>
             </a:r>
@@ -7133,13 +7556,17 @@
           </a:bodyPr>
           <a:lstStyle/>
           <a:p>
-            <a:pPr algn="ctr"/>
+            <a:pPr algn="ctr">
+              <a:defRPr>
+                <a:latin typeface="Roboto"/>
+              </a:defRPr>
+            </a:pPr>
             <a:r>
               <a:rPr sz="900" b="0">
                 <a:solidFill>
                   <a:srgbClr val="5F6F63"/>
                 </a:solidFill>
-                <a:latin typeface="Arial"/>
+                <a:latin typeface="Roboto"/>
               </a:rPr>
               <a:t>Data retrieved 2pm, Tue 6 Oct 2026 · Sample data</a:t>
             </a:r>
@@ -7168,13 +7595,17 @@
           </a:bodyPr>
           <a:lstStyle/>
           <a:p>
-            <a:pPr algn="r"/>
+            <a:pPr algn="r">
+              <a:defRPr>
+                <a:latin typeface="Roboto"/>
+              </a:defRPr>
+            </a:pPr>
             <a:r>
               <a:rPr sz="900" b="0">
                 <a:solidFill>
                   <a:srgbClr val="5F6F63"/>
                 </a:solidFill>
-                <a:latin typeface="Arial"/>
+                <a:latin typeface="Roboto"/>
               </a:rPr>
               <a:t>Slide 9 of 9</a:t>
             </a:r>

--- a/media/exports/reports/2026-01/program-cost.pptx
+++ b/media/exports/reports/2026-01/program-cost.pptx
@@ -6,14 +6,11 @@
   </p:sldMasterIdLst>
   <p:sldIdLst>
     <p:sldId id="256" r:id="rId7"/>
-    <p:sldId id="257" r:id="rId8"/>
-    <p:sldId id="258" r:id="rId9"/>
-    <p:sldId id="259" r:id="rId10"/>
-    <p:sldId id="260" r:id="rId11"/>
-    <p:sldId id="261" r:id="rId12"/>
-    <p:sldId id="262" r:id="rId13"/>
-    <p:sldId id="263" r:id="rId14"/>
-    <p:sldId id="264" r:id="rId15"/>
+    <p:sldId id="257" r:id="rId9"/>
+    <p:sldId id="258" r:id="rId10"/>
+    <p:sldId id="259" r:id="rId11"/>
+    <p:sldId id="260" r:id="rId12"/>
+    <p:sldId id="261" r:id="rId13"/>
   </p:sldIdLst>
   <p:sldSz cx="12191695" cy="6858000" type="screen4x3"/>
   <p:notesSz cx="6858000" cy="9144000"/>
@@ -119,8 +116,19 @@
 <c:chartSpace xmlns:c="http://schemas.openxmlformats.org/drawingml/2006/chart" xmlns:a="http://schemas.openxmlformats.org/drawingml/2006/main" xmlns:r="http://schemas.openxmlformats.org/officeDocument/2006/relationships">
   <c:date1904 val="0"/>
   <c:chart>
-    <c:autoTitleDeleted val="0"/>
+    <c:autoTitleDeleted val="1"/>
     <c:plotArea>
+      <c:layout>
+        <c:manualLayout>
+          <c:layoutTarget val="inner"/>
+          <c:xMode val="edge"/>
+          <c:yMode val="edge"/>
+          <c:x val="0.3"/>
+          <c:y val="0.03"/>
+          <c:w val="0.58"/>
+          <c:h val="0.88"/>
+        </c:manualLayout>
+      </c:layout>
       <c:barChart>
         <c:barDir val="bar"/>
         <c:grouping val="clustered"/>
@@ -133,7 +141,7 @@
               <c:strCache>
                 <c:ptCount val="1"/>
                 <c:pt idx="0">
-                  <c:v>Value</c:v>
+                  <c:v>$</c:v>
                 </c:pt>
               </c:strCache>
             </c:strRef>
@@ -219,7 +227,7 @@
             <a:lstStyle/>
             <a:p>
               <a:pPr>
-                <a:defRPr sz="1100"/>
+                <a:defRPr sz="1000"/>
               </a:pPr>
             </a:p>
           </c:txPr>
@@ -256,7 +264,7 @@
           <a:lstStyle/>
           <a:p>
             <a:pPr>
-              <a:defRPr sz="1200"/>
+              <a:defRPr sz="1100"/>
             </a:pPr>
           </a:p>
         </c:txPr>
@@ -269,7 +277,10 @@
       </c:catAx>
       <c:valAx>
         <c:axId val="-2113994440"/>
-        <c:scaling/>
+        <c:scaling>
+          <c:max val="65821.4"/>
+          <c:min val="0.0"/>
+        </c:scaling>
         <c:delete/>
         <c:axPos val="b"/>
         <c:majorTickMark val="out"/>
@@ -302,195 +313,21 @@
 <file path=ppt/charts/chart2.xml><?xml version="1.0" encoding="utf-8"?>
 <c:chartSpace xmlns:c="http://schemas.openxmlformats.org/drawingml/2006/chart" xmlns:a="http://schemas.openxmlformats.org/drawingml/2006/main" xmlns:r="http://schemas.openxmlformats.org/officeDocument/2006/relationships">
   <c:date1904 val="0"/>
-  <c:chart>
-    <c:autoTitleDeleted val="0"/>
-    <c:plotArea>
-      <c:barChart>
-        <c:barDir val="bar"/>
-        <c:grouping val="clustered"/>
-        <c:ser>
-          <c:idx val="0"/>
-          <c:order val="0"/>
-          <c:tx>
-            <c:strRef>
-              <c:f>Sheet1!$B$1</c:f>
-              <c:strCache>
-                <c:ptCount val="1"/>
-                <c:pt idx="0">
-                  <c:v>Value</c:v>
-                </c:pt>
-              </c:strCache>
-            </c:strRef>
-          </c:tx>
-          <c:dPt>
-            <c:idx val="0"/>
-            <c:spPr>
-              <a:solidFill>
-                <a:srgbClr val="0E9F6E"/>
-              </a:solidFill>
-            </c:spPr>
-          </c:dPt>
-          <c:dPt>
-            <c:idx val="1"/>
-            <c:spPr>
-              <a:solidFill>
-                <a:srgbClr val="0E9F6E"/>
-              </a:solidFill>
-            </c:spPr>
-          </c:dPt>
-          <c:dPt>
-            <c:idx val="2"/>
-            <c:spPr>
-              <a:solidFill>
-                <a:srgbClr val="0E9F6E"/>
-              </a:solidFill>
-            </c:spPr>
-          </c:dPt>
-          <c:dPt>
-            <c:idx val="3"/>
-            <c:spPr>
-              <a:solidFill>
-                <a:srgbClr val="0E9F6E"/>
-              </a:solidFill>
-            </c:spPr>
-          </c:dPt>
-          <c:cat>
-            <c:strRef>
-              <c:f>Sheet1!$A$2:$A$5</c:f>
-              <c:strCache>
-                <c:ptCount val="4"/>
-                <c:pt idx="0">
-                  <c:v>Community meals (2025-26)</c:v>
-                </c:pt>
-                <c:pt idx="1">
-                  <c:v>Digital literacy</c:v>
-                </c:pt>
-                <c:pt idx="2">
-                  <c:v>Youth outreach</c:v>
-                </c:pt>
-                <c:pt idx="3">
-                  <c:v>Housing support</c:v>
-                </c:pt>
-              </c:strCache>
-            </c:strRef>
-          </c:cat>
-          <c:val>
-            <c:numRef>
-              <c:f>Sheet1!$B$2:$B$5</c:f>
-              <c:numCache>
-                <c:formatCode>0.0"%";[Red](0.0"%")</c:formatCode>
-                <c:ptCount val="4"/>
-                <c:pt idx="0">
-                  <c:v>6.2</c:v>
-                </c:pt>
-                <c:pt idx="1">
-                  <c:v>7.4</c:v>
-                </c:pt>
-                <c:pt idx="2">
-                  <c:v>35.4</c:v>
-                </c:pt>
-                <c:pt idx="3">
-                  <c:v>51.0</c:v>
-                </c:pt>
-              </c:numCache>
-            </c:numRef>
-          </c:val>
-        </c:ser>
-        <c:dLbls>
-          <c:numFmt formatCode="0.0&quot;%&quot;;[Red](0.0&quot;%&quot;)" sourceLinked="0"/>
-          <c:txPr>
-            <a:bodyPr/>
-            <a:lstStyle/>
-            <a:p>
-              <a:pPr>
-                <a:defRPr sz="1100"/>
-              </a:pPr>
-            </a:p>
-          </c:txPr>
-          <c:dLblPos val="outEnd"/>
-          <c:showLegendKey val="0"/>
-          <c:showVal val="1"/>
-          <c:showCatName val="0"/>
-          <c:showSerName val="0"/>
-          <c:showPercent val="0"/>
-          <c:showBubbleSize val="0"/>
-          <c:showLeaderLines val="1"/>
-        </c:dLbls>
-        <c:gapWidth val="60"/>
-        <c:axId val="-2068027336"/>
-        <c:axId val="-2113994440"/>
-      </c:barChart>
-      <c:catAx>
-        <c:axId val="-2068027336"/>
-        <c:scaling>
-          <c:orientation val="minMax"/>
-        </c:scaling>
-        <c:delete val="0"/>
-        <c:axPos val="l"/>
-        <c:majorTickMark val="out"/>
-        <c:minorTickMark val="none"/>
-        <c:tickLblPos val="nextTo"/>
-        <c:spPr>
-          <a:ln>
-            <a:noFill/>
-          </a:ln>
-        </c:spPr>
-        <c:txPr>
-          <a:bodyPr/>
-          <a:lstStyle/>
-          <a:p>
-            <a:pPr>
-              <a:defRPr sz="1200"/>
-            </a:pPr>
-          </a:p>
-        </c:txPr>
-        <c:crossAx val="-2113994440"/>
-        <c:crosses val="autoZero"/>
-        <c:auto val="1"/>
-        <c:lblAlgn val="ctr"/>
-        <c:lblOffset val="100"/>
-        <c:noMultiLvlLbl val="0"/>
-      </c:catAx>
-      <c:valAx>
-        <c:axId val="-2113994440"/>
-        <c:scaling/>
-        <c:delete/>
-        <c:axPos val="b"/>
-        <c:majorTickMark val="out"/>
-        <c:minorTickMark val="none"/>
-        <c:tickLblPos val="nextTo"/>
-        <c:crossAx val="-2068027336"/>
-        <c:crosses val="autoZero"/>
-      </c:valAx>
-    </c:plotArea>
-    <c:dispBlanksAs val="gap"/>
-  </c:chart>
-  <c:txPr>
-    <a:bodyPr/>
-    <a:lstStyle/>
-    <a:p>
-      <a:pPr>
-        <a:defRPr sz="1800">
-          <a:latin typeface="Roboto"/>
-        </a:defRPr>
-      </a:pPr>
-      <a:endParaRPr lang="en-US"/>
-    </a:p>
-  </c:txPr>
-  <c:externalData r:id="rId1">
-    <c:autoUpdate val="0"/>
-  </c:externalData>
-</c:chartSpace>
-</file>
-
-<file path=ppt/charts/chart3.xml><?xml version="1.0" encoding="utf-8"?>
-<c:chartSpace xmlns:c="http://schemas.openxmlformats.org/drawingml/2006/chart" xmlns:a="http://schemas.openxmlformats.org/drawingml/2006/main" xmlns:r="http://schemas.openxmlformats.org/officeDocument/2006/relationships">
-  <c:date1904 val="0"/>
   <c:roundedCorners val="0"/>
   <c:chart>
-    <c:autoTitleDeleted val="0"/>
+    <c:autoTitleDeleted val="1"/>
     <c:plotArea>
-      <c:layout/>
+      <c:layout>
+        <c:manualLayout>
+          <c:layoutTarget val="inner"/>
+          <c:xMode val="edge"/>
+          <c:yMode val="edge"/>
+          <c:x val="0.11"/>
+          <c:y val="0.05"/>
+          <c:w val="0.86"/>
+          <c:h val="0.8"/>
+        </c:manualLayout>
+      </c:layout>
       <c:areaChart>
         <c:grouping val="standard"/>
         <c:varyColors val="0"/>
@@ -503,7 +340,7 @@
               <c:strCache>
                 <c:ptCount val="1"/>
                 <c:pt idx="0">
-                  <c:v>Value</c:v>
+                  <c:v>Spend $</c:v>
                 </c:pt>
               </c:strCache>
             </c:strRef>
@@ -583,52 +420,52 @@
                 <c:formatCode>$#,##0;[Red]($#,##0);"-"</c:formatCode>
                 <c:ptCount val="16"/>
                 <c:pt idx="0">
-                  <c:v>26600</c:v>
+                  <c:v>0</c:v>
                 </c:pt>
                 <c:pt idx="1">
-                  <c:v>31800</c:v>
+                  <c:v>0</c:v>
                 </c:pt>
                 <c:pt idx="2">
-                  <c:v>29700</c:v>
+                  <c:v>0</c:v>
                 </c:pt>
                 <c:pt idx="3">
-                  <c:v>62700</c:v>
+                  <c:v>0</c:v>
                 </c:pt>
                 <c:pt idx="4">
-                  <c:v>61700</c:v>
+                  <c:v>0</c:v>
                 </c:pt>
                 <c:pt idx="5">
-                  <c:v>54500</c:v>
+                  <c:v>0</c:v>
                 </c:pt>
                 <c:pt idx="6">
-                  <c:v>61500</c:v>
+                  <c:v>0</c:v>
                 </c:pt>
                 <c:pt idx="7">
-                  <c:v>61700</c:v>
+                  <c:v>0</c:v>
                 </c:pt>
                 <c:pt idx="8">
-                  <c:v>52200</c:v>
+                  <c:v>0</c:v>
                 </c:pt>
                 <c:pt idx="9">
-                  <c:v>59063</c:v>
+                  <c:v>0</c:v>
                 </c:pt>
                 <c:pt idx="10">
-                  <c:v>61544</c:v>
+                  <c:v>0</c:v>
                 </c:pt>
                 <c:pt idx="11">
-                  <c:v>62137</c:v>
+                  <c:v>0</c:v>
                 </c:pt>
                 <c:pt idx="12">
-                  <c:v>69185</c:v>
+                  <c:v>0</c:v>
                 </c:pt>
                 <c:pt idx="13">
-                  <c:v>70164</c:v>
+                  <c:v>0</c:v>
                 </c:pt>
                 <c:pt idx="14">
-                  <c:v>68793</c:v>
+                  <c:v>0</c:v>
                 </c:pt>
                 <c:pt idx="15">
-                  <c:v>59785</c:v>
+                  <c:v>30502</c:v>
                 </c:pt>
               </c:numCache>
             </c:numRef>
@@ -670,12 +507,15 @@
         <c:auto val="1"/>
         <c:lblAlgn val="ctr"/>
         <c:lblOffset val="100"/>
+        <c:tickLblSkip val="2"/>
         <c:noMultiLvlLbl val="0"/>
       </c:catAx>
       <c:valAx>
         <c:axId val="-2100718248"/>
         <c:scaling>
           <c:orientation val="minMax"/>
+          <c:max val="40000.0"/>
+          <c:min val="0.0"/>
         </c:scaling>
         <c:delete val="0"/>
         <c:axPos val="l"/>
@@ -709,6 +549,7 @@
         <c:crossAx val="-2101159928"/>
         <c:crosses val="autoZero"/>
         <c:crossBetween val="midCat"/>
+        <c:majorUnit val="10000.0"/>
       </c:valAx>
     </c:plotArea>
     <c:plotVisOnly val="1"/>
@@ -731,6 +572,1568 @@
     <c:autoUpdate val="0"/>
   </c:externalData>
 </c:chartSpace>
+</file>
+
+<file path=ppt/charts/chart3.xml><?xml version="1.0" encoding="utf-8"?>
+<c:chartSpace xmlns:c="http://schemas.openxmlformats.org/drawingml/2006/chart" xmlns:a="http://schemas.openxmlformats.org/drawingml/2006/main" xmlns:r="http://schemas.openxmlformats.org/officeDocument/2006/relationships">
+  <c:date1904 val="0"/>
+  <c:roundedCorners val="0"/>
+  <c:chart>
+    <c:autoTitleDeleted val="1"/>
+    <c:plotArea>
+      <c:layout>
+        <c:manualLayout>
+          <c:layoutTarget val="inner"/>
+          <c:xMode val="edge"/>
+          <c:yMode val="edge"/>
+          <c:x val="0.11"/>
+          <c:y val="0.05"/>
+          <c:w val="0.86"/>
+          <c:h val="0.8"/>
+        </c:manualLayout>
+      </c:layout>
+      <c:areaChart>
+        <c:grouping val="standard"/>
+        <c:varyColors val="0"/>
+        <c:ser>
+          <c:idx val="0"/>
+          <c:order val="0"/>
+          <c:tx>
+            <c:strRef>
+              <c:f>Sheet1!$B$1</c:f>
+              <c:strCache>
+                <c:ptCount val="1"/>
+                <c:pt idx="0">
+                  <c:v>Spend $</c:v>
+                </c:pt>
+              </c:strCache>
+            </c:strRef>
+          </c:tx>
+          <c:spPr>
+            <a:solidFill>
+              <a:srgbClr val="0E9F6E">
+                <a:alpha val="25000"/>
+              </a:srgbClr>
+            </a:solidFill>
+            <a:ln w="31750">
+              <a:solidFill>
+                <a:srgbClr val="0E9F6E"/>
+              </a:solidFill>
+            </a:ln>
+          </c:spPr>
+          <c:cat>
+            <c:strRef>
+              <c:f>Sheet1!$A$2:$A$17</c:f>
+              <c:strCache>
+                <c:ptCount val="16"/>
+                <c:pt idx="0">
+                  <c:v>Oct 24</c:v>
+                </c:pt>
+                <c:pt idx="1">
+                  <c:v>Nov 24</c:v>
+                </c:pt>
+                <c:pt idx="2">
+                  <c:v>Dec 24</c:v>
+                </c:pt>
+                <c:pt idx="3">
+                  <c:v>Jan 25</c:v>
+                </c:pt>
+                <c:pt idx="4">
+                  <c:v>Feb 25</c:v>
+                </c:pt>
+                <c:pt idx="5">
+                  <c:v>Mar 25</c:v>
+                </c:pt>
+                <c:pt idx="6">
+                  <c:v>Apr 25</c:v>
+                </c:pt>
+                <c:pt idx="7">
+                  <c:v>May 25</c:v>
+                </c:pt>
+                <c:pt idx="8">
+                  <c:v>Jun 25</c:v>
+                </c:pt>
+                <c:pt idx="9">
+                  <c:v>Jul 25</c:v>
+                </c:pt>
+                <c:pt idx="10">
+                  <c:v>Aug 25</c:v>
+                </c:pt>
+                <c:pt idx="11">
+                  <c:v>Sep 25</c:v>
+                </c:pt>
+                <c:pt idx="12">
+                  <c:v>Oct 25</c:v>
+                </c:pt>
+                <c:pt idx="13">
+                  <c:v>Nov 25</c:v>
+                </c:pt>
+                <c:pt idx="14">
+                  <c:v>Dec 25</c:v>
+                </c:pt>
+                <c:pt idx="15">
+                  <c:v>Jan 26</c:v>
+                </c:pt>
+              </c:strCache>
+            </c:strRef>
+          </c:cat>
+          <c:val>
+            <c:numRef>
+              <c:f>Sheet1!$B$2:$B$17</c:f>
+              <c:numCache>
+                <c:formatCode>$#,##0;[Red]($#,##0);"-"</c:formatCode>
+                <c:ptCount val="16"/>
+                <c:pt idx="0">
+                  <c:v>0</c:v>
+                </c:pt>
+                <c:pt idx="1">
+                  <c:v>0</c:v>
+                </c:pt>
+                <c:pt idx="2">
+                  <c:v>0</c:v>
+                </c:pt>
+                <c:pt idx="3">
+                  <c:v>0</c:v>
+                </c:pt>
+                <c:pt idx="4">
+                  <c:v>0</c:v>
+                </c:pt>
+                <c:pt idx="5">
+                  <c:v>0</c:v>
+                </c:pt>
+                <c:pt idx="6">
+                  <c:v>0</c:v>
+                </c:pt>
+                <c:pt idx="7">
+                  <c:v>0</c:v>
+                </c:pt>
+                <c:pt idx="8">
+                  <c:v>0</c:v>
+                </c:pt>
+                <c:pt idx="9">
+                  <c:v>17363</c:v>
+                </c:pt>
+                <c:pt idx="10">
+                  <c:v>21144</c:v>
+                </c:pt>
+                <c:pt idx="11">
+                  <c:v>17537</c:v>
+                </c:pt>
+                <c:pt idx="12">
+                  <c:v>21925</c:v>
+                </c:pt>
+                <c:pt idx="13">
+                  <c:v>21079</c:v>
+                </c:pt>
+                <c:pt idx="14">
+                  <c:v>19272</c:v>
+                </c:pt>
+                <c:pt idx="15">
+                  <c:v>21157</c:v>
+                </c:pt>
+              </c:numCache>
+            </c:numRef>
+          </c:val>
+        </c:ser>
+        <c:dLbls>
+          <c:showLegendKey val="0"/>
+          <c:showVal val="0"/>
+          <c:showCatName val="0"/>
+          <c:showSerName val="0"/>
+          <c:showPercent val="0"/>
+          <c:showBubbleSize val="0"/>
+        </c:dLbls>
+        <c:axId val="-2101159928"/>
+        <c:axId val="-2100718248"/>
+      </c:areaChart>
+      <c:catAx>
+        <c:axId val="-2101159928"/>
+        <c:scaling>
+          <c:orientation val="minMax"/>
+        </c:scaling>
+        <c:delete val="0"/>
+        <c:axPos val="b"/>
+        <c:numFmt formatCode="General" sourceLinked="1"/>
+        <c:majorTickMark val="out"/>
+        <c:minorTickMark val="none"/>
+        <c:tickLblPos val="nextTo"/>
+        <c:txPr>
+          <a:bodyPr/>
+          <a:lstStyle/>
+          <a:p>
+            <a:pPr>
+              <a:defRPr sz="1000"/>
+            </a:pPr>
+          </a:p>
+        </c:txPr>
+        <c:crossAx val="-2100718248"/>
+        <c:crosses val="autoZero"/>
+        <c:auto val="1"/>
+        <c:lblAlgn val="ctr"/>
+        <c:lblOffset val="100"/>
+        <c:tickLblSkip val="2"/>
+        <c:noMultiLvlLbl val="0"/>
+      </c:catAx>
+      <c:valAx>
+        <c:axId val="-2100718248"/>
+        <c:scaling>
+          <c:orientation val="minMax"/>
+          <c:max val="25000.0"/>
+          <c:min val="0.0"/>
+        </c:scaling>
+        <c:delete val="0"/>
+        <c:axPos val="l"/>
+        <c:majorGridlines>
+          <c:spPr>
+            <a:ln>
+              <a:solidFill>
+                <a:srgbClr val="E6EAE7"/>
+              </a:solidFill>
+            </a:ln>
+          </c:spPr>
+        </c:majorGridlines>
+        <c:numFmt formatCode="$#,##0;[Red]($#,##0);&quot;-&quot;" sourceLinked="0"/>
+        <c:majorTickMark val="out"/>
+        <c:minorTickMark val="none"/>
+        <c:tickLblPos val="nextTo"/>
+        <c:spPr>
+          <a:ln>
+            <a:noFill/>
+          </a:ln>
+        </c:spPr>
+        <c:txPr>
+          <a:bodyPr/>
+          <a:lstStyle/>
+          <a:p>
+            <a:pPr>
+              <a:defRPr sz="1000"/>
+            </a:pPr>
+          </a:p>
+        </c:txPr>
+        <c:crossAx val="-2101159928"/>
+        <c:crosses val="autoZero"/>
+        <c:crossBetween val="midCat"/>
+        <c:majorUnit val="5000.0"/>
+      </c:valAx>
+    </c:plotArea>
+    <c:plotVisOnly val="1"/>
+    <c:dispBlanksAs val="zero"/>
+    <c:showDLblsOverMax val="0"/>
+  </c:chart>
+  <c:txPr>
+    <a:bodyPr/>
+    <a:lstStyle/>
+    <a:p>
+      <a:pPr>
+        <a:defRPr sz="1800">
+          <a:latin typeface="Roboto"/>
+        </a:defRPr>
+      </a:pPr>
+      <a:endParaRPr/>
+    </a:p>
+  </c:txPr>
+  <c:externalData r:id="rId1">
+    <c:autoUpdate val="0"/>
+  </c:externalData>
+</c:chartSpace>
+</file>
+
+<file path=ppt/charts/chart4.xml><?xml version="1.0" encoding="utf-8"?>
+<c:chartSpace xmlns:c="http://schemas.openxmlformats.org/drawingml/2006/chart" xmlns:a="http://schemas.openxmlformats.org/drawingml/2006/main" xmlns:r="http://schemas.openxmlformats.org/officeDocument/2006/relationships">
+  <c:date1904 val="0"/>
+  <c:roundedCorners val="0"/>
+  <c:chart>
+    <c:autoTitleDeleted val="1"/>
+    <c:plotArea>
+      <c:layout>
+        <c:manualLayout>
+          <c:layoutTarget val="inner"/>
+          <c:xMode val="edge"/>
+          <c:yMode val="edge"/>
+          <c:x val="0.11"/>
+          <c:y val="0.05"/>
+          <c:w val="0.86"/>
+          <c:h val="0.8"/>
+        </c:manualLayout>
+      </c:layout>
+      <c:areaChart>
+        <c:grouping val="standard"/>
+        <c:varyColors val="0"/>
+        <c:ser>
+          <c:idx val="0"/>
+          <c:order val="0"/>
+          <c:tx>
+            <c:strRef>
+              <c:f>Sheet1!$B$1</c:f>
+              <c:strCache>
+                <c:ptCount val="1"/>
+                <c:pt idx="0">
+                  <c:v>Spend $</c:v>
+                </c:pt>
+              </c:strCache>
+            </c:strRef>
+          </c:tx>
+          <c:spPr>
+            <a:solidFill>
+              <a:srgbClr val="0E9F6E">
+                <a:alpha val="25000"/>
+              </a:srgbClr>
+            </a:solidFill>
+            <a:ln w="31750">
+              <a:solidFill>
+                <a:srgbClr val="0E9F6E"/>
+              </a:solidFill>
+            </a:ln>
+          </c:spPr>
+          <c:cat>
+            <c:strRef>
+              <c:f>Sheet1!$A$2:$A$17</c:f>
+              <c:strCache>
+                <c:ptCount val="16"/>
+                <c:pt idx="0">
+                  <c:v>Oct 24</c:v>
+                </c:pt>
+                <c:pt idx="1">
+                  <c:v>Nov 24</c:v>
+                </c:pt>
+                <c:pt idx="2">
+                  <c:v>Dec 24</c:v>
+                </c:pt>
+                <c:pt idx="3">
+                  <c:v>Jan 25</c:v>
+                </c:pt>
+                <c:pt idx="4">
+                  <c:v>Feb 25</c:v>
+                </c:pt>
+                <c:pt idx="5">
+                  <c:v>Mar 25</c:v>
+                </c:pt>
+                <c:pt idx="6">
+                  <c:v>Apr 25</c:v>
+                </c:pt>
+                <c:pt idx="7">
+                  <c:v>May 25</c:v>
+                </c:pt>
+                <c:pt idx="8">
+                  <c:v>Jun 25</c:v>
+                </c:pt>
+                <c:pt idx="9">
+                  <c:v>Jul 25</c:v>
+                </c:pt>
+                <c:pt idx="10">
+                  <c:v>Aug 25</c:v>
+                </c:pt>
+                <c:pt idx="11">
+                  <c:v>Sep 25</c:v>
+                </c:pt>
+                <c:pt idx="12">
+                  <c:v>Oct 25</c:v>
+                </c:pt>
+                <c:pt idx="13">
+                  <c:v>Nov 25</c:v>
+                </c:pt>
+                <c:pt idx="14">
+                  <c:v>Dec 25</c:v>
+                </c:pt>
+                <c:pt idx="15">
+                  <c:v>Jan 26</c:v>
+                </c:pt>
+              </c:strCache>
+            </c:strRef>
+          </c:cat>
+          <c:val>
+            <c:numRef>
+              <c:f>Sheet1!$B$2:$B$17</c:f>
+              <c:numCache>
+                <c:formatCode>$#,##0;[Red]($#,##0);"-"</c:formatCode>
+                <c:ptCount val="16"/>
+                <c:pt idx="0">
+                  <c:v>0</c:v>
+                </c:pt>
+                <c:pt idx="1">
+                  <c:v>0</c:v>
+                </c:pt>
+                <c:pt idx="2">
+                  <c:v>0</c:v>
+                </c:pt>
+                <c:pt idx="3">
+                  <c:v>0</c:v>
+                </c:pt>
+                <c:pt idx="4">
+                  <c:v>0</c:v>
+                </c:pt>
+                <c:pt idx="5">
+                  <c:v>0</c:v>
+                </c:pt>
+                <c:pt idx="6">
+                  <c:v>0</c:v>
+                </c:pt>
+                <c:pt idx="7">
+                  <c:v>0</c:v>
+                </c:pt>
+                <c:pt idx="8">
+                  <c:v>0</c:v>
+                </c:pt>
+                <c:pt idx="9">
+                  <c:v>0</c:v>
+                </c:pt>
+                <c:pt idx="10">
+                  <c:v>0</c:v>
+                </c:pt>
+                <c:pt idx="11">
+                  <c:v>0</c:v>
+                </c:pt>
+                <c:pt idx="12">
+                  <c:v>5160</c:v>
+                </c:pt>
+                <c:pt idx="13">
+                  <c:v>4585</c:v>
+                </c:pt>
+                <c:pt idx="14">
+                  <c:v>5221</c:v>
+                </c:pt>
+                <c:pt idx="15">
+                  <c:v>4426</c:v>
+                </c:pt>
+              </c:numCache>
+            </c:numRef>
+          </c:val>
+        </c:ser>
+        <c:dLbls>
+          <c:showLegendKey val="0"/>
+          <c:showVal val="0"/>
+          <c:showCatName val="0"/>
+          <c:showSerName val="0"/>
+          <c:showPercent val="0"/>
+          <c:showBubbleSize val="0"/>
+        </c:dLbls>
+        <c:axId val="-2101159928"/>
+        <c:axId val="-2100718248"/>
+      </c:areaChart>
+      <c:catAx>
+        <c:axId val="-2101159928"/>
+        <c:scaling>
+          <c:orientation val="minMax"/>
+        </c:scaling>
+        <c:delete val="0"/>
+        <c:axPos val="b"/>
+        <c:numFmt formatCode="General" sourceLinked="1"/>
+        <c:majorTickMark val="out"/>
+        <c:minorTickMark val="none"/>
+        <c:tickLblPos val="nextTo"/>
+        <c:txPr>
+          <a:bodyPr/>
+          <a:lstStyle/>
+          <a:p>
+            <a:pPr>
+              <a:defRPr sz="1000"/>
+            </a:pPr>
+          </a:p>
+        </c:txPr>
+        <c:crossAx val="-2100718248"/>
+        <c:crosses val="autoZero"/>
+        <c:auto val="1"/>
+        <c:lblAlgn val="ctr"/>
+        <c:lblOffset val="100"/>
+        <c:tickLblSkip val="2"/>
+        <c:noMultiLvlLbl val="0"/>
+      </c:catAx>
+      <c:valAx>
+        <c:axId val="-2100718248"/>
+        <c:scaling>
+          <c:orientation val="minMax"/>
+          <c:max val="6000.0"/>
+          <c:min val="0.0"/>
+        </c:scaling>
+        <c:delete val="0"/>
+        <c:axPos val="l"/>
+        <c:majorGridlines>
+          <c:spPr>
+            <a:ln>
+              <a:solidFill>
+                <a:srgbClr val="E6EAE7"/>
+              </a:solidFill>
+            </a:ln>
+          </c:spPr>
+        </c:majorGridlines>
+        <c:numFmt formatCode="$#,##0;[Red]($#,##0);&quot;-&quot;" sourceLinked="0"/>
+        <c:majorTickMark val="out"/>
+        <c:minorTickMark val="none"/>
+        <c:tickLblPos val="nextTo"/>
+        <c:spPr>
+          <a:ln>
+            <a:noFill/>
+          </a:ln>
+        </c:spPr>
+        <c:txPr>
+          <a:bodyPr/>
+          <a:lstStyle/>
+          <a:p>
+            <a:pPr>
+              <a:defRPr sz="1000"/>
+            </a:pPr>
+          </a:p>
+        </c:txPr>
+        <c:crossAx val="-2101159928"/>
+        <c:crosses val="autoZero"/>
+        <c:crossBetween val="midCat"/>
+        <c:majorUnit val="2000.0"/>
+      </c:valAx>
+    </c:plotArea>
+    <c:plotVisOnly val="1"/>
+    <c:dispBlanksAs val="zero"/>
+    <c:showDLblsOverMax val="0"/>
+  </c:chart>
+  <c:txPr>
+    <a:bodyPr/>
+    <a:lstStyle/>
+    <a:p>
+      <a:pPr>
+        <a:defRPr sz="1800">
+          <a:latin typeface="Roboto"/>
+        </a:defRPr>
+      </a:pPr>
+      <a:endParaRPr/>
+    </a:p>
+  </c:txPr>
+  <c:externalData r:id="rId1">
+    <c:autoUpdate val="0"/>
+  </c:externalData>
+</c:chartSpace>
+</file>
+
+<file path=ppt/charts/chart5.xml><?xml version="1.0" encoding="utf-8"?>
+<c:chartSpace xmlns:c="http://schemas.openxmlformats.org/drawingml/2006/chart" xmlns:a="http://schemas.openxmlformats.org/drawingml/2006/main" xmlns:r="http://schemas.openxmlformats.org/officeDocument/2006/relationships">
+  <c:date1904 val="0"/>
+  <c:roundedCorners val="0"/>
+  <c:chart>
+    <c:autoTitleDeleted val="1"/>
+    <c:plotArea>
+      <c:layout>
+        <c:manualLayout>
+          <c:layoutTarget val="inner"/>
+          <c:xMode val="edge"/>
+          <c:yMode val="edge"/>
+          <c:x val="0.11"/>
+          <c:y val="0.05"/>
+          <c:w val="0.86"/>
+          <c:h val="0.8"/>
+        </c:manualLayout>
+      </c:layout>
+      <c:areaChart>
+        <c:grouping val="standard"/>
+        <c:varyColors val="0"/>
+        <c:ser>
+          <c:idx val="0"/>
+          <c:order val="0"/>
+          <c:tx>
+            <c:strRef>
+              <c:f>Sheet1!$B$1</c:f>
+              <c:strCache>
+                <c:ptCount val="1"/>
+                <c:pt idx="0">
+                  <c:v>Spend $</c:v>
+                </c:pt>
+              </c:strCache>
+            </c:strRef>
+          </c:tx>
+          <c:spPr>
+            <a:solidFill>
+              <a:srgbClr val="0E9F6E">
+                <a:alpha val="25000"/>
+              </a:srgbClr>
+            </a:solidFill>
+            <a:ln w="31750">
+              <a:solidFill>
+                <a:srgbClr val="0E9F6E"/>
+              </a:solidFill>
+            </a:ln>
+          </c:spPr>
+          <c:cat>
+            <c:strRef>
+              <c:f>Sheet1!$A$2:$A$17</c:f>
+              <c:strCache>
+                <c:ptCount val="16"/>
+                <c:pt idx="0">
+                  <c:v>Oct 24</c:v>
+                </c:pt>
+                <c:pt idx="1">
+                  <c:v>Nov 24</c:v>
+                </c:pt>
+                <c:pt idx="2">
+                  <c:v>Dec 24</c:v>
+                </c:pt>
+                <c:pt idx="3">
+                  <c:v>Jan 25</c:v>
+                </c:pt>
+                <c:pt idx="4">
+                  <c:v>Feb 25</c:v>
+                </c:pt>
+                <c:pt idx="5">
+                  <c:v>Mar 25</c:v>
+                </c:pt>
+                <c:pt idx="6">
+                  <c:v>Apr 25</c:v>
+                </c:pt>
+                <c:pt idx="7">
+                  <c:v>May 25</c:v>
+                </c:pt>
+                <c:pt idx="8">
+                  <c:v>Jun 25</c:v>
+                </c:pt>
+                <c:pt idx="9">
+                  <c:v>Jul 25</c:v>
+                </c:pt>
+                <c:pt idx="10">
+                  <c:v>Aug 25</c:v>
+                </c:pt>
+                <c:pt idx="11">
+                  <c:v>Sep 25</c:v>
+                </c:pt>
+                <c:pt idx="12">
+                  <c:v>Oct 25</c:v>
+                </c:pt>
+                <c:pt idx="13">
+                  <c:v>Nov 25</c:v>
+                </c:pt>
+                <c:pt idx="14">
+                  <c:v>Dec 25</c:v>
+                </c:pt>
+                <c:pt idx="15">
+                  <c:v>Jan 26</c:v>
+                </c:pt>
+              </c:strCache>
+            </c:strRef>
+          </c:cat>
+          <c:val>
+            <c:numRef>
+              <c:f>Sheet1!$B$2:$B$17</c:f>
+              <c:numCache>
+                <c:formatCode>$#,##0;[Red]($#,##0);"-"</c:formatCode>
+                <c:ptCount val="16"/>
+                <c:pt idx="0">
+                  <c:v>0</c:v>
+                </c:pt>
+                <c:pt idx="1">
+                  <c:v>0</c:v>
+                </c:pt>
+                <c:pt idx="2">
+                  <c:v>0</c:v>
+                </c:pt>
+                <c:pt idx="3">
+                  <c:v>0</c:v>
+                </c:pt>
+                <c:pt idx="4">
+                  <c:v>0</c:v>
+                </c:pt>
+                <c:pt idx="5">
+                  <c:v>0</c:v>
+                </c:pt>
+                <c:pt idx="6">
+                  <c:v>0</c:v>
+                </c:pt>
+                <c:pt idx="7">
+                  <c:v>0</c:v>
+                </c:pt>
+                <c:pt idx="8">
+                  <c:v>0</c:v>
+                </c:pt>
+                <c:pt idx="9">
+                  <c:v>3400</c:v>
+                </c:pt>
+                <c:pt idx="10">
+                  <c:v>3500</c:v>
+                </c:pt>
+                <c:pt idx="11">
+                  <c:v>4000</c:v>
+                </c:pt>
+                <c:pt idx="12">
+                  <c:v>3200</c:v>
+                </c:pt>
+                <c:pt idx="13">
+                  <c:v>3100</c:v>
+                </c:pt>
+                <c:pt idx="14">
+                  <c:v>3800</c:v>
+                </c:pt>
+                <c:pt idx="15">
+                  <c:v>3700</c:v>
+                </c:pt>
+              </c:numCache>
+            </c:numRef>
+          </c:val>
+        </c:ser>
+        <c:dLbls>
+          <c:showLegendKey val="0"/>
+          <c:showVal val="0"/>
+          <c:showCatName val="0"/>
+          <c:showSerName val="0"/>
+          <c:showPercent val="0"/>
+          <c:showBubbleSize val="0"/>
+        </c:dLbls>
+        <c:axId val="-2101159928"/>
+        <c:axId val="-2100718248"/>
+      </c:areaChart>
+      <c:catAx>
+        <c:axId val="-2101159928"/>
+        <c:scaling>
+          <c:orientation val="minMax"/>
+        </c:scaling>
+        <c:delete val="0"/>
+        <c:axPos val="b"/>
+        <c:numFmt formatCode="General" sourceLinked="1"/>
+        <c:majorTickMark val="out"/>
+        <c:minorTickMark val="none"/>
+        <c:tickLblPos val="nextTo"/>
+        <c:txPr>
+          <a:bodyPr/>
+          <a:lstStyle/>
+          <a:p>
+            <a:pPr>
+              <a:defRPr sz="1000"/>
+            </a:pPr>
+          </a:p>
+        </c:txPr>
+        <c:crossAx val="-2100718248"/>
+        <c:crosses val="autoZero"/>
+        <c:auto val="1"/>
+        <c:lblAlgn val="ctr"/>
+        <c:lblOffset val="100"/>
+        <c:tickLblSkip val="2"/>
+        <c:noMultiLvlLbl val="0"/>
+      </c:catAx>
+      <c:valAx>
+        <c:axId val="-2100718248"/>
+        <c:scaling>
+          <c:orientation val="minMax"/>
+          <c:max val="5000.0"/>
+          <c:min val="0.0"/>
+        </c:scaling>
+        <c:delete val="0"/>
+        <c:axPos val="l"/>
+        <c:majorGridlines>
+          <c:spPr>
+            <a:ln>
+              <a:solidFill>
+                <a:srgbClr val="E6EAE7"/>
+              </a:solidFill>
+            </a:ln>
+          </c:spPr>
+        </c:majorGridlines>
+        <c:numFmt formatCode="$#,##0;[Red]($#,##0);&quot;-&quot;" sourceLinked="0"/>
+        <c:majorTickMark val="out"/>
+        <c:minorTickMark val="none"/>
+        <c:tickLblPos val="nextTo"/>
+        <c:spPr>
+          <a:ln>
+            <a:noFill/>
+          </a:ln>
+        </c:spPr>
+        <c:txPr>
+          <a:bodyPr/>
+          <a:lstStyle/>
+          <a:p>
+            <a:pPr>
+              <a:defRPr sz="1000"/>
+            </a:pPr>
+          </a:p>
+        </c:txPr>
+        <c:crossAx val="-2101159928"/>
+        <c:crosses val="autoZero"/>
+        <c:crossBetween val="midCat"/>
+        <c:majorUnit val="1000.0"/>
+      </c:valAx>
+    </c:plotArea>
+    <c:plotVisOnly val="1"/>
+    <c:dispBlanksAs val="zero"/>
+    <c:showDLblsOverMax val="0"/>
+  </c:chart>
+  <c:txPr>
+    <a:bodyPr/>
+    <a:lstStyle/>
+    <a:p>
+      <a:pPr>
+        <a:defRPr sz="1800">
+          <a:latin typeface="Roboto"/>
+        </a:defRPr>
+      </a:pPr>
+      <a:endParaRPr/>
+    </a:p>
+  </c:txPr>
+  <c:externalData r:id="rId1">
+    <c:autoUpdate val="0"/>
+  </c:externalData>
+</c:chartSpace>
+</file>
+
+<file path=ppt/notesMasters/notesMaster1.xml><?xml version="1.0" encoding="utf-8"?>
+<p:notesMaster xmlns:a="http://schemas.openxmlformats.org/drawingml/2006/main" xmlns:p="http://schemas.openxmlformats.org/presentationml/2006/main" xmlns:r="http://schemas.openxmlformats.org/officeDocument/2006/relationships">
+  <p:cSld>
+    <p:bg>
+      <p:bgRef idx="1001">
+        <a:schemeClr val="bg1"/>
+      </p:bgRef>
+    </p:bg>
+    <p:spTree>
+      <p:nvGrpSpPr>
+        <p:cNvPr id="1" name=""/>
+        <p:cNvGrpSpPr/>
+        <p:nvPr/>
+      </p:nvGrpSpPr>
+      <p:grpSpPr>
+        <a:xfrm>
+          <a:off x="0" y="0"/>
+          <a:ext cx="0" cy="0"/>
+          <a:chOff x="0" y="0"/>
+          <a:chExt cx="0" cy="0"/>
+        </a:xfrm>
+      </p:grpSpPr>
+      <p:sp>
+        <p:nvSpPr>
+          <p:cNvPr id="2" name="Header Placeholder 1"/>
+          <p:cNvSpPr>
+            <a:spLocks noGrp="1"/>
+          </p:cNvSpPr>
+          <p:nvPr>
+            <p:ph type="hdr" sz="quarter"/>
+          </p:nvPr>
+        </p:nvSpPr>
+        <p:spPr>
+          <a:xfrm>
+            <a:off x="0" y="0"/>
+            <a:ext cx="2971800" cy="457200"/>
+          </a:xfrm>
+          <a:prstGeom prst="rect">
+            <a:avLst/>
+          </a:prstGeom>
+        </p:spPr>
+        <p:txBody>
+          <a:bodyPr vert="horz" lIns="91440" tIns="45720" rIns="91440" bIns="45720" rtlCol="0"/>
+          <a:lstStyle>
+            <a:lvl1pPr algn="l">
+              <a:defRPr sz="1200"/>
+            </a:lvl1pPr>
+          </a:lstStyle>
+          <a:p>
+            <a:endParaRPr lang="en-US"/>
+          </a:p>
+        </p:txBody>
+      </p:sp>
+      <p:sp>
+        <p:nvSpPr>
+          <p:cNvPr id="3" name="Date Placeholder 2"/>
+          <p:cNvSpPr>
+            <a:spLocks noGrp="1"/>
+          </p:cNvSpPr>
+          <p:nvPr>
+            <p:ph type="dt" idx="1"/>
+          </p:nvPr>
+        </p:nvSpPr>
+        <p:spPr>
+          <a:xfrm>
+            <a:off x="3884613" y="0"/>
+            <a:ext cx="2971800" cy="457200"/>
+          </a:xfrm>
+          <a:prstGeom prst="rect">
+            <a:avLst/>
+          </a:prstGeom>
+        </p:spPr>
+        <p:txBody>
+          <a:bodyPr vert="horz" lIns="91440" tIns="45720" rIns="91440" bIns="45720" rtlCol="0"/>
+          <a:lstStyle>
+            <a:lvl1pPr algn="r">
+              <a:defRPr sz="1200"/>
+            </a:lvl1pPr>
+          </a:lstStyle>
+          <a:p>
+            <a:fld id="{0F89C1C7-3DCD-1040-A9CF-14679D8B5DDD}" type="datetimeFigureOut">
+              <a:rPr lang="en-US" smtClean="0"/>
+              <a:t>10/17/16</a:t>
+            </a:fld>
+            <a:endParaRPr lang="en-US"/>
+          </a:p>
+        </p:txBody>
+      </p:sp>
+      <p:sp>
+        <p:nvSpPr>
+          <p:cNvPr id="4" name="Slide Image Placeholder 3"/>
+          <p:cNvSpPr>
+            <a:spLocks noGrp="1" noRot="1" noChangeAspect="1"/>
+          </p:cNvSpPr>
+          <p:nvPr>
+            <p:ph type="sldImg" idx="2"/>
+          </p:nvPr>
+        </p:nvSpPr>
+        <p:spPr>
+          <a:xfrm>
+            <a:off x="1143000" y="685800"/>
+            <a:ext cx="4572000" cy="3429000"/>
+          </a:xfrm>
+          <a:prstGeom prst="rect">
+            <a:avLst/>
+          </a:prstGeom>
+          <a:noFill/>
+          <a:ln w="12700">
+            <a:solidFill>
+              <a:prstClr val="black"/>
+            </a:solidFill>
+          </a:ln>
+        </p:spPr>
+        <p:txBody>
+          <a:bodyPr vert="horz" lIns="91440" tIns="45720" rIns="91440" bIns="45720" rtlCol="0" anchor="ctr"/>
+          <a:lstStyle/>
+          <a:p>
+            <a:endParaRPr lang="en-US"/>
+          </a:p>
+        </p:txBody>
+      </p:sp>
+      <p:sp>
+        <p:nvSpPr>
+          <p:cNvPr id="5" name="Notes Placeholder 4"/>
+          <p:cNvSpPr>
+            <a:spLocks noGrp="1"/>
+          </p:cNvSpPr>
+          <p:nvPr>
+            <p:ph type="body" sz="quarter" idx="3"/>
+          </p:nvPr>
+        </p:nvSpPr>
+        <p:spPr>
+          <a:xfrm>
+            <a:off x="685800" y="4343400"/>
+            <a:ext cx="5486400" cy="4114800"/>
+          </a:xfrm>
+          <a:prstGeom prst="rect">
+            <a:avLst/>
+          </a:prstGeom>
+        </p:spPr>
+        <p:txBody>
+          <a:bodyPr vert="horz" lIns="91440" tIns="45720" rIns="91440" bIns="45720" rtlCol="0"/>
+          <a:lstStyle/>
+          <a:p>
+            <a:pPr lvl="0"/>
+            <a:r>
+              <a:rPr lang="en-US" smtClean="0"/>
+              <a:t>Click to edit Master text styles</a:t>
+            </a:r>
+          </a:p>
+          <a:p>
+            <a:pPr lvl="1"/>
+            <a:r>
+              <a:rPr lang="en-US" smtClean="0"/>
+              <a:t>Second level</a:t>
+            </a:r>
+          </a:p>
+          <a:p>
+            <a:pPr lvl="2"/>
+            <a:r>
+              <a:rPr lang="en-US" smtClean="0"/>
+              <a:t>Third level</a:t>
+            </a:r>
+          </a:p>
+          <a:p>
+            <a:pPr lvl="3"/>
+            <a:r>
+              <a:rPr lang="en-US" smtClean="0"/>
+              <a:t>Fourth level</a:t>
+            </a:r>
+          </a:p>
+          <a:p>
+            <a:pPr lvl="4"/>
+            <a:r>
+              <a:rPr lang="en-US" smtClean="0"/>
+              <a:t>Fifth level</a:t>
+            </a:r>
+            <a:endParaRPr lang="en-US"/>
+          </a:p>
+        </p:txBody>
+      </p:sp>
+      <p:sp>
+        <p:nvSpPr>
+          <p:cNvPr id="6" name="Footer Placeholder 5"/>
+          <p:cNvSpPr>
+            <a:spLocks noGrp="1"/>
+          </p:cNvSpPr>
+          <p:nvPr>
+            <p:ph type="ftr" sz="quarter" idx="4"/>
+          </p:nvPr>
+        </p:nvSpPr>
+        <p:spPr>
+          <a:xfrm>
+            <a:off x="0" y="8685213"/>
+            <a:ext cx="2971800" cy="457200"/>
+          </a:xfrm>
+          <a:prstGeom prst="rect">
+            <a:avLst/>
+          </a:prstGeom>
+        </p:spPr>
+        <p:txBody>
+          <a:bodyPr vert="horz" lIns="91440" tIns="45720" rIns="91440" bIns="45720" rtlCol="0" anchor="b"/>
+          <a:lstStyle>
+            <a:lvl1pPr algn="l">
+              <a:defRPr sz="1200"/>
+            </a:lvl1pPr>
+          </a:lstStyle>
+          <a:p>
+            <a:endParaRPr lang="en-US"/>
+          </a:p>
+        </p:txBody>
+      </p:sp>
+      <p:sp>
+        <p:nvSpPr>
+          <p:cNvPr id="7" name="Slide Number Placeholder 6"/>
+          <p:cNvSpPr>
+            <a:spLocks noGrp="1"/>
+          </p:cNvSpPr>
+          <p:nvPr>
+            <p:ph type="sldNum" sz="quarter" idx="5"/>
+          </p:nvPr>
+        </p:nvSpPr>
+        <p:spPr>
+          <a:xfrm>
+            <a:off x="3884613" y="8685213"/>
+            <a:ext cx="2971800" cy="457200"/>
+          </a:xfrm>
+          <a:prstGeom prst="rect">
+            <a:avLst/>
+          </a:prstGeom>
+        </p:spPr>
+        <p:txBody>
+          <a:bodyPr vert="horz" lIns="91440" tIns="45720" rIns="91440" bIns="45720" rtlCol="0" anchor="b"/>
+          <a:lstStyle>
+            <a:lvl1pPr algn="r">
+              <a:defRPr sz="1200"/>
+            </a:lvl1pPr>
+          </a:lstStyle>
+          <a:p>
+            <a:fld id="{BB5E49A5-4136-284D-997B-48E1D791AD67}" type="slidenum">
+              <a:rPr lang="en-US" smtClean="0"/>
+              <a:t>‹#›</a:t>
+            </a:fld>
+            <a:endParaRPr lang="en-US"/>
+          </a:p>
+        </p:txBody>
+      </p:sp>
+    </p:spTree>
+    <p:extLst>
+      <p:ext uri="{BB962C8B-B14F-4D97-AF65-F5344CB8AC3E}">
+        <p14:creationId xmlns:p14="http://schemas.microsoft.com/office/powerpoint/2010/main" val="2623252185"/>
+      </p:ext>
+    </p:extLst>
+  </p:cSld>
+  <p:clrMap bg1="lt1" tx1="dk1" bg2="lt2" tx2="dk2" accent1="accent1" accent2="accent2" accent3="accent3" accent4="accent4" accent5="accent5" accent6="accent6" hlink="hlink" folHlink="folHlink"/>
+  <p:notesStyle>
+    <a:lvl1pPr marL="0" algn="l" defTabSz="457200" rtl="0" eaLnBrk="1" latinLnBrk="0" hangingPunct="1">
+      <a:defRPr sz="1200" kern="1200">
+        <a:solidFill>
+          <a:schemeClr val="tx1"/>
+        </a:solidFill>
+        <a:latin typeface="+mn-lt"/>
+        <a:ea typeface="+mn-ea"/>
+        <a:cs typeface="+mn-cs"/>
+      </a:defRPr>
+    </a:lvl1pPr>
+    <a:lvl2pPr marL="457200" algn="l" defTabSz="457200" rtl="0" eaLnBrk="1" latinLnBrk="0" hangingPunct="1">
+      <a:defRPr sz="1200" kern="1200">
+        <a:solidFill>
+          <a:schemeClr val="tx1"/>
+        </a:solidFill>
+        <a:latin typeface="+mn-lt"/>
+        <a:ea typeface="+mn-ea"/>
+        <a:cs typeface="+mn-cs"/>
+      </a:defRPr>
+    </a:lvl2pPr>
+    <a:lvl3pPr marL="914400" algn="l" defTabSz="457200" rtl="0" eaLnBrk="1" latinLnBrk="0" hangingPunct="1">
+      <a:defRPr sz="1200" kern="1200">
+        <a:solidFill>
+          <a:schemeClr val="tx1"/>
+        </a:solidFill>
+        <a:latin typeface="+mn-lt"/>
+        <a:ea typeface="+mn-ea"/>
+        <a:cs typeface="+mn-cs"/>
+      </a:defRPr>
+    </a:lvl3pPr>
+    <a:lvl4pPr marL="1371600" algn="l" defTabSz="457200" rtl="0" eaLnBrk="1" latinLnBrk="0" hangingPunct="1">
+      <a:defRPr sz="1200" kern="1200">
+        <a:solidFill>
+          <a:schemeClr val="tx1"/>
+        </a:solidFill>
+        <a:latin typeface="+mn-lt"/>
+        <a:ea typeface="+mn-ea"/>
+        <a:cs typeface="+mn-cs"/>
+      </a:defRPr>
+    </a:lvl4pPr>
+    <a:lvl5pPr marL="1828800" algn="l" defTabSz="457200" rtl="0" eaLnBrk="1" latinLnBrk="0" hangingPunct="1">
+      <a:defRPr sz="1200" kern="1200">
+        <a:solidFill>
+          <a:schemeClr val="tx1"/>
+        </a:solidFill>
+        <a:latin typeface="+mn-lt"/>
+        <a:ea typeface="+mn-ea"/>
+        <a:cs typeface="+mn-cs"/>
+      </a:defRPr>
+    </a:lvl5pPr>
+    <a:lvl6pPr marL="2286000" algn="l" defTabSz="457200" rtl="0" eaLnBrk="1" latinLnBrk="0" hangingPunct="1">
+      <a:defRPr sz="1200" kern="1200">
+        <a:solidFill>
+          <a:schemeClr val="tx1"/>
+        </a:solidFill>
+        <a:latin typeface="+mn-lt"/>
+        <a:ea typeface="+mn-ea"/>
+        <a:cs typeface="+mn-cs"/>
+      </a:defRPr>
+    </a:lvl6pPr>
+    <a:lvl7pPr marL="2743200" algn="l" defTabSz="457200" rtl="0" eaLnBrk="1" latinLnBrk="0" hangingPunct="1">
+      <a:defRPr sz="1200" kern="1200">
+        <a:solidFill>
+          <a:schemeClr val="tx1"/>
+        </a:solidFill>
+        <a:latin typeface="+mn-lt"/>
+        <a:ea typeface="+mn-ea"/>
+        <a:cs typeface="+mn-cs"/>
+      </a:defRPr>
+    </a:lvl7pPr>
+    <a:lvl8pPr marL="3200400" algn="l" defTabSz="457200" rtl="0" eaLnBrk="1" latinLnBrk="0" hangingPunct="1">
+      <a:defRPr sz="1200" kern="1200">
+        <a:solidFill>
+          <a:schemeClr val="tx1"/>
+        </a:solidFill>
+        <a:latin typeface="+mn-lt"/>
+        <a:ea typeface="+mn-ea"/>
+        <a:cs typeface="+mn-cs"/>
+      </a:defRPr>
+    </a:lvl8pPr>
+    <a:lvl9pPr marL="3657600" algn="l" defTabSz="457200" rtl="0" eaLnBrk="1" latinLnBrk="0" hangingPunct="1">
+      <a:defRPr sz="1200" kern="1200">
+        <a:solidFill>
+          <a:schemeClr val="tx1"/>
+        </a:solidFill>
+        <a:latin typeface="+mn-lt"/>
+        <a:ea typeface="+mn-ea"/>
+        <a:cs typeface="+mn-cs"/>
+      </a:defRPr>
+    </a:lvl9pPr>
+  </p:notesStyle>
+</p:notesMaster>
+</file>
+
+<file path=ppt/notesSlides/notesSlide1.xml><?xml version="1.0" encoding="utf-8"?>
+<p:notes xmlns:a="http://schemas.openxmlformats.org/drawingml/2006/main" xmlns:p="http://schemas.openxmlformats.org/presentationml/2006/main" xmlns:r="http://schemas.openxmlformats.org/officeDocument/2006/relationships">
+  <p:cSld>
+    <p:spTree>
+      <p:nvGrpSpPr>
+        <p:cNvPr id="1" name=""/>
+        <p:cNvGrpSpPr/>
+        <p:nvPr/>
+      </p:nvGrpSpPr>
+      <p:grpSpPr>
+        <a:xfrm>
+          <a:off x="0" y="0"/>
+          <a:ext cx="0" cy="0"/>
+          <a:chOff x="0" y="0"/>
+          <a:chExt cx="0" cy="0"/>
+        </a:xfrm>
+      </p:grpSpPr>
+      <p:sp>
+        <p:nvSpPr>
+          <p:cNvPr id="2" name="Slide Image Placeholder 1"/>
+          <p:cNvSpPr>
+            <a:spLocks noGrp="1"/>
+          </p:cNvSpPr>
+          <p:nvPr>
+            <p:ph type="sldImg" idx="2"/>
+          </p:nvPr>
+        </p:nvSpPr>
+        <p:spPr/>
+      </p:sp>
+      <p:sp>
+        <p:nvSpPr>
+          <p:cNvPr id="3" name="Notes Placeholder 2"/>
+          <p:cNvSpPr>
+            <a:spLocks noGrp="1"/>
+          </p:cNvSpPr>
+          <p:nvPr>
+            <p:ph type="body" idx="3" sz="quarter"/>
+          </p:nvPr>
+        </p:nvSpPr>
+        <p:spPr/>
+        <p:txBody>
+          <a:bodyPr/>
+          <a:lstStyle/>
+          <a:p>
+            <a:r>
+              <a:t>What does each program really cost?. Sample Community Services Ltd. Period: January 2026. Each program's full cost: what its grant pays for, plus its fair share of the costs no single grant covers (untied program costs and administration, shared by grant spending). Pick a program and every chart and note follows it.</a:t>
+            </a:r>
+          </a:p>
+        </p:txBody>
+      </p:sp>
+      <p:sp>
+        <p:nvSpPr>
+          <p:cNvPr id="4" name="Slide Number Placeholder 3"/>
+          <p:cNvSpPr>
+            <a:spLocks noGrp="1"/>
+          </p:cNvSpPr>
+          <p:nvPr>
+            <p:ph type="sldNum" idx="5" sz="quarter"/>
+          </p:nvPr>
+        </p:nvSpPr>
+        <p:spPr/>
+      </p:sp>
+    </p:spTree>
+  </p:cSld>
+  <p:clrMapOvr>
+    <a:masterClrMapping/>
+  </p:clrMapOvr>
+</p:notes>
+</file>
+
+<file path=ppt/notesSlides/notesSlide2.xml><?xml version="1.0" encoding="utf-8"?>
+<p:notes xmlns:a="http://schemas.openxmlformats.org/drawingml/2006/main" xmlns:p="http://schemas.openxmlformats.org/presentationml/2006/main" xmlns:r="http://schemas.openxmlformats.org/officeDocument/2006/relationships">
+  <p:cSld>
+    <p:spTree>
+      <p:nvGrpSpPr>
+        <p:cNvPr id="1" name=""/>
+        <p:cNvGrpSpPr/>
+        <p:nvPr/>
+      </p:nvGrpSpPr>
+      <p:grpSpPr>
+        <a:xfrm>
+          <a:off x="0" y="0"/>
+          <a:ext cx="0" cy="0"/>
+          <a:chOff x="0" y="0"/>
+          <a:chExt cx="0" cy="0"/>
+        </a:xfrm>
+      </p:grpSpPr>
+      <p:sp>
+        <p:nvSpPr>
+          <p:cNvPr id="2" name="Slide Image Placeholder 1"/>
+          <p:cNvSpPr>
+            <a:spLocks noGrp="1"/>
+          </p:cNvSpPr>
+          <p:nvPr>
+            <p:ph type="sldImg" idx="2"/>
+          </p:nvPr>
+        </p:nvSpPr>
+        <p:spPr/>
+      </p:sp>
+      <p:sp>
+        <p:nvSpPr>
+          <p:cNvPr id="3" name="Notes Placeholder 2"/>
+          <p:cNvSpPr>
+            <a:spLocks noGrp="1"/>
+          </p:cNvSpPr>
+          <p:nvPr>
+            <p:ph type="body" idx="3" sz="quarter"/>
+          </p:nvPr>
+        </p:nvSpPr>
+        <p:spPr/>
+        <p:txBody>
+          <a:bodyPr/>
+          <a:lstStyle/>
+          <a:p>
+            <a:r>
+              <a:t>All programs. Housing support is the biggest program: $57,236 in January once its share of untied program costs and administration is added to $30,502 of grant spending. Shared costs add 87.6% on top of grant spending across all programs. The full cost (not just the grant line) is the number for renewal applications, where the funder lets you recover a share of overheads. Pick a program above to see it on its own.</a:t>
+            </a:r>
+          </a:p>
+        </p:txBody>
+      </p:sp>
+      <p:sp>
+        <p:nvSpPr>
+          <p:cNvPr id="4" name="Slide Number Placeholder 3"/>
+          <p:cNvSpPr>
+            <a:spLocks noGrp="1"/>
+          </p:cNvSpPr>
+          <p:nvPr>
+            <p:ph type="sldNum" idx="5" sz="quarter"/>
+          </p:nvPr>
+        </p:nvSpPr>
+        <p:spPr/>
+      </p:sp>
+    </p:spTree>
+  </p:cSld>
+  <p:clrMapOvr>
+    <a:masterClrMapping/>
+  </p:clrMapOvr>
+</p:notes>
+</file>
+
+<file path=ppt/notesSlides/notesSlide3.xml><?xml version="1.0" encoding="utf-8"?>
+<p:notes xmlns:a="http://schemas.openxmlformats.org/drawingml/2006/main" xmlns:p="http://schemas.openxmlformats.org/presentationml/2006/main" xmlns:r="http://schemas.openxmlformats.org/officeDocument/2006/relationships">
+  <p:cSld>
+    <p:spTree>
+      <p:nvGrpSpPr>
+        <p:cNvPr id="1" name=""/>
+        <p:cNvGrpSpPr/>
+        <p:nvPr/>
+      </p:nvGrpSpPr>
+      <p:grpSpPr>
+        <a:xfrm>
+          <a:off x="0" y="0"/>
+          <a:ext cx="0" cy="0"/>
+          <a:chOff x="0" y="0"/>
+          <a:chExt cx="0" cy="0"/>
+        </a:xfrm>
+      </p:grpSpPr>
+      <p:sp>
+        <p:nvSpPr>
+          <p:cNvPr id="2" name="Slide Image Placeholder 1"/>
+          <p:cNvSpPr>
+            <a:spLocks noGrp="1"/>
+          </p:cNvSpPr>
+          <p:nvPr>
+            <p:ph type="sldImg" idx="2"/>
+          </p:nvPr>
+        </p:nvSpPr>
+        <p:spPr/>
+      </p:sp>
+      <p:sp>
+        <p:nvSpPr>
+          <p:cNvPr id="3" name="Notes Placeholder 2"/>
+          <p:cNvSpPr>
+            <a:spLocks noGrp="1"/>
+          </p:cNvSpPr>
+          <p:nvPr>
+            <p:ph type="body" idx="3" sz="quarter"/>
+          </p:nvPr>
+        </p:nvSpPr>
+        <p:spPr/>
+        <p:txBody>
+          <a:bodyPr/>
+          <a:lstStyle/>
+          <a:p>
+            <a:r>
+              <a:t>Housing support. Housing support cost $57,236 in full in January: $30,502 paid by the State Housing Program grant, and $26,734 of shared costs no grant covers. It has spent 101.7% of its budget to date, with $329,498 left and 11 months to go. The full cost is $57,236 a month; $26,734 of it is shared cost the grant doesn't pay for. Worth asking for as much of it as the funder allows at renewal.</a:t>
+            </a:r>
+          </a:p>
+        </p:txBody>
+      </p:sp>
+      <p:sp>
+        <p:nvSpPr>
+          <p:cNvPr id="4" name="Slide Number Placeholder 3"/>
+          <p:cNvSpPr>
+            <a:spLocks noGrp="1"/>
+          </p:cNvSpPr>
+          <p:nvPr>
+            <p:ph type="sldNum" idx="5" sz="quarter"/>
+          </p:nvPr>
+        </p:nvSpPr>
+        <p:spPr/>
+      </p:sp>
+    </p:spTree>
+  </p:cSld>
+  <p:clrMapOvr>
+    <a:masterClrMapping/>
+  </p:clrMapOvr>
+</p:notes>
+</file>
+
+<file path=ppt/notesSlides/notesSlide4.xml><?xml version="1.0" encoding="utf-8"?>
+<p:notes xmlns:a="http://schemas.openxmlformats.org/drawingml/2006/main" xmlns:p="http://schemas.openxmlformats.org/presentationml/2006/main" xmlns:r="http://schemas.openxmlformats.org/officeDocument/2006/relationships">
+  <p:cSld>
+    <p:spTree>
+      <p:nvGrpSpPr>
+        <p:cNvPr id="1" name=""/>
+        <p:cNvGrpSpPr/>
+        <p:nvPr/>
+      </p:nvGrpSpPr>
+      <p:grpSpPr>
+        <a:xfrm>
+          <a:off x="0" y="0"/>
+          <a:ext cx="0" cy="0"/>
+          <a:chOff x="0" y="0"/>
+          <a:chExt cx="0" cy="0"/>
+        </a:xfrm>
+      </p:grpSpPr>
+      <p:sp>
+        <p:nvSpPr>
+          <p:cNvPr id="2" name="Slide Image Placeholder 1"/>
+          <p:cNvSpPr>
+            <a:spLocks noGrp="1"/>
+          </p:cNvSpPr>
+          <p:nvPr>
+            <p:ph type="sldImg" idx="2"/>
+          </p:nvPr>
+        </p:nvSpPr>
+        <p:spPr/>
+      </p:sp>
+      <p:sp>
+        <p:nvSpPr>
+          <p:cNvPr id="3" name="Notes Placeholder 2"/>
+          <p:cNvSpPr>
+            <a:spLocks noGrp="1"/>
+          </p:cNvSpPr>
+          <p:nvPr>
+            <p:ph type="body" idx="3" sz="quarter"/>
+          </p:nvPr>
+        </p:nvSpPr>
+        <p:spPr/>
+        <p:txBody>
+          <a:bodyPr/>
+          <a:lstStyle/>
+          <a:p>
+            <a:r>
+              <a:t>Youth outreach. Youth outreach cost $39,701 in full in January: $21,157 paid by the State Department of Families grant, and $18,544 of shared costs no grant covers. It has spent 99.6% of its budget to date, with $340,523 left and 17 months to go. The full cost is $39,701 a month; $18,544 of it is shared cost the grant doesn't pay for. Worth asking for as much of it as the funder allows at renewal.</a:t>
+            </a:r>
+          </a:p>
+        </p:txBody>
+      </p:sp>
+      <p:sp>
+        <p:nvSpPr>
+          <p:cNvPr id="4" name="Slide Number Placeholder 3"/>
+          <p:cNvSpPr>
+            <a:spLocks noGrp="1"/>
+          </p:cNvSpPr>
+          <p:nvPr>
+            <p:ph type="sldNum" idx="5" sz="quarter"/>
+          </p:nvPr>
+        </p:nvSpPr>
+        <p:spPr/>
+      </p:sp>
+    </p:spTree>
+  </p:cSld>
+  <p:clrMapOvr>
+    <a:masterClrMapping/>
+  </p:clrMapOvr>
+</p:notes>
+</file>
+
+<file path=ppt/notesSlides/notesSlide5.xml><?xml version="1.0" encoding="utf-8"?>
+<p:notes xmlns:a="http://schemas.openxmlformats.org/drawingml/2006/main" xmlns:p="http://schemas.openxmlformats.org/presentationml/2006/main" xmlns:r="http://schemas.openxmlformats.org/officeDocument/2006/relationships">
+  <p:cSld>
+    <p:spTree>
+      <p:nvGrpSpPr>
+        <p:cNvPr id="1" name=""/>
+        <p:cNvGrpSpPr/>
+        <p:nvPr/>
+      </p:nvGrpSpPr>
+      <p:grpSpPr>
+        <a:xfrm>
+          <a:off x="0" y="0"/>
+          <a:ext cx="0" cy="0"/>
+          <a:chOff x="0" y="0"/>
+          <a:chExt cx="0" cy="0"/>
+        </a:xfrm>
+      </p:grpSpPr>
+      <p:sp>
+        <p:nvSpPr>
+          <p:cNvPr id="2" name="Slide Image Placeholder 1"/>
+          <p:cNvSpPr>
+            <a:spLocks noGrp="1"/>
+          </p:cNvSpPr>
+          <p:nvPr>
+            <p:ph type="sldImg" idx="2"/>
+          </p:nvPr>
+        </p:nvSpPr>
+        <p:spPr/>
+      </p:sp>
+      <p:sp>
+        <p:nvSpPr>
+          <p:cNvPr id="3" name="Notes Placeholder 2"/>
+          <p:cNvSpPr>
+            <a:spLocks noGrp="1"/>
+          </p:cNvSpPr>
+          <p:nvPr>
+            <p:ph type="body" idx="3" sz="quarter"/>
+          </p:nvPr>
+        </p:nvSpPr>
+        <p:spPr/>
+        <p:txBody>
+          <a:bodyPr/>
+          <a:lstStyle/>
+          <a:p>
+            <a:r>
+              <a:t>Digital literacy. Digital literacy cost $8,305 in full in January: $4,426 paid by the Philanthropic foundation grant, and $3,879 of shared costs no grant covers. It has spent 97.0% of its budget to date, with $70,608 left and 14 months to go. The full cost is $8,305 a month; $3,879 of it is shared cost the grant doesn't pay for. Worth asking for as much of it as the funder allows at renewal.</a:t>
+            </a:r>
+          </a:p>
+        </p:txBody>
+      </p:sp>
+      <p:sp>
+        <p:nvSpPr>
+          <p:cNvPr id="4" name="Slide Number Placeholder 3"/>
+          <p:cNvSpPr>
+            <a:spLocks noGrp="1"/>
+          </p:cNvSpPr>
+          <p:nvPr>
+            <p:ph type="sldNum" idx="5" sz="quarter"/>
+          </p:nvPr>
+        </p:nvSpPr>
+        <p:spPr/>
+      </p:sp>
+    </p:spTree>
+  </p:cSld>
+  <p:clrMapOvr>
+    <a:masterClrMapping/>
+  </p:clrMapOvr>
+</p:notes>
+</file>
+
+<file path=ppt/notesSlides/notesSlide6.xml><?xml version="1.0" encoding="utf-8"?>
+<p:notes xmlns:a="http://schemas.openxmlformats.org/drawingml/2006/main" xmlns:p="http://schemas.openxmlformats.org/presentationml/2006/main" xmlns:r="http://schemas.openxmlformats.org/officeDocument/2006/relationships">
+  <p:cSld>
+    <p:spTree>
+      <p:nvGrpSpPr>
+        <p:cNvPr id="1" name=""/>
+        <p:cNvGrpSpPr/>
+        <p:nvPr/>
+      </p:nvGrpSpPr>
+      <p:grpSpPr>
+        <a:xfrm>
+          <a:off x="0" y="0"/>
+          <a:ext cx="0" cy="0"/>
+          <a:chOff x="0" y="0"/>
+          <a:chExt cx="0" cy="0"/>
+        </a:xfrm>
+      </p:grpSpPr>
+      <p:sp>
+        <p:nvSpPr>
+          <p:cNvPr id="2" name="Slide Image Placeholder 1"/>
+          <p:cNvSpPr>
+            <a:spLocks noGrp="1"/>
+          </p:cNvSpPr>
+          <p:nvPr>
+            <p:ph type="sldImg" idx="2"/>
+          </p:nvPr>
+        </p:nvSpPr>
+        <p:spPr/>
+      </p:sp>
+      <p:sp>
+        <p:nvSpPr>
+          <p:cNvPr id="3" name="Notes Placeholder 2"/>
+          <p:cNvSpPr>
+            <a:spLocks noGrp="1"/>
+          </p:cNvSpPr>
+          <p:nvPr>
+            <p:ph type="body" idx="3" sz="quarter"/>
+          </p:nvPr>
+        </p:nvSpPr>
+        <p:spPr/>
+        <p:txBody>
+          <a:bodyPr/>
+          <a:lstStyle/>
+          <a:p>
+            <a:r>
+              <a:t>Community meals (2025-26). Community meals (2025-26) cost $6,943 in full in January: $3,700 paid by the Local council community grant grant, and $3,243 of shared costs no grant covers. It has spent 96.2% of its budget to date, with $19,300 left and 5 months to go. The full cost is $6,943 a month; $3,243 of it is shared cost the grant doesn't pay for. Worth asking for as much of it as the funder allows at renewal.</a:t>
+            </a:r>
+          </a:p>
+        </p:txBody>
+      </p:sp>
+      <p:sp>
+        <p:nvSpPr>
+          <p:cNvPr id="4" name="Slide Number Placeholder 3"/>
+          <p:cNvSpPr>
+            <a:spLocks noGrp="1"/>
+          </p:cNvSpPr>
+          <p:nvPr>
+            <p:ph type="sldNum" idx="5" sz="quarter"/>
+          </p:nvPr>
+        </p:nvSpPr>
+        <p:spPr/>
+      </p:sp>
+    </p:spTree>
+  </p:cSld>
+  <p:clrMapOvr>
+    <a:masterClrMapping/>
+  </p:clrMapOvr>
+</p:notes>
 </file>
 
 <file path=ppt/slideLayouts/slideLayout1.xml><?xml version="1.0" encoding="utf-8"?>
@@ -3716,7 +5119,44 @@
       <p:grpSpPr/>
       <p:sp>
         <p:nvSpPr>
-          <p:cNvPr id="2" name="Rectangle 1"/>
+          <p:cNvPr id="2" name="Title 1"/>
+          <p:cNvSpPr>
+            <a:spLocks noGrp="1"/>
+          </p:cNvSpPr>
+          <p:nvPr>
+            <p:ph type="ctrTitle"/>
+          </p:nvPr>
+        </p:nvSpPr>
+        <p:spPr>
+          <a:xfrm>
+            <a:off x="457200" y="1965960"/>
+            <a:ext cx="11277295" cy="1097280"/>
+          </a:xfrm>
+        </p:spPr>
+        <p:txBody>
+          <a:bodyPr wrap="square"/>
+          <a:lstStyle/>
+          <a:p>
+            <a:pPr algn="l">
+              <a:defRPr>
+                <a:latin typeface="Roboto"/>
+              </a:defRPr>
+            </a:pPr>
+            <a:r>
+              <a:rPr sz="3400" b="1">
+                <a:solidFill>
+                  <a:srgbClr val="25342A"/>
+                </a:solidFill>
+                <a:latin typeface="Roboto"/>
+              </a:rPr>
+              <a:t>What does each program really cost?</a:t>
+            </a:r>
+          </a:p>
+        </p:txBody>
+      </p:sp>
+      <p:sp>
+        <p:nvSpPr>
+          <p:cNvPr id="3" name="Rectangle 2"/>
           <p:cNvSpPr/>
           <p:nvPr/>
         </p:nvSpPr>
@@ -3772,7 +5212,7 @@
       </p:sp>
       <p:sp>
         <p:nvSpPr>
-          <p:cNvPr id="3" name="TextBox 2"/>
+          <p:cNvPr id="4" name="TextBox 3"/>
           <p:cNvSpPr txBox="1"/>
           <p:nvPr/>
         </p:nvSpPr>
@@ -3787,7 +5227,7 @@
           <a:noFill/>
         </p:spPr>
         <p:txBody>
-          <a:bodyPr wrap="square">
+          <a:bodyPr wrap="square" lIns="45720" rIns="45720">
             <a:spAutoFit/>
           </a:bodyPr>
           <a:lstStyle/>
@@ -3811,7 +5251,7 @@
       </p:sp>
       <p:sp>
         <p:nvSpPr>
-          <p:cNvPr id="4" name="TextBox 3"/>
+          <p:cNvPr id="5" name="TextBox 4"/>
           <p:cNvSpPr txBox="1"/>
           <p:nvPr/>
         </p:nvSpPr>
@@ -3826,7 +5266,7 @@
           <a:noFill/>
         </p:spPr>
         <p:txBody>
-          <a:bodyPr wrap="square">
+          <a:bodyPr wrap="square" lIns="45720" rIns="45720">
             <a:spAutoFit/>
           </a:bodyPr>
           <a:lstStyle/>
@@ -3850,14 +5290,14 @@
       </p:sp>
       <p:sp>
         <p:nvSpPr>
-          <p:cNvPr id="5" name="TextBox 4"/>
+          <p:cNvPr id="6" name="TextBox 5"/>
           <p:cNvSpPr txBox="1"/>
           <p:nvPr/>
         </p:nvSpPr>
         <p:spPr>
           <a:xfrm>
-            <a:off x="457200" y="2011680"/>
-            <a:ext cx="11247120" cy="1097280"/>
+            <a:off x="457200" y="3154680"/>
+            <a:ext cx="11277295" cy="457200"/>
           </a:xfrm>
           <a:prstGeom prst="rect">
             <a:avLst/>
@@ -3865,7 +5305,7 @@
           <a:noFill/>
         </p:spPr>
         <p:txBody>
-          <a:bodyPr wrap="square">
+          <a:bodyPr wrap="square" lIns="45720" rIns="45720">
             <a:spAutoFit/>
           </a:bodyPr>
           <a:lstStyle/>
@@ -3876,27 +5316,27 @@
               </a:defRPr>
             </a:pPr>
             <a:r>
-              <a:rPr sz="3400" b="1">
+              <a:rPr sz="1600" b="0">
                 <a:solidFill>
-                  <a:srgbClr val="25342A"/>
+                  <a:srgbClr val="5F6F63"/>
                 </a:solidFill>
                 <a:latin typeface="Roboto"/>
               </a:rPr>
-              <a:t>What does each program really cost?</a:t>
-            </a:r>
-          </a:p>
-        </p:txBody>
-      </p:sp>
-      <p:sp>
-        <p:nvSpPr>
-          <p:cNvPr id="6" name="TextBox 5"/>
+              <a:t>Sample Community Services Ltd</a:t>
+            </a:r>
+          </a:p>
+        </p:txBody>
+      </p:sp>
+      <p:sp>
+        <p:nvSpPr>
+          <p:cNvPr id="7" name="TextBox 6"/>
           <p:cNvSpPr txBox="1"/>
           <p:nvPr/>
         </p:nvSpPr>
         <p:spPr>
           <a:xfrm>
-            <a:off x="457200" y="3154680"/>
-            <a:ext cx="11247120" cy="457200"/>
+            <a:off x="457200" y="3703320"/>
+            <a:ext cx="11277295" cy="535940"/>
           </a:xfrm>
           <a:prstGeom prst="rect">
             <a:avLst/>
@@ -3904,7 +5344,7 @@
           <a:noFill/>
         </p:spPr>
         <p:txBody>
-          <a:bodyPr wrap="square">
+          <a:bodyPr wrap="square" lIns="45720" rIns="45720">
             <a:spAutoFit/>
           </a:bodyPr>
           <a:lstStyle/>
@@ -3915,27 +5355,27 @@
               </a:defRPr>
             </a:pPr>
             <a:r>
-              <a:rPr sz="1600" b="0">
+              <a:rPr sz="1400" b="0">
                 <a:solidFill>
-                  <a:srgbClr val="5F6F63"/>
+                  <a:srgbClr val="25342A"/>
                 </a:solidFill>
                 <a:latin typeface="Roboto"/>
               </a:rPr>
-              <a:t>Sample Community Services Ltd</a:t>
-            </a:r>
-          </a:p>
-        </p:txBody>
-      </p:sp>
-      <p:sp>
-        <p:nvSpPr>
-          <p:cNvPr id="7" name="TextBox 6"/>
+              <a:t>Period: January 2026. Each program's full cost: what its grant pays for, plus its fair share of the costs no single grant covers (untied program costs and administration, shared by grant spending). Pick a program and every chart and note follows it.</a:t>
+            </a:r>
+          </a:p>
+        </p:txBody>
+      </p:sp>
+      <p:sp>
+        <p:nvSpPr>
+          <p:cNvPr id="8" name="TextBox 7"/>
           <p:cNvSpPr txBox="1"/>
           <p:nvPr/>
         </p:nvSpPr>
         <p:spPr>
           <a:xfrm>
-            <a:off x="457200" y="3703320"/>
-            <a:ext cx="11247120" cy="1097280"/>
+            <a:off x="457200" y="4330700"/>
+            <a:ext cx="11277295" cy="1097280"/>
           </a:xfrm>
           <a:prstGeom prst="rect">
             <a:avLst/>
@@ -3943,7 +5383,7 @@
           <a:noFill/>
         </p:spPr>
         <p:txBody>
-          <a:bodyPr wrap="square">
+          <a:bodyPr wrap="square" lIns="45720" rIns="45720">
             <a:spAutoFit/>
           </a:bodyPr>
           <a:lstStyle/>
@@ -3954,27 +5394,75 @@
               </a:defRPr>
             </a:pPr>
             <a:r>
-              <a:rPr sz="1400" b="0">
+              <a:rPr sz="1100" b="0">
                 <a:solidFill>
-                  <a:srgbClr val="25342A"/>
+                  <a:srgbClr val="5F6F63"/>
                 </a:solidFill>
                 <a:latin typeface="Roboto"/>
               </a:rPr>
-              <a:t>Period: January 2026. Each program's full cost: what its grant pays for, plus its fair share of the costs no single grant covers (untied program costs and administration, shared by grant spending). Pick a program and every chart and note follows it.</a:t>
-            </a:r>
-          </a:p>
-        </p:txBody>
-      </p:sp>
-      <p:sp>
-        <p:nvSpPr>
-          <p:cNvPr id="8" name="TextBox 7"/>
+              <a:t>How final is this data?</a:t>
+            </a:r>
+          </a:p>
+          <a:p>
+            <a:pPr>
+              <a:defRPr>
+                <a:latin typeface="Roboto"/>
+              </a:defRPr>
+            </a:pPr>
+            <a:r>
+              <a:rPr sz="1100" b="0">
+                <a:solidFill>
+                  <a:srgbClr val="5F6F63"/>
+                </a:solidFill>
+                <a:latin typeface="Roboto"/>
+              </a:rPr>
+              <a:t>December 2025: Locked. December 2025 is locked (closed 5 Jan 2026). These numbers won't change.</a:t>
+            </a:r>
+          </a:p>
+          <a:p>
+            <a:pPr>
+              <a:defRPr>
+                <a:latin typeface="Roboto"/>
+              </a:defRPr>
+            </a:pPr>
+            <a:r>
+              <a:rPr sz="1100" b="0">
+                <a:solidFill>
+                  <a:srgbClr val="5F6F63"/>
+                </a:solidFill>
+                <a:latin typeface="Roboto"/>
+              </a:rPr>
+              <a:t>January 2026: Locked. January 2026 is locked (closed 3 Feb 2026). These numbers won't change.</a:t>
+            </a:r>
+          </a:p>
+          <a:p>
+            <a:pPr>
+              <a:defRPr>
+                <a:latin typeface="Roboto"/>
+              </a:defRPr>
+            </a:pPr>
+            <a:r>
+              <a:rPr sz="1100" b="0">
+                <a:solidFill>
+                  <a:srgbClr val="5F6F63"/>
+                </a:solidFill>
+                <a:latin typeface="Roboto"/>
+              </a:rPr>
+              <a:t>October 2026: Incomplete. October 2026 is still in progress: figures to 6 Oct only.</a:t>
+            </a:r>
+          </a:p>
+        </p:txBody>
+      </p:sp>
+      <p:sp>
+        <p:nvSpPr>
+          <p:cNvPr id="9" name="TextBox 8"/>
           <p:cNvSpPr txBox="1"/>
           <p:nvPr/>
         </p:nvSpPr>
         <p:spPr>
           <a:xfrm>
-            <a:off x="457200" y="4937760"/>
-            <a:ext cx="11247120" cy="1097280"/>
+            <a:off x="457200" y="6492240"/>
+            <a:ext cx="2926080" cy="274320"/>
           </a:xfrm>
           <a:prstGeom prst="rect">
             <a:avLst/>
@@ -3982,7 +5470,7 @@
           <a:noFill/>
         </p:spPr>
         <p:txBody>
-          <a:bodyPr wrap="square">
+          <a:bodyPr wrap="square" lIns="45720" rIns="45720">
             <a:spAutoFit/>
           </a:bodyPr>
           <a:lstStyle/>
@@ -3993,75 +5481,27 @@
               </a:defRPr>
             </a:pPr>
             <a:r>
-              <a:rPr sz="1100" b="0">
+              <a:rPr sz="900" b="0">
                 <a:solidFill>
                   <a:srgbClr val="5F6F63"/>
                 </a:solidFill>
                 <a:latin typeface="Roboto"/>
               </a:rPr>
-              <a:t>How final is this data?</a:t>
-            </a:r>
-          </a:p>
-          <a:p>
-            <a:pPr>
-              <a:defRPr>
-                <a:latin typeface="Roboto"/>
-              </a:defRPr>
-            </a:pPr>
-            <a:r>
-              <a:rPr sz="1100" b="0">
-                <a:solidFill>
-                  <a:srgbClr val="5F6F63"/>
-                </a:solidFill>
-                <a:latin typeface="Roboto"/>
-              </a:rPr>
-              <a:t>December 2025: Locked. December 2025 is locked (closed 5 Jan 2026). These numbers won't change.</a:t>
-            </a:r>
-          </a:p>
-          <a:p>
-            <a:pPr>
-              <a:defRPr>
-                <a:latin typeface="Roboto"/>
-              </a:defRPr>
-            </a:pPr>
-            <a:r>
-              <a:rPr sz="1100" b="0">
-                <a:solidFill>
-                  <a:srgbClr val="5F6F63"/>
-                </a:solidFill>
-                <a:latin typeface="Roboto"/>
-              </a:rPr>
-              <a:t>January 2026: Locked. January 2026 is locked (closed 3 Feb 2026). These numbers won't change.</a:t>
-            </a:r>
-          </a:p>
-          <a:p>
-            <a:pPr>
-              <a:defRPr>
-                <a:latin typeface="Roboto"/>
-              </a:defRPr>
-            </a:pPr>
-            <a:r>
-              <a:rPr sz="1100" b="0">
-                <a:solidFill>
-                  <a:srgbClr val="5F6F63"/>
-                </a:solidFill>
-                <a:latin typeface="Roboto"/>
-              </a:rPr>
-              <a:t>October 2026: Incomplete. October 2026 is still in progress: figures to 6 Oct only.</a:t>
-            </a:r>
-          </a:p>
-        </p:txBody>
-      </p:sp>
-      <p:sp>
-        <p:nvSpPr>
-          <p:cNvPr id="9" name="TextBox 8"/>
+              <a:t>program-cost.pptx</a:t>
+            </a:r>
+          </a:p>
+        </p:txBody>
+      </p:sp>
+      <p:sp>
+        <p:nvSpPr>
+          <p:cNvPr id="10" name="TextBox 9"/>
           <p:cNvSpPr txBox="1"/>
           <p:nvPr/>
         </p:nvSpPr>
         <p:spPr>
           <a:xfrm>
-            <a:off x="457200" y="6492240"/>
-            <a:ext cx="3657600" cy="274320"/>
+            <a:off x="3108960" y="6492240"/>
+            <a:ext cx="5943600" cy="274320"/>
           </a:xfrm>
           <a:prstGeom prst="rect">
             <a:avLst/>
@@ -4069,12 +5509,12 @@
           <a:noFill/>
         </p:spPr>
         <p:txBody>
-          <a:bodyPr wrap="square">
+          <a:bodyPr wrap="square" lIns="45720" rIns="45720">
             <a:spAutoFit/>
           </a:bodyPr>
           <a:lstStyle/>
           <a:p>
-            <a:pPr>
+            <a:pPr algn="ctr">
               <a:defRPr>
                 <a:latin typeface="Roboto"/>
               </a:defRPr>
@@ -4086,21 +5526,21 @@
                 </a:solidFill>
                 <a:latin typeface="Roboto"/>
               </a:rPr>
-              <a:t>program-cost.pptx</a:t>
-            </a:r>
-          </a:p>
-        </p:txBody>
-      </p:sp>
-      <p:sp>
-        <p:nvSpPr>
-          <p:cNvPr id="10" name="TextBox 9"/>
+              <a:t>Data retrieved 2pm, Tue 6 Oct 2026 · Generated 8 Oct 2026, 9:35am · Sample data · Made with Python (python-pptx)</a:t>
+            </a:r>
+          </a:p>
+        </p:txBody>
+      </p:sp>
+      <p:sp>
+        <p:nvSpPr>
+          <p:cNvPr id="11" name="TextBox 10"/>
           <p:cNvSpPr txBox="1"/>
           <p:nvPr/>
         </p:nvSpPr>
         <p:spPr>
           <a:xfrm>
-            <a:off x="4297680" y="6492240"/>
-            <a:ext cx="3657600" cy="274320"/>
+            <a:off x="8503920" y="6492240"/>
+            <a:ext cx="3200400" cy="274320"/>
           </a:xfrm>
           <a:prstGeom prst="rect">
             <a:avLst/>
@@ -4108,12 +5548,12 @@
           <a:noFill/>
         </p:spPr>
         <p:txBody>
-          <a:bodyPr wrap="square">
+          <a:bodyPr wrap="square" lIns="45720" rIns="45720">
             <a:spAutoFit/>
           </a:bodyPr>
           <a:lstStyle/>
           <a:p>
-            <a:pPr algn="ctr">
+            <a:pPr algn="r">
               <a:defRPr>
                 <a:latin typeface="Roboto"/>
               </a:defRPr>
@@ -4125,46 +5565,7 @@
                 </a:solidFill>
                 <a:latin typeface="Roboto"/>
               </a:rPr>
-              <a:t>Data retrieved 2pm, Tue 6 Oct 2026 · Sample data</a:t>
-            </a:r>
-          </a:p>
-        </p:txBody>
-      </p:sp>
-      <p:sp>
-        <p:nvSpPr>
-          <p:cNvPr id="11" name="TextBox 10"/>
-          <p:cNvSpPr txBox="1"/>
-          <p:nvPr/>
-        </p:nvSpPr>
-        <p:spPr>
-          <a:xfrm>
-            <a:off x="8503920" y="6492240"/>
-            <a:ext cx="3200400" cy="274320"/>
-          </a:xfrm>
-          <a:prstGeom prst="rect">
-            <a:avLst/>
-          </a:prstGeom>
-          <a:noFill/>
-        </p:spPr>
-        <p:txBody>
-          <a:bodyPr wrap="square">
-            <a:spAutoFit/>
-          </a:bodyPr>
-          <a:lstStyle/>
-          <a:p>
-            <a:pPr algn="r">
-              <a:defRPr>
-                <a:latin typeface="Roboto"/>
-              </a:defRPr>
-            </a:pPr>
-            <a:r>
-              <a:rPr sz="900" b="0">
-                <a:solidFill>
-                  <a:srgbClr val="5F6F63"/>
-                </a:solidFill>
-                <a:latin typeface="Roboto"/>
-              </a:rPr>
-              <a:t>Slide 1 of 9</a:t>
+              <a:t>Slide 1 of 6</a:t>
             </a:r>
           </a:p>
         </p:txBody>
@@ -4189,7 +5590,44 @@
       <p:grpSpPr/>
       <p:sp>
         <p:nvSpPr>
-          <p:cNvPr id="2" name="Rectangle 1"/>
+          <p:cNvPr id="2" name="Title 1"/>
+          <p:cNvSpPr>
+            <a:spLocks noGrp="1"/>
+          </p:cNvSpPr>
+          <p:nvPr>
+            <p:ph type="title"/>
+          </p:nvPr>
+        </p:nvSpPr>
+        <p:spPr>
+          <a:xfrm>
+            <a:off x="457200" y="384048"/>
+            <a:ext cx="11277295" cy="475488"/>
+          </a:xfrm>
+        </p:spPr>
+        <p:txBody>
+          <a:bodyPr wrap="square" lIns="45720" rIns="45720" tIns="0" bIns="0" anchor="t"/>
+          <a:lstStyle/>
+          <a:p>
+            <a:pPr algn="l">
+              <a:defRPr>
+                <a:latin typeface="Roboto"/>
+              </a:defRPr>
+            </a:pPr>
+            <a:r>
+              <a:rPr sz="2400" b="1">
+                <a:solidFill>
+                  <a:srgbClr val="25342A"/>
+                </a:solidFill>
+                <a:latin typeface="Roboto"/>
+              </a:rPr>
+              <a:t>All programs</a:t>
+            </a:r>
+          </a:p>
+        </p:txBody>
+      </p:sp>
+      <p:sp>
+        <p:nvSpPr>
+          <p:cNvPr id="3" name="Rectangle 2"/>
           <p:cNvSpPr/>
           <p:nvPr/>
         </p:nvSpPr>
@@ -4236,14 +5674,14 @@
       </p:sp>
       <p:sp>
         <p:nvSpPr>
-          <p:cNvPr id="3" name="TextBox 2"/>
+          <p:cNvPr id="4" name="TextBox 3"/>
           <p:cNvSpPr txBox="1"/>
           <p:nvPr/>
         </p:nvSpPr>
         <p:spPr>
           <a:xfrm>
-            <a:off x="457200" y="164592"/>
-            <a:ext cx="7315200" cy="274320"/>
+            <a:off x="457200" y="146304"/>
+            <a:ext cx="8229600" cy="256032"/>
           </a:xfrm>
           <a:prstGeom prst="rect">
             <a:avLst/>
@@ -4251,7 +5689,7 @@
           <a:noFill/>
         </p:spPr>
         <p:txBody>
-          <a:bodyPr wrap="square">
+          <a:bodyPr wrap="square" lIns="45720" rIns="45720">
             <a:spAutoFit/>
           </a:bodyPr>
           <a:lstStyle/>
@@ -4275,14 +5713,14 @@
       </p:sp>
       <p:sp>
         <p:nvSpPr>
-          <p:cNvPr id="4" name="TextBox 3"/>
+          <p:cNvPr id="5" name="TextBox 4"/>
           <p:cNvSpPr txBox="1"/>
           <p:nvPr/>
         </p:nvSpPr>
         <p:spPr>
           <a:xfrm>
-            <a:off x="457200" y="411480"/>
-            <a:ext cx="11247120" cy="548640"/>
+            <a:off x="457200" y="914400"/>
+            <a:ext cx="11277295" cy="263652"/>
           </a:xfrm>
           <a:prstGeom prst="rect">
             <a:avLst/>
@@ -4290,7 +5728,7 @@
           <a:noFill/>
         </p:spPr>
         <p:txBody>
-          <a:bodyPr wrap="square">
+          <a:bodyPr wrap="square" lIns="45720" rIns="45720">
             <a:spAutoFit/>
           </a:bodyPr>
           <a:lstStyle/>
@@ -4301,45 +5739,94 @@
               </a:defRPr>
             </a:pPr>
             <a:r>
-              <a:rPr sz="2400" b="1">
+              <a:rPr sz="1200" b="0">
                 <a:solidFill>
-                  <a:srgbClr val="25342A"/>
+                  <a:srgbClr val="5F6F63"/>
                 </a:solidFill>
                 <a:latin typeface="Roboto"/>
               </a:rPr>
-              <a:t>Full cost of each program, January 2026 · $ · Program: All programs</a:t>
+              <a:t>Full cost of each program, January 2026</a:t>
             </a:r>
           </a:p>
         </p:txBody>
       </p:sp>
       <p:graphicFrame>
         <p:nvGraphicFramePr>
-          <p:cNvPr id="5" name="Chart 4"/>
+          <p:cNvPr id="6" name="Chart 5"/>
           <p:cNvGraphicFramePr>
             <a:graphicFrameLocks noGrp="1"/>
           </p:cNvGraphicFramePr>
           <p:nvPr/>
         </p:nvGraphicFramePr>
         <p:xfrm>
-          <a:off x="457200" y="1188720"/>
-          <a:ext cx="11247120" cy="5029200"/>
+          <a:off x="457200" y="1278636"/>
+          <a:ext cx="11277295" cy="2267712"/>
         </p:xfrm>
         <a:graphic>
           <a:graphicData uri="http://schemas.openxmlformats.org/drawingml/2006/chart">
-            <c:chart xmlns:c="http://schemas.openxmlformats.org/drawingml/2006/chart" r:id="rId2"/>
+            <c:chart xmlns:c="http://schemas.openxmlformats.org/drawingml/2006/chart" r:id="rId3"/>
           </a:graphicData>
         </a:graphic>
       </p:graphicFrame>
       <p:sp>
         <p:nvSpPr>
-          <p:cNvPr id="6" name="TextBox 5"/>
+          <p:cNvPr id="7" name="Rectangle 6"/>
+          <p:cNvSpPr/>
+          <p:nvPr/>
+        </p:nvSpPr>
+        <p:spPr>
+          <a:xfrm>
+            <a:off x="457200" y="3637788"/>
+            <a:ext cx="5501487" cy="1295400"/>
+          </a:xfrm>
+          <a:prstGeom prst="rect">
+            <a:avLst/>
+          </a:prstGeom>
+          <a:solidFill>
+            <a:srgbClr val="FFFFFF"/>
+          </a:solidFill>
+          <a:ln>
+            <a:solidFill>
+              <a:srgbClr val="DCE8DC"/>
+            </a:solidFill>
+          </a:ln>
+        </p:spPr>
+        <p:style>
+          <a:lnRef idx="1">
+            <a:schemeClr val="accent1"/>
+          </a:lnRef>
+          <a:fillRef idx="3">
+            <a:schemeClr val="accent1"/>
+          </a:fillRef>
+          <a:effectRef idx="2">
+            <a:schemeClr val="accent1"/>
+          </a:effectRef>
+          <a:fontRef idx="minor">
+            <a:schemeClr val="lt1"/>
+          </a:fontRef>
+        </p:style>
+        <p:txBody>
+          <a:bodyPr rtlCol="0" anchor="ctr"/>
+          <a:lstStyle/>
+          <a:p>
+            <a:pPr algn="ctr">
+              <a:defRPr>
+                <a:latin typeface="Roboto"/>
+              </a:defRPr>
+            </a:pPr>
+          </a:p>
+        </p:txBody>
+      </p:sp>
+      <p:sp>
+        <p:nvSpPr>
+          <p:cNvPr id="8" name="TextBox 7"/>
           <p:cNvSpPr txBox="1"/>
           <p:nvPr/>
         </p:nvSpPr>
         <p:spPr>
           <a:xfrm>
-            <a:off x="457200" y="6492240"/>
-            <a:ext cx="3657600" cy="274320"/>
+            <a:off x="594360" y="3692652"/>
+            <a:ext cx="5227167" cy="274320"/>
           </a:xfrm>
           <a:prstGeom prst="rect">
             <a:avLst/>
@@ -4347,7 +5834,212 @@
           <a:noFill/>
         </p:spPr>
         <p:txBody>
-          <a:bodyPr wrap="square">
+          <a:bodyPr wrap="square" lIns="45720" rIns="45720">
+            <a:spAutoFit/>
+          </a:bodyPr>
+          <a:lstStyle/>
+          <a:p>
+            <a:pPr>
+              <a:defRPr>
+                <a:latin typeface="Roboto"/>
+              </a:defRPr>
+            </a:pPr>
+            <a:r>
+              <a:rPr sz="1000" b="1">
+                <a:solidFill>
+                  <a:srgbClr val="5F6F63"/>
+                </a:solidFill>
+                <a:latin typeface="Roboto"/>
+              </a:rPr>
+              <a:t>WHAT IT SHOWS</a:t>
+            </a:r>
+          </a:p>
+        </p:txBody>
+      </p:sp>
+      <p:sp>
+        <p:nvSpPr>
+          <p:cNvPr id="9" name="TextBox 8"/>
+          <p:cNvSpPr txBox="1"/>
+          <p:nvPr/>
+        </p:nvSpPr>
+        <p:spPr>
+          <a:xfrm>
+            <a:off x="594360" y="3966972"/>
+            <a:ext cx="5227167" cy="929640"/>
+          </a:xfrm>
+          <a:prstGeom prst="rect">
+            <a:avLst/>
+          </a:prstGeom>
+          <a:noFill/>
+        </p:spPr>
+        <p:txBody>
+          <a:bodyPr wrap="square" lIns="45720" rIns="45720">
+            <a:spAutoFit/>
+          </a:bodyPr>
+          <a:lstStyle/>
+          <a:p>
+            <a:pPr>
+              <a:defRPr>
+                <a:latin typeface="Roboto"/>
+              </a:defRPr>
+            </a:pPr>
+            <a:r>
+              <a:rPr sz="1200" b="0">
+                <a:solidFill>
+                  <a:srgbClr val="25342A"/>
+                </a:solidFill>
+                <a:latin typeface="Roboto"/>
+              </a:rPr>
+              <a:t>Housing support is the biggest program: $57,236 in January once its share of untied program costs and administration is added to $30,502 of grant spending. Shared costs add 87.6% on top of grant spending across all programs.</a:t>
+            </a:r>
+          </a:p>
+        </p:txBody>
+      </p:sp>
+      <p:sp>
+        <p:nvSpPr>
+          <p:cNvPr id="10" name="Rectangle 9"/>
+          <p:cNvSpPr/>
+          <p:nvPr/>
+        </p:nvSpPr>
+        <p:spPr>
+          <a:xfrm>
+            <a:off x="6233007" y="3637788"/>
+            <a:ext cx="5501487" cy="1295400"/>
+          </a:xfrm>
+          <a:prstGeom prst="rect">
+            <a:avLst/>
+          </a:prstGeom>
+          <a:solidFill>
+            <a:srgbClr val="EEF5F0"/>
+          </a:solidFill>
+          <a:ln>
+            <a:solidFill>
+              <a:srgbClr val="DCE8DC"/>
+            </a:solidFill>
+          </a:ln>
+        </p:spPr>
+        <p:style>
+          <a:lnRef idx="1">
+            <a:schemeClr val="accent1"/>
+          </a:lnRef>
+          <a:fillRef idx="3">
+            <a:schemeClr val="accent1"/>
+          </a:fillRef>
+          <a:effectRef idx="2">
+            <a:schemeClr val="accent1"/>
+          </a:effectRef>
+          <a:fontRef idx="minor">
+            <a:schemeClr val="lt1"/>
+          </a:fontRef>
+        </p:style>
+        <p:txBody>
+          <a:bodyPr rtlCol="0" anchor="ctr"/>
+          <a:lstStyle/>
+          <a:p>
+            <a:pPr algn="ctr">
+              <a:defRPr>
+                <a:latin typeface="Roboto"/>
+              </a:defRPr>
+            </a:pPr>
+          </a:p>
+        </p:txBody>
+      </p:sp>
+      <p:sp>
+        <p:nvSpPr>
+          <p:cNvPr id="11" name="TextBox 10"/>
+          <p:cNvSpPr txBox="1"/>
+          <p:nvPr/>
+        </p:nvSpPr>
+        <p:spPr>
+          <a:xfrm>
+            <a:off x="6370167" y="3692652"/>
+            <a:ext cx="5227167" cy="274320"/>
+          </a:xfrm>
+          <a:prstGeom prst="rect">
+            <a:avLst/>
+          </a:prstGeom>
+          <a:noFill/>
+        </p:spPr>
+        <p:txBody>
+          <a:bodyPr wrap="square" lIns="45720" rIns="45720">
+            <a:spAutoFit/>
+          </a:bodyPr>
+          <a:lstStyle/>
+          <a:p>
+            <a:pPr>
+              <a:defRPr>
+                <a:latin typeface="Roboto"/>
+              </a:defRPr>
+            </a:pPr>
+            <a:r>
+              <a:rPr sz="1000" b="1">
+                <a:solidFill>
+                  <a:srgbClr val="5F6F63"/>
+                </a:solidFill>
+                <a:latin typeface="Roboto"/>
+              </a:rPr>
+              <a:t>WHAT YOU'D DO ABOUT IT</a:t>
+            </a:r>
+          </a:p>
+        </p:txBody>
+      </p:sp>
+      <p:sp>
+        <p:nvSpPr>
+          <p:cNvPr id="12" name="TextBox 11"/>
+          <p:cNvSpPr txBox="1"/>
+          <p:nvPr/>
+        </p:nvSpPr>
+        <p:spPr>
+          <a:xfrm>
+            <a:off x="6370167" y="3966972"/>
+            <a:ext cx="5227167" cy="929640"/>
+          </a:xfrm>
+          <a:prstGeom prst="rect">
+            <a:avLst/>
+          </a:prstGeom>
+          <a:noFill/>
+        </p:spPr>
+        <p:txBody>
+          <a:bodyPr wrap="square" lIns="45720" rIns="45720">
+            <a:spAutoFit/>
+          </a:bodyPr>
+          <a:lstStyle/>
+          <a:p>
+            <a:pPr>
+              <a:defRPr>
+                <a:latin typeface="Roboto"/>
+              </a:defRPr>
+            </a:pPr>
+            <a:r>
+              <a:rPr sz="1200" b="0">
+                <a:solidFill>
+                  <a:srgbClr val="25342A"/>
+                </a:solidFill>
+                <a:latin typeface="Roboto"/>
+              </a:rPr>
+              <a:t>The full cost (not just the grant line) is the number for renewal applications, where the funder lets you recover a share of overheads. Pick a program above to see it on its own.</a:t>
+            </a:r>
+          </a:p>
+        </p:txBody>
+      </p:sp>
+      <p:sp>
+        <p:nvSpPr>
+          <p:cNvPr id="13" name="TextBox 12"/>
+          <p:cNvSpPr txBox="1"/>
+          <p:nvPr/>
+        </p:nvSpPr>
+        <p:spPr>
+          <a:xfrm>
+            <a:off x="457200" y="6492240"/>
+            <a:ext cx="2926080" cy="274320"/>
+          </a:xfrm>
+          <a:prstGeom prst="rect">
+            <a:avLst/>
+          </a:prstGeom>
+          <a:noFill/>
+        </p:spPr>
+        <p:txBody>
+          <a:bodyPr wrap="square" lIns="45720" rIns="45720">
             <a:spAutoFit/>
           </a:bodyPr>
           <a:lstStyle/>
@@ -4371,14 +6063,14 @@
       </p:sp>
       <p:sp>
         <p:nvSpPr>
-          <p:cNvPr id="7" name="TextBox 6"/>
+          <p:cNvPr id="14" name="TextBox 13"/>
           <p:cNvSpPr txBox="1"/>
           <p:nvPr/>
         </p:nvSpPr>
         <p:spPr>
           <a:xfrm>
-            <a:off x="4297680" y="6492240"/>
-            <a:ext cx="3657600" cy="274320"/>
+            <a:off x="3108960" y="6492240"/>
+            <a:ext cx="5943600" cy="274320"/>
           </a:xfrm>
           <a:prstGeom prst="rect">
             <a:avLst/>
@@ -4386,7 +6078,7 @@
           <a:noFill/>
         </p:spPr>
         <p:txBody>
-          <a:bodyPr wrap="square">
+          <a:bodyPr wrap="square" lIns="45720" rIns="45720">
             <a:spAutoFit/>
           </a:bodyPr>
           <a:lstStyle/>
@@ -4403,14 +6095,14 @@
                 </a:solidFill>
                 <a:latin typeface="Roboto"/>
               </a:rPr>
-              <a:t>Data retrieved 2pm, Tue 6 Oct 2026 · Sample data</a:t>
-            </a:r>
-          </a:p>
-        </p:txBody>
-      </p:sp>
-      <p:sp>
-        <p:nvSpPr>
-          <p:cNvPr id="8" name="TextBox 7"/>
+              <a:t>Data retrieved 2pm, Tue 6 Oct 2026 · Generated 8 Oct 2026, 9:35am · Sample data · Made with Python (python-pptx)</a:t>
+            </a:r>
+          </a:p>
+        </p:txBody>
+      </p:sp>
+      <p:sp>
+        <p:nvSpPr>
+          <p:cNvPr id="15" name="TextBox 14"/>
           <p:cNvSpPr txBox="1"/>
           <p:nvPr/>
         </p:nvSpPr>
@@ -4425,7 +6117,7 @@
           <a:noFill/>
         </p:spPr>
         <p:txBody>
-          <a:bodyPr wrap="square">
+          <a:bodyPr wrap="square" lIns="45720" rIns="45720">
             <a:spAutoFit/>
           </a:bodyPr>
           <a:lstStyle/>
@@ -4442,7 +6134,7 @@
                 </a:solidFill>
                 <a:latin typeface="Roboto"/>
               </a:rPr>
-              <a:t>Slide 2 of 9</a:t>
+              <a:t>Slide 2 of 6</a:t>
             </a:r>
           </a:p>
         </p:txBody>
@@ -4467,7 +6159,44 @@
       <p:grpSpPr/>
       <p:sp>
         <p:nvSpPr>
-          <p:cNvPr id="2" name="Rectangle 1"/>
+          <p:cNvPr id="2" name="Title 1"/>
+          <p:cNvSpPr>
+            <a:spLocks noGrp="1"/>
+          </p:cNvSpPr>
+          <p:nvPr>
+            <p:ph type="title"/>
+          </p:nvPr>
+        </p:nvSpPr>
+        <p:spPr>
+          <a:xfrm>
+            <a:off x="457200" y="384048"/>
+            <a:ext cx="11277295" cy="475488"/>
+          </a:xfrm>
+        </p:spPr>
+        <p:txBody>
+          <a:bodyPr wrap="square" lIns="45720" rIns="45720" tIns="0" bIns="0" anchor="t"/>
+          <a:lstStyle/>
+          <a:p>
+            <a:pPr algn="l">
+              <a:defRPr>
+                <a:latin typeface="Roboto"/>
+              </a:defRPr>
+            </a:pPr>
+            <a:r>
+              <a:rPr sz="2400" b="1">
+                <a:solidFill>
+                  <a:srgbClr val="25342A"/>
+                </a:solidFill>
+                <a:latin typeface="Roboto"/>
+              </a:rPr>
+              <a:t>Housing support</a:t>
+            </a:r>
+          </a:p>
+        </p:txBody>
+      </p:sp>
+      <p:sp>
+        <p:nvSpPr>
+          <p:cNvPr id="3" name="Rectangle 2"/>
           <p:cNvSpPr/>
           <p:nvPr/>
         </p:nvSpPr>
@@ -4514,14 +6243,14 @@
       </p:sp>
       <p:sp>
         <p:nvSpPr>
-          <p:cNvPr id="3" name="TextBox 2"/>
+          <p:cNvPr id="4" name="TextBox 3"/>
           <p:cNvSpPr txBox="1"/>
           <p:nvPr/>
         </p:nvSpPr>
         <p:spPr>
           <a:xfrm>
-            <a:off x="457200" y="164592"/>
-            <a:ext cx="7315200" cy="274320"/>
+            <a:off x="457200" y="146304"/>
+            <a:ext cx="8229600" cy="256032"/>
           </a:xfrm>
           <a:prstGeom prst="rect">
             <a:avLst/>
@@ -4529,7 +6258,7 @@
           <a:noFill/>
         </p:spPr>
         <p:txBody>
-          <a:bodyPr wrap="square">
+          <a:bodyPr wrap="square" lIns="45720" rIns="45720">
             <a:spAutoFit/>
           </a:bodyPr>
           <a:lstStyle/>
@@ -4553,14 +6282,14 @@
       </p:sp>
       <p:sp>
         <p:nvSpPr>
-          <p:cNvPr id="4" name="TextBox 3"/>
+          <p:cNvPr id="5" name="TextBox 4"/>
           <p:cNvSpPr txBox="1"/>
           <p:nvPr/>
         </p:nvSpPr>
         <p:spPr>
           <a:xfrm>
-            <a:off x="457200" y="411480"/>
-            <a:ext cx="11247120" cy="548640"/>
+            <a:off x="457200" y="914400"/>
+            <a:ext cx="11277295" cy="263652"/>
           </a:xfrm>
           <a:prstGeom prst="rect">
             <a:avLst/>
@@ -4568,7 +6297,7 @@
           <a:noFill/>
         </p:spPr>
         <p:txBody>
-          <a:bodyPr wrap="square">
+          <a:bodyPr wrap="square" lIns="45720" rIns="45720">
             <a:spAutoFit/>
           </a:bodyPr>
           <a:lstStyle/>
@@ -4579,45 +6308,94 @@
               </a:defRPr>
             </a:pPr>
             <a:r>
-              <a:rPr sz="2400" b="1">
+              <a:rPr sz="1200" b="0">
                 <a:solidFill>
-                  <a:srgbClr val="25342A"/>
+                  <a:srgbClr val="5F6F63"/>
                 </a:solidFill>
                 <a:latin typeface="Roboto"/>
               </a:rPr>
-              <a:t>Full cost of each program, January 2026 · % of total · Program: All programs</a:t>
+              <a:t>Grant spending, by month · Housing support</a:t>
             </a:r>
           </a:p>
         </p:txBody>
       </p:sp>
       <p:graphicFrame>
         <p:nvGraphicFramePr>
-          <p:cNvPr id="5" name="Chart 4"/>
+          <p:cNvPr id="6" name="Chart 5"/>
           <p:cNvGraphicFramePr>
             <a:graphicFrameLocks noGrp="1"/>
           </p:cNvGraphicFramePr>
           <p:nvPr/>
         </p:nvGraphicFramePr>
         <p:xfrm>
-          <a:off x="457200" y="1188720"/>
-          <a:ext cx="11247120" cy="5029200"/>
+          <a:off x="457200" y="1278636"/>
+          <a:ext cx="11277295" cy="3643884"/>
         </p:xfrm>
         <a:graphic>
           <a:graphicData uri="http://schemas.openxmlformats.org/drawingml/2006/chart">
-            <c:chart xmlns:c="http://schemas.openxmlformats.org/drawingml/2006/chart" r:id="rId2"/>
+            <c:chart xmlns:c="http://schemas.openxmlformats.org/drawingml/2006/chart" r:id="rId3"/>
           </a:graphicData>
         </a:graphic>
       </p:graphicFrame>
       <p:sp>
         <p:nvSpPr>
-          <p:cNvPr id="6" name="TextBox 5"/>
+          <p:cNvPr id="7" name="Rectangle 6"/>
+          <p:cNvSpPr/>
+          <p:nvPr/>
+        </p:nvSpPr>
+        <p:spPr>
+          <a:xfrm>
+            <a:off x="457200" y="5013960"/>
+            <a:ext cx="5501487" cy="1295400"/>
+          </a:xfrm>
+          <a:prstGeom prst="rect">
+            <a:avLst/>
+          </a:prstGeom>
+          <a:solidFill>
+            <a:srgbClr val="FFFFFF"/>
+          </a:solidFill>
+          <a:ln>
+            <a:solidFill>
+              <a:srgbClr val="DCE8DC"/>
+            </a:solidFill>
+          </a:ln>
+        </p:spPr>
+        <p:style>
+          <a:lnRef idx="1">
+            <a:schemeClr val="accent1"/>
+          </a:lnRef>
+          <a:fillRef idx="3">
+            <a:schemeClr val="accent1"/>
+          </a:fillRef>
+          <a:effectRef idx="2">
+            <a:schemeClr val="accent1"/>
+          </a:effectRef>
+          <a:fontRef idx="minor">
+            <a:schemeClr val="lt1"/>
+          </a:fontRef>
+        </p:style>
+        <p:txBody>
+          <a:bodyPr rtlCol="0" anchor="ctr"/>
+          <a:lstStyle/>
+          <a:p>
+            <a:pPr algn="ctr">
+              <a:defRPr>
+                <a:latin typeface="Roboto"/>
+              </a:defRPr>
+            </a:pPr>
+          </a:p>
+        </p:txBody>
+      </p:sp>
+      <p:sp>
+        <p:nvSpPr>
+          <p:cNvPr id="8" name="TextBox 7"/>
           <p:cNvSpPr txBox="1"/>
           <p:nvPr/>
         </p:nvSpPr>
         <p:spPr>
           <a:xfrm>
-            <a:off x="457200" y="6492240"/>
-            <a:ext cx="3657600" cy="274320"/>
+            <a:off x="594360" y="5068824"/>
+            <a:ext cx="5227167" cy="274320"/>
           </a:xfrm>
           <a:prstGeom prst="rect">
             <a:avLst/>
@@ -4625,7 +6403,212 @@
           <a:noFill/>
         </p:spPr>
         <p:txBody>
-          <a:bodyPr wrap="square">
+          <a:bodyPr wrap="square" lIns="45720" rIns="45720">
+            <a:spAutoFit/>
+          </a:bodyPr>
+          <a:lstStyle/>
+          <a:p>
+            <a:pPr>
+              <a:defRPr>
+                <a:latin typeface="Roboto"/>
+              </a:defRPr>
+            </a:pPr>
+            <a:r>
+              <a:rPr sz="1000" b="1">
+                <a:solidFill>
+                  <a:srgbClr val="5F6F63"/>
+                </a:solidFill>
+                <a:latin typeface="Roboto"/>
+              </a:rPr>
+              <a:t>WHAT IT SHOWS</a:t>
+            </a:r>
+          </a:p>
+        </p:txBody>
+      </p:sp>
+      <p:sp>
+        <p:nvSpPr>
+          <p:cNvPr id="9" name="TextBox 8"/>
+          <p:cNvSpPr txBox="1"/>
+          <p:nvPr/>
+        </p:nvSpPr>
+        <p:spPr>
+          <a:xfrm>
+            <a:off x="594360" y="5343144"/>
+            <a:ext cx="5227167" cy="929640"/>
+          </a:xfrm>
+          <a:prstGeom prst="rect">
+            <a:avLst/>
+          </a:prstGeom>
+          <a:noFill/>
+        </p:spPr>
+        <p:txBody>
+          <a:bodyPr wrap="square" lIns="45720" rIns="45720">
+            <a:spAutoFit/>
+          </a:bodyPr>
+          <a:lstStyle/>
+          <a:p>
+            <a:pPr>
+              <a:defRPr>
+                <a:latin typeface="Roboto"/>
+              </a:defRPr>
+            </a:pPr>
+            <a:r>
+              <a:rPr sz="1200" b="0">
+                <a:solidFill>
+                  <a:srgbClr val="25342A"/>
+                </a:solidFill>
+                <a:latin typeface="Roboto"/>
+              </a:rPr>
+              <a:t>Housing support cost $57,236 in full in January: $30,502 paid by the State Housing Program grant, and $26,734 of shared costs no grant covers. It has spent 101.7% of its budget to date, with $329,498 left and 11 months to go.</a:t>
+            </a:r>
+          </a:p>
+        </p:txBody>
+      </p:sp>
+      <p:sp>
+        <p:nvSpPr>
+          <p:cNvPr id="10" name="Rectangle 9"/>
+          <p:cNvSpPr/>
+          <p:nvPr/>
+        </p:nvSpPr>
+        <p:spPr>
+          <a:xfrm>
+            <a:off x="6233007" y="5013960"/>
+            <a:ext cx="5501487" cy="1295400"/>
+          </a:xfrm>
+          <a:prstGeom prst="rect">
+            <a:avLst/>
+          </a:prstGeom>
+          <a:solidFill>
+            <a:srgbClr val="EEF5F0"/>
+          </a:solidFill>
+          <a:ln>
+            <a:solidFill>
+              <a:srgbClr val="DCE8DC"/>
+            </a:solidFill>
+          </a:ln>
+        </p:spPr>
+        <p:style>
+          <a:lnRef idx="1">
+            <a:schemeClr val="accent1"/>
+          </a:lnRef>
+          <a:fillRef idx="3">
+            <a:schemeClr val="accent1"/>
+          </a:fillRef>
+          <a:effectRef idx="2">
+            <a:schemeClr val="accent1"/>
+          </a:effectRef>
+          <a:fontRef idx="minor">
+            <a:schemeClr val="lt1"/>
+          </a:fontRef>
+        </p:style>
+        <p:txBody>
+          <a:bodyPr rtlCol="0" anchor="ctr"/>
+          <a:lstStyle/>
+          <a:p>
+            <a:pPr algn="ctr">
+              <a:defRPr>
+                <a:latin typeface="Roboto"/>
+              </a:defRPr>
+            </a:pPr>
+          </a:p>
+        </p:txBody>
+      </p:sp>
+      <p:sp>
+        <p:nvSpPr>
+          <p:cNvPr id="11" name="TextBox 10"/>
+          <p:cNvSpPr txBox="1"/>
+          <p:nvPr/>
+        </p:nvSpPr>
+        <p:spPr>
+          <a:xfrm>
+            <a:off x="6370167" y="5068824"/>
+            <a:ext cx="5227167" cy="274320"/>
+          </a:xfrm>
+          <a:prstGeom prst="rect">
+            <a:avLst/>
+          </a:prstGeom>
+          <a:noFill/>
+        </p:spPr>
+        <p:txBody>
+          <a:bodyPr wrap="square" lIns="45720" rIns="45720">
+            <a:spAutoFit/>
+          </a:bodyPr>
+          <a:lstStyle/>
+          <a:p>
+            <a:pPr>
+              <a:defRPr>
+                <a:latin typeface="Roboto"/>
+              </a:defRPr>
+            </a:pPr>
+            <a:r>
+              <a:rPr sz="1000" b="1">
+                <a:solidFill>
+                  <a:srgbClr val="5F6F63"/>
+                </a:solidFill>
+                <a:latin typeface="Roboto"/>
+              </a:rPr>
+              <a:t>WHAT YOU'D DO ABOUT IT</a:t>
+            </a:r>
+          </a:p>
+        </p:txBody>
+      </p:sp>
+      <p:sp>
+        <p:nvSpPr>
+          <p:cNvPr id="12" name="TextBox 11"/>
+          <p:cNvSpPr txBox="1"/>
+          <p:nvPr/>
+        </p:nvSpPr>
+        <p:spPr>
+          <a:xfrm>
+            <a:off x="6370167" y="5343144"/>
+            <a:ext cx="5227167" cy="929640"/>
+          </a:xfrm>
+          <a:prstGeom prst="rect">
+            <a:avLst/>
+          </a:prstGeom>
+          <a:noFill/>
+        </p:spPr>
+        <p:txBody>
+          <a:bodyPr wrap="square" lIns="45720" rIns="45720">
+            <a:spAutoFit/>
+          </a:bodyPr>
+          <a:lstStyle/>
+          <a:p>
+            <a:pPr>
+              <a:defRPr>
+                <a:latin typeface="Roboto"/>
+              </a:defRPr>
+            </a:pPr>
+            <a:r>
+              <a:rPr sz="1200" b="0">
+                <a:solidFill>
+                  <a:srgbClr val="25342A"/>
+                </a:solidFill>
+                <a:latin typeface="Roboto"/>
+              </a:rPr>
+              <a:t>The full cost is $57,236 a month; $26,734 of it is shared cost the grant doesn't pay for. Worth asking for as much of it as the funder allows at renewal.</a:t>
+            </a:r>
+          </a:p>
+        </p:txBody>
+      </p:sp>
+      <p:sp>
+        <p:nvSpPr>
+          <p:cNvPr id="13" name="TextBox 12"/>
+          <p:cNvSpPr txBox="1"/>
+          <p:nvPr/>
+        </p:nvSpPr>
+        <p:spPr>
+          <a:xfrm>
+            <a:off x="457200" y="6492240"/>
+            <a:ext cx="2926080" cy="274320"/>
+          </a:xfrm>
+          <a:prstGeom prst="rect">
+            <a:avLst/>
+          </a:prstGeom>
+          <a:noFill/>
+        </p:spPr>
+        <p:txBody>
+          <a:bodyPr wrap="square" lIns="45720" rIns="45720">
             <a:spAutoFit/>
           </a:bodyPr>
           <a:lstStyle/>
@@ -4649,14 +6632,14 @@
       </p:sp>
       <p:sp>
         <p:nvSpPr>
-          <p:cNvPr id="7" name="TextBox 6"/>
+          <p:cNvPr id="14" name="TextBox 13"/>
           <p:cNvSpPr txBox="1"/>
           <p:nvPr/>
         </p:nvSpPr>
         <p:spPr>
           <a:xfrm>
-            <a:off x="4297680" y="6492240"/>
-            <a:ext cx="3657600" cy="274320"/>
+            <a:off x="3108960" y="6492240"/>
+            <a:ext cx="5943600" cy="274320"/>
           </a:xfrm>
           <a:prstGeom prst="rect">
             <a:avLst/>
@@ -4664,7 +6647,7 @@
           <a:noFill/>
         </p:spPr>
         <p:txBody>
-          <a:bodyPr wrap="square">
+          <a:bodyPr wrap="square" lIns="45720" rIns="45720">
             <a:spAutoFit/>
           </a:bodyPr>
           <a:lstStyle/>
@@ -4681,14 +6664,14 @@
                 </a:solidFill>
                 <a:latin typeface="Roboto"/>
               </a:rPr>
-              <a:t>Data retrieved 2pm, Tue 6 Oct 2026 · Sample data</a:t>
-            </a:r>
-          </a:p>
-        </p:txBody>
-      </p:sp>
-      <p:sp>
-        <p:nvSpPr>
-          <p:cNvPr id="8" name="TextBox 7"/>
+              <a:t>Data retrieved 2pm, Tue 6 Oct 2026 · Generated 8 Oct 2026, 9:35am · Sample data · Made with Python (python-pptx)</a:t>
+            </a:r>
+          </a:p>
+        </p:txBody>
+      </p:sp>
+      <p:sp>
+        <p:nvSpPr>
+          <p:cNvPr id="15" name="TextBox 14"/>
           <p:cNvSpPr txBox="1"/>
           <p:nvPr/>
         </p:nvSpPr>
@@ -4703,7 +6686,7 @@
           <a:noFill/>
         </p:spPr>
         <p:txBody>
-          <a:bodyPr wrap="square">
+          <a:bodyPr wrap="square" lIns="45720" rIns="45720">
             <a:spAutoFit/>
           </a:bodyPr>
           <a:lstStyle/>
@@ -4720,7 +6703,7 @@
                 </a:solidFill>
                 <a:latin typeface="Roboto"/>
               </a:rPr>
-              <a:t>Slide 3 of 9</a:t>
+              <a:t>Slide 3 of 6</a:t>
             </a:r>
           </a:p>
         </p:txBody>
@@ -4745,7 +6728,44 @@
       <p:grpSpPr/>
       <p:sp>
         <p:nvSpPr>
-          <p:cNvPr id="2" name="Rectangle 1"/>
+          <p:cNvPr id="2" name="Title 1"/>
+          <p:cNvSpPr>
+            <a:spLocks noGrp="1"/>
+          </p:cNvSpPr>
+          <p:nvPr>
+            <p:ph type="title"/>
+          </p:nvPr>
+        </p:nvSpPr>
+        <p:spPr>
+          <a:xfrm>
+            <a:off x="457200" y="384048"/>
+            <a:ext cx="11277295" cy="475488"/>
+          </a:xfrm>
+        </p:spPr>
+        <p:txBody>
+          <a:bodyPr wrap="square" lIns="45720" rIns="45720" tIns="0" bIns="0" anchor="t"/>
+          <a:lstStyle/>
+          <a:p>
+            <a:pPr algn="l">
+              <a:defRPr>
+                <a:latin typeface="Roboto"/>
+              </a:defRPr>
+            </a:pPr>
+            <a:r>
+              <a:rPr sz="2400" b="1">
+                <a:solidFill>
+                  <a:srgbClr val="25342A"/>
+                </a:solidFill>
+                <a:latin typeface="Roboto"/>
+              </a:rPr>
+              <a:t>Youth outreach</a:t>
+            </a:r>
+          </a:p>
+        </p:txBody>
+      </p:sp>
+      <p:sp>
+        <p:nvSpPr>
+          <p:cNvPr id="3" name="Rectangle 2"/>
           <p:cNvSpPr/>
           <p:nvPr/>
         </p:nvSpPr>
@@ -4792,14 +6812,14 @@
       </p:sp>
       <p:sp>
         <p:nvSpPr>
-          <p:cNvPr id="3" name="TextBox 2"/>
+          <p:cNvPr id="4" name="TextBox 3"/>
           <p:cNvSpPr txBox="1"/>
           <p:nvPr/>
         </p:nvSpPr>
         <p:spPr>
           <a:xfrm>
-            <a:off x="457200" y="164592"/>
-            <a:ext cx="7315200" cy="274320"/>
+            <a:off x="457200" y="146304"/>
+            <a:ext cx="8229600" cy="256032"/>
           </a:xfrm>
           <a:prstGeom prst="rect">
             <a:avLst/>
@@ -4807,7 +6827,7 @@
           <a:noFill/>
         </p:spPr>
         <p:txBody>
-          <a:bodyPr wrap="square">
+          <a:bodyPr wrap="square" lIns="45720" rIns="45720">
             <a:spAutoFit/>
           </a:bodyPr>
           <a:lstStyle/>
@@ -4831,14 +6851,14 @@
       </p:sp>
       <p:sp>
         <p:nvSpPr>
-          <p:cNvPr id="4" name="TextBox 3"/>
+          <p:cNvPr id="5" name="TextBox 4"/>
           <p:cNvSpPr txBox="1"/>
           <p:nvPr/>
         </p:nvSpPr>
         <p:spPr>
           <a:xfrm>
-            <a:off x="457200" y="411480"/>
-            <a:ext cx="11247120" cy="548640"/>
+            <a:off x="457200" y="914400"/>
+            <a:ext cx="11277295" cy="263652"/>
           </a:xfrm>
           <a:prstGeom prst="rect">
             <a:avLst/>
@@ -4846,7 +6866,7 @@
           <a:noFill/>
         </p:spPr>
         <p:txBody>
-          <a:bodyPr wrap="square">
+          <a:bodyPr wrap="square" lIns="45720" rIns="45720">
             <a:spAutoFit/>
           </a:bodyPr>
           <a:lstStyle/>
@@ -4857,27 +6877,45 @@
               </a:defRPr>
             </a:pPr>
             <a:r>
-              <a:rPr sz="2400" b="1">
+              <a:rPr sz="1200" b="0">
                 <a:solidFill>
-                  <a:srgbClr val="25342A"/>
+                  <a:srgbClr val="5F6F63"/>
                 </a:solidFill>
                 <a:latin typeface="Roboto"/>
               </a:rPr>
-              <a:t>What it shows · Program: All programs</a:t>
-            </a:r>
-          </a:p>
-        </p:txBody>
-      </p:sp>
-      <p:sp>
-        <p:nvSpPr>
-          <p:cNvPr id="5" name="Rectangle 4"/>
+              <a:t>Grant spending, by month · Youth outreach</a:t>
+            </a:r>
+          </a:p>
+        </p:txBody>
+      </p:sp>
+      <p:graphicFrame>
+        <p:nvGraphicFramePr>
+          <p:cNvPr id="6" name="Chart 5"/>
+          <p:cNvGraphicFramePr>
+            <a:graphicFrameLocks noGrp="1"/>
+          </p:cNvGraphicFramePr>
+          <p:nvPr/>
+        </p:nvGraphicFramePr>
+        <p:xfrm>
+          <a:off x="457200" y="1278636"/>
+          <a:ext cx="11277295" cy="3643884"/>
+        </p:xfrm>
+        <a:graphic>
+          <a:graphicData uri="http://schemas.openxmlformats.org/drawingml/2006/chart">
+            <c:chart xmlns:c="http://schemas.openxmlformats.org/drawingml/2006/chart" r:id="rId3"/>
+          </a:graphicData>
+        </a:graphic>
+      </p:graphicFrame>
+      <p:sp>
+        <p:nvSpPr>
+          <p:cNvPr id="7" name="Rectangle 6"/>
           <p:cNvSpPr/>
           <p:nvPr/>
         </p:nvSpPr>
         <p:spPr>
           <a:xfrm>
-            <a:off x="457200" y="1554480"/>
-            <a:ext cx="5501487" cy="4389120"/>
+            <a:off x="457200" y="5013960"/>
+            <a:ext cx="5501487" cy="1295400"/>
           </a:xfrm>
           <a:prstGeom prst="rect">
             <a:avLst/>
@@ -4919,14 +6957,14 @@
       </p:sp>
       <p:sp>
         <p:nvSpPr>
-          <p:cNvPr id="6" name="TextBox 5"/>
+          <p:cNvPr id="8" name="TextBox 7"/>
           <p:cNvSpPr txBox="1"/>
           <p:nvPr/>
         </p:nvSpPr>
         <p:spPr>
           <a:xfrm>
-            <a:off x="685800" y="1691640"/>
-            <a:ext cx="5044287" cy="365760"/>
+            <a:off x="594360" y="5068824"/>
+            <a:ext cx="5227167" cy="274320"/>
           </a:xfrm>
           <a:prstGeom prst="rect">
             <a:avLst/>
@@ -4934,7 +6972,7 @@
           <a:noFill/>
         </p:spPr>
         <p:txBody>
-          <a:bodyPr wrap="square">
+          <a:bodyPr wrap="square" lIns="45720" rIns="45720">
             <a:spAutoFit/>
           </a:bodyPr>
           <a:lstStyle/>
@@ -4945,7 +6983,7 @@
               </a:defRPr>
             </a:pPr>
             <a:r>
-              <a:rPr sz="1100" b="1">
+              <a:rPr sz="1000" b="1">
                 <a:solidFill>
                   <a:srgbClr val="5F6F63"/>
                 </a:solidFill>
@@ -4958,14 +6996,14 @@
       </p:sp>
       <p:sp>
         <p:nvSpPr>
-          <p:cNvPr id="7" name="TextBox 6"/>
+          <p:cNvPr id="9" name="TextBox 8"/>
           <p:cNvSpPr txBox="1"/>
           <p:nvPr/>
         </p:nvSpPr>
         <p:spPr>
           <a:xfrm>
-            <a:off x="685800" y="2103120"/>
-            <a:ext cx="5044287" cy="3749039"/>
+            <a:off x="594360" y="5343144"/>
+            <a:ext cx="5227167" cy="929640"/>
           </a:xfrm>
           <a:prstGeom prst="rect">
             <a:avLst/>
@@ -4973,7 +7011,7 @@
           <a:noFill/>
         </p:spPr>
         <p:txBody>
-          <a:bodyPr wrap="square">
+          <a:bodyPr wrap="square" lIns="45720" rIns="45720">
             <a:spAutoFit/>
           </a:bodyPr>
           <a:lstStyle/>
@@ -4984,27 +7022,27 @@
               </a:defRPr>
             </a:pPr>
             <a:r>
-              <a:rPr sz="1600" b="0">
+              <a:rPr sz="1200" b="0">
                 <a:solidFill>
                   <a:srgbClr val="25342A"/>
                 </a:solidFill>
                 <a:latin typeface="Roboto"/>
               </a:rPr>
-              <a:t>Housing support is the biggest program: $57,236 in January once its share of untied program costs and administration is added to $30,502 of grant spending. Shared costs add 87.6% on top of grant spending across all programs.</a:t>
-            </a:r>
-          </a:p>
-        </p:txBody>
-      </p:sp>
-      <p:sp>
-        <p:nvSpPr>
-          <p:cNvPr id="8" name="Rectangle 7"/>
+              <a:t>Youth outreach cost $39,701 in full in January: $21,157 paid by the State Department of Families grant, and $18,544 of shared costs no grant covers. It has spent 99.6% of its budget to date, with $340,523 left and 17 months to go.</a:t>
+            </a:r>
+          </a:p>
+        </p:txBody>
+      </p:sp>
+      <p:sp>
+        <p:nvSpPr>
+          <p:cNvPr id="10" name="Rectangle 9"/>
           <p:cNvSpPr/>
           <p:nvPr/>
         </p:nvSpPr>
         <p:spPr>
           <a:xfrm>
-            <a:off x="6233007" y="1554480"/>
-            <a:ext cx="5501487" cy="4389120"/>
+            <a:off x="6233007" y="5013960"/>
+            <a:ext cx="5501487" cy="1295400"/>
           </a:xfrm>
           <a:prstGeom prst="rect">
             <a:avLst/>
@@ -5046,14 +7084,14 @@
       </p:sp>
       <p:sp>
         <p:nvSpPr>
-          <p:cNvPr id="9" name="TextBox 8"/>
+          <p:cNvPr id="11" name="TextBox 10"/>
           <p:cNvSpPr txBox="1"/>
           <p:nvPr/>
         </p:nvSpPr>
         <p:spPr>
           <a:xfrm>
-            <a:off x="6461607" y="1691640"/>
-            <a:ext cx="5044287" cy="365760"/>
+            <a:off x="6370167" y="5068824"/>
+            <a:ext cx="5227167" cy="274320"/>
           </a:xfrm>
           <a:prstGeom prst="rect">
             <a:avLst/>
@@ -5061,7 +7099,7 @@
           <a:noFill/>
         </p:spPr>
         <p:txBody>
-          <a:bodyPr wrap="square">
+          <a:bodyPr wrap="square" lIns="45720" rIns="45720">
             <a:spAutoFit/>
           </a:bodyPr>
           <a:lstStyle/>
@@ -5072,7 +7110,7 @@
               </a:defRPr>
             </a:pPr>
             <a:r>
-              <a:rPr sz="1100" b="1">
+              <a:rPr sz="1000" b="1">
                 <a:solidFill>
                   <a:srgbClr val="5F6F63"/>
                 </a:solidFill>
@@ -5085,14 +7123,14 @@
       </p:sp>
       <p:sp>
         <p:nvSpPr>
-          <p:cNvPr id="10" name="TextBox 9"/>
+          <p:cNvPr id="12" name="TextBox 11"/>
           <p:cNvSpPr txBox="1"/>
           <p:nvPr/>
         </p:nvSpPr>
         <p:spPr>
           <a:xfrm>
-            <a:off x="6461607" y="2103120"/>
-            <a:ext cx="5044287" cy="3749039"/>
+            <a:off x="6370167" y="5343144"/>
+            <a:ext cx="5227167" cy="929640"/>
           </a:xfrm>
           <a:prstGeom prst="rect">
             <a:avLst/>
@@ -5100,7 +7138,7 @@
           <a:noFill/>
         </p:spPr>
         <p:txBody>
-          <a:bodyPr wrap="square">
+          <a:bodyPr wrap="square" lIns="45720" rIns="45720">
             <a:spAutoFit/>
           </a:bodyPr>
           <a:lstStyle/>
@@ -5111,27 +7149,27 @@
               </a:defRPr>
             </a:pPr>
             <a:r>
-              <a:rPr sz="1600" b="0">
+              <a:rPr sz="1200" b="0">
                 <a:solidFill>
                   <a:srgbClr val="25342A"/>
                 </a:solidFill>
                 <a:latin typeface="Roboto"/>
               </a:rPr>
-              <a:t>The full cost (not just the grant line) is the number for renewal applications, where the funder lets you recover a share of overheads. Pick a program above to see it on its own.</a:t>
-            </a:r>
-          </a:p>
-        </p:txBody>
-      </p:sp>
-      <p:sp>
-        <p:nvSpPr>
-          <p:cNvPr id="11" name="TextBox 10"/>
+              <a:t>The full cost is $39,701 a month; $18,544 of it is shared cost the grant doesn't pay for. Worth asking for as much of it as the funder allows at renewal.</a:t>
+            </a:r>
+          </a:p>
+        </p:txBody>
+      </p:sp>
+      <p:sp>
+        <p:nvSpPr>
+          <p:cNvPr id="13" name="TextBox 12"/>
           <p:cNvSpPr txBox="1"/>
           <p:nvPr/>
         </p:nvSpPr>
         <p:spPr>
           <a:xfrm>
             <a:off x="457200" y="6492240"/>
-            <a:ext cx="3657600" cy="274320"/>
+            <a:ext cx="2926080" cy="274320"/>
           </a:xfrm>
           <a:prstGeom prst="rect">
             <a:avLst/>
@@ -5139,7 +7177,7 @@
           <a:noFill/>
         </p:spPr>
         <p:txBody>
-          <a:bodyPr wrap="square">
+          <a:bodyPr wrap="square" lIns="45720" rIns="45720">
             <a:spAutoFit/>
           </a:bodyPr>
           <a:lstStyle/>
@@ -5163,14 +7201,14 @@
       </p:sp>
       <p:sp>
         <p:nvSpPr>
-          <p:cNvPr id="12" name="TextBox 11"/>
+          <p:cNvPr id="14" name="TextBox 13"/>
           <p:cNvSpPr txBox="1"/>
           <p:nvPr/>
         </p:nvSpPr>
         <p:spPr>
           <a:xfrm>
-            <a:off x="4297680" y="6492240"/>
-            <a:ext cx="3657600" cy="274320"/>
+            <a:off x="3108960" y="6492240"/>
+            <a:ext cx="5943600" cy="274320"/>
           </a:xfrm>
           <a:prstGeom prst="rect">
             <a:avLst/>
@@ -5178,7 +7216,7 @@
           <a:noFill/>
         </p:spPr>
         <p:txBody>
-          <a:bodyPr wrap="square">
+          <a:bodyPr wrap="square" lIns="45720" rIns="45720">
             <a:spAutoFit/>
           </a:bodyPr>
           <a:lstStyle/>
@@ -5195,14 +7233,14 @@
                 </a:solidFill>
                 <a:latin typeface="Roboto"/>
               </a:rPr>
-              <a:t>Data retrieved 2pm, Tue 6 Oct 2026 · Sample data</a:t>
-            </a:r>
-          </a:p>
-        </p:txBody>
-      </p:sp>
-      <p:sp>
-        <p:nvSpPr>
-          <p:cNvPr id="13" name="TextBox 12"/>
+              <a:t>Data retrieved 2pm, Tue 6 Oct 2026 · Generated 8 Oct 2026, 9:35am · Sample data · Made with Python (python-pptx)</a:t>
+            </a:r>
+          </a:p>
+        </p:txBody>
+      </p:sp>
+      <p:sp>
+        <p:nvSpPr>
+          <p:cNvPr id="15" name="TextBox 14"/>
           <p:cNvSpPr txBox="1"/>
           <p:nvPr/>
         </p:nvSpPr>
@@ -5217,7 +7255,7 @@
           <a:noFill/>
         </p:spPr>
         <p:txBody>
-          <a:bodyPr wrap="square">
+          <a:bodyPr wrap="square" lIns="45720" rIns="45720">
             <a:spAutoFit/>
           </a:bodyPr>
           <a:lstStyle/>
@@ -5234,7 +7272,7 @@
                 </a:solidFill>
                 <a:latin typeface="Roboto"/>
               </a:rPr>
-              <a:t>Slide 4 of 9</a:t>
+              <a:t>Slide 4 of 6</a:t>
             </a:r>
           </a:p>
         </p:txBody>
@@ -5259,7 +7297,44 @@
       <p:grpSpPr/>
       <p:sp>
         <p:nvSpPr>
-          <p:cNvPr id="2" name="Rectangle 1"/>
+          <p:cNvPr id="2" name="Title 1"/>
+          <p:cNvSpPr>
+            <a:spLocks noGrp="1"/>
+          </p:cNvSpPr>
+          <p:nvPr>
+            <p:ph type="title"/>
+          </p:nvPr>
+        </p:nvSpPr>
+        <p:spPr>
+          <a:xfrm>
+            <a:off x="457200" y="384048"/>
+            <a:ext cx="11277295" cy="475488"/>
+          </a:xfrm>
+        </p:spPr>
+        <p:txBody>
+          <a:bodyPr wrap="square" lIns="45720" rIns="45720" tIns="0" bIns="0" anchor="t"/>
+          <a:lstStyle/>
+          <a:p>
+            <a:pPr algn="l">
+              <a:defRPr>
+                <a:latin typeface="Roboto"/>
+              </a:defRPr>
+            </a:pPr>
+            <a:r>
+              <a:rPr sz="2400" b="1">
+                <a:solidFill>
+                  <a:srgbClr val="25342A"/>
+                </a:solidFill>
+                <a:latin typeface="Roboto"/>
+              </a:rPr>
+              <a:t>Digital literacy</a:t>
+            </a:r>
+          </a:p>
+        </p:txBody>
+      </p:sp>
+      <p:sp>
+        <p:nvSpPr>
+          <p:cNvPr id="3" name="Rectangle 2"/>
           <p:cNvSpPr/>
           <p:nvPr/>
         </p:nvSpPr>
@@ -5306,14 +7381,14 @@
       </p:sp>
       <p:sp>
         <p:nvSpPr>
-          <p:cNvPr id="3" name="TextBox 2"/>
+          <p:cNvPr id="4" name="TextBox 3"/>
           <p:cNvSpPr txBox="1"/>
           <p:nvPr/>
         </p:nvSpPr>
         <p:spPr>
           <a:xfrm>
-            <a:off x="457200" y="164592"/>
-            <a:ext cx="7315200" cy="274320"/>
+            <a:off x="457200" y="146304"/>
+            <a:ext cx="8229600" cy="256032"/>
           </a:xfrm>
           <a:prstGeom prst="rect">
             <a:avLst/>
@@ -5321,7 +7396,7 @@
           <a:noFill/>
         </p:spPr>
         <p:txBody>
-          <a:bodyPr wrap="square">
+          <a:bodyPr wrap="square" lIns="45720" rIns="45720">
             <a:spAutoFit/>
           </a:bodyPr>
           <a:lstStyle/>
@@ -5345,14 +7420,14 @@
       </p:sp>
       <p:sp>
         <p:nvSpPr>
-          <p:cNvPr id="4" name="TextBox 3"/>
+          <p:cNvPr id="5" name="TextBox 4"/>
           <p:cNvSpPr txBox="1"/>
           <p:nvPr/>
         </p:nvSpPr>
         <p:spPr>
           <a:xfrm>
-            <a:off x="457200" y="411480"/>
-            <a:ext cx="11247120" cy="548640"/>
+            <a:off x="457200" y="914400"/>
+            <a:ext cx="11277295" cy="263652"/>
           </a:xfrm>
           <a:prstGeom prst="rect">
             <a:avLst/>
@@ -5360,7 +7435,7 @@
           <a:noFill/>
         </p:spPr>
         <p:txBody>
-          <a:bodyPr wrap="square">
+          <a:bodyPr wrap="square" lIns="45720" rIns="45720">
             <a:spAutoFit/>
           </a:bodyPr>
           <a:lstStyle/>
@@ -5371,27 +7446,45 @@
               </a:defRPr>
             </a:pPr>
             <a:r>
-              <a:rPr sz="2400" b="1">
+              <a:rPr sz="1200" b="0">
                 <a:solidFill>
-                  <a:srgbClr val="25342A"/>
+                  <a:srgbClr val="5F6F63"/>
                 </a:solidFill>
                 <a:latin typeface="Roboto"/>
               </a:rPr>
-              <a:t>What it shows · Program: Housing support</a:t>
-            </a:r>
-          </a:p>
-        </p:txBody>
-      </p:sp>
-      <p:sp>
-        <p:nvSpPr>
-          <p:cNvPr id="5" name="Rectangle 4"/>
+              <a:t>Grant spending, by month · Digital literacy</a:t>
+            </a:r>
+          </a:p>
+        </p:txBody>
+      </p:sp>
+      <p:graphicFrame>
+        <p:nvGraphicFramePr>
+          <p:cNvPr id="6" name="Chart 5"/>
+          <p:cNvGraphicFramePr>
+            <a:graphicFrameLocks noGrp="1"/>
+          </p:cNvGraphicFramePr>
+          <p:nvPr/>
+        </p:nvGraphicFramePr>
+        <p:xfrm>
+          <a:off x="457200" y="1278636"/>
+          <a:ext cx="11277295" cy="3643884"/>
+        </p:xfrm>
+        <a:graphic>
+          <a:graphicData uri="http://schemas.openxmlformats.org/drawingml/2006/chart">
+            <c:chart xmlns:c="http://schemas.openxmlformats.org/drawingml/2006/chart" r:id="rId3"/>
+          </a:graphicData>
+        </a:graphic>
+      </p:graphicFrame>
+      <p:sp>
+        <p:nvSpPr>
+          <p:cNvPr id="7" name="Rectangle 6"/>
           <p:cNvSpPr/>
           <p:nvPr/>
         </p:nvSpPr>
         <p:spPr>
           <a:xfrm>
-            <a:off x="457200" y="1554480"/>
-            <a:ext cx="5501487" cy="4389120"/>
+            <a:off x="457200" y="5013960"/>
+            <a:ext cx="5501487" cy="1295400"/>
           </a:xfrm>
           <a:prstGeom prst="rect">
             <a:avLst/>
@@ -5433,14 +7526,14 @@
       </p:sp>
       <p:sp>
         <p:nvSpPr>
-          <p:cNvPr id="6" name="TextBox 5"/>
+          <p:cNvPr id="8" name="TextBox 7"/>
           <p:cNvSpPr txBox="1"/>
           <p:nvPr/>
         </p:nvSpPr>
         <p:spPr>
           <a:xfrm>
-            <a:off x="685800" y="1691640"/>
-            <a:ext cx="5044287" cy="365760"/>
+            <a:off x="594360" y="5068824"/>
+            <a:ext cx="5227167" cy="274320"/>
           </a:xfrm>
           <a:prstGeom prst="rect">
             <a:avLst/>
@@ -5448,7 +7541,7 @@
           <a:noFill/>
         </p:spPr>
         <p:txBody>
-          <a:bodyPr wrap="square">
+          <a:bodyPr wrap="square" lIns="45720" rIns="45720">
             <a:spAutoFit/>
           </a:bodyPr>
           <a:lstStyle/>
@@ -5459,7 +7552,7 @@
               </a:defRPr>
             </a:pPr>
             <a:r>
-              <a:rPr sz="1100" b="1">
+              <a:rPr sz="1000" b="1">
                 <a:solidFill>
                   <a:srgbClr val="5F6F63"/>
                 </a:solidFill>
@@ -5472,14 +7565,14 @@
       </p:sp>
       <p:sp>
         <p:nvSpPr>
-          <p:cNvPr id="7" name="TextBox 6"/>
+          <p:cNvPr id="9" name="TextBox 8"/>
           <p:cNvSpPr txBox="1"/>
           <p:nvPr/>
         </p:nvSpPr>
         <p:spPr>
           <a:xfrm>
-            <a:off x="685800" y="2103120"/>
-            <a:ext cx="5044287" cy="3749039"/>
+            <a:off x="594360" y="5343144"/>
+            <a:ext cx="5227167" cy="929640"/>
           </a:xfrm>
           <a:prstGeom prst="rect">
             <a:avLst/>
@@ -5487,7 +7580,7 @@
           <a:noFill/>
         </p:spPr>
         <p:txBody>
-          <a:bodyPr wrap="square">
+          <a:bodyPr wrap="square" lIns="45720" rIns="45720">
             <a:spAutoFit/>
           </a:bodyPr>
           <a:lstStyle/>
@@ -5498,27 +7591,27 @@
               </a:defRPr>
             </a:pPr>
             <a:r>
-              <a:rPr sz="1600" b="0">
+              <a:rPr sz="1200" b="0">
                 <a:solidFill>
                   <a:srgbClr val="25342A"/>
                 </a:solidFill>
                 <a:latin typeface="Roboto"/>
               </a:rPr>
-              <a:t>Housing support cost $57,236 in full in January: $30,502 paid by the State Housing Program grant, and $26,734 of shared costs no grant covers. It has spent 101.7% of its budget to date, with $329,498 left and 11 months to go.</a:t>
-            </a:r>
-          </a:p>
-        </p:txBody>
-      </p:sp>
-      <p:sp>
-        <p:nvSpPr>
-          <p:cNvPr id="8" name="Rectangle 7"/>
+              <a:t>Digital literacy cost $8,305 in full in January: $4,426 paid by the Philanthropic foundation grant, and $3,879 of shared costs no grant covers. It has spent 97.0% of its budget to date, with $70,608 left and 14 months to go.</a:t>
+            </a:r>
+          </a:p>
+        </p:txBody>
+      </p:sp>
+      <p:sp>
+        <p:nvSpPr>
+          <p:cNvPr id="10" name="Rectangle 9"/>
           <p:cNvSpPr/>
           <p:nvPr/>
         </p:nvSpPr>
         <p:spPr>
           <a:xfrm>
-            <a:off x="6233007" y="1554480"/>
-            <a:ext cx="5501487" cy="4389120"/>
+            <a:off x="6233007" y="5013960"/>
+            <a:ext cx="5501487" cy="1295400"/>
           </a:xfrm>
           <a:prstGeom prst="rect">
             <a:avLst/>
@@ -5560,14 +7653,14 @@
       </p:sp>
       <p:sp>
         <p:nvSpPr>
-          <p:cNvPr id="9" name="TextBox 8"/>
+          <p:cNvPr id="11" name="TextBox 10"/>
           <p:cNvSpPr txBox="1"/>
           <p:nvPr/>
         </p:nvSpPr>
         <p:spPr>
           <a:xfrm>
-            <a:off x="6461607" y="1691640"/>
-            <a:ext cx="5044287" cy="365760"/>
+            <a:off x="6370167" y="5068824"/>
+            <a:ext cx="5227167" cy="274320"/>
           </a:xfrm>
           <a:prstGeom prst="rect">
             <a:avLst/>
@@ -5575,7 +7668,7 @@
           <a:noFill/>
         </p:spPr>
         <p:txBody>
-          <a:bodyPr wrap="square">
+          <a:bodyPr wrap="square" lIns="45720" rIns="45720">
             <a:spAutoFit/>
           </a:bodyPr>
           <a:lstStyle/>
@@ -5586,7 +7679,7 @@
               </a:defRPr>
             </a:pPr>
             <a:r>
-              <a:rPr sz="1100" b="1">
+              <a:rPr sz="1000" b="1">
                 <a:solidFill>
                   <a:srgbClr val="5F6F63"/>
                 </a:solidFill>
@@ -5599,14 +7692,14 @@
       </p:sp>
       <p:sp>
         <p:nvSpPr>
-          <p:cNvPr id="10" name="TextBox 9"/>
+          <p:cNvPr id="12" name="TextBox 11"/>
           <p:cNvSpPr txBox="1"/>
           <p:nvPr/>
         </p:nvSpPr>
         <p:spPr>
           <a:xfrm>
-            <a:off x="6461607" y="2103120"/>
-            <a:ext cx="5044287" cy="3749039"/>
+            <a:off x="6370167" y="5343144"/>
+            <a:ext cx="5227167" cy="929640"/>
           </a:xfrm>
           <a:prstGeom prst="rect">
             <a:avLst/>
@@ -5614,7 +7707,7 @@
           <a:noFill/>
         </p:spPr>
         <p:txBody>
-          <a:bodyPr wrap="square">
+          <a:bodyPr wrap="square" lIns="45720" rIns="45720">
             <a:spAutoFit/>
           </a:bodyPr>
           <a:lstStyle/>
@@ -5625,27 +7718,27 @@
               </a:defRPr>
             </a:pPr>
             <a:r>
-              <a:rPr sz="1600" b="0">
+              <a:rPr sz="1200" b="0">
                 <a:solidFill>
                   <a:srgbClr val="25342A"/>
                 </a:solidFill>
                 <a:latin typeface="Roboto"/>
               </a:rPr>
-              <a:t>The full cost is $57,236 a month; $26,734 of it is shared cost the grant doesn't pay for. Worth asking for as much of it as the funder allows at renewal.</a:t>
-            </a:r>
-          </a:p>
-        </p:txBody>
-      </p:sp>
-      <p:sp>
-        <p:nvSpPr>
-          <p:cNvPr id="11" name="TextBox 10"/>
+              <a:t>The full cost is $8,305 a month; $3,879 of it is shared cost the grant doesn't pay for. Worth asking for as much of it as the funder allows at renewal.</a:t>
+            </a:r>
+          </a:p>
+        </p:txBody>
+      </p:sp>
+      <p:sp>
+        <p:nvSpPr>
+          <p:cNvPr id="13" name="TextBox 12"/>
           <p:cNvSpPr txBox="1"/>
           <p:nvPr/>
         </p:nvSpPr>
         <p:spPr>
           <a:xfrm>
             <a:off x="457200" y="6492240"/>
-            <a:ext cx="3657600" cy="274320"/>
+            <a:ext cx="2926080" cy="274320"/>
           </a:xfrm>
           <a:prstGeom prst="rect">
             <a:avLst/>
@@ -5653,7 +7746,7 @@
           <a:noFill/>
         </p:spPr>
         <p:txBody>
-          <a:bodyPr wrap="square">
+          <a:bodyPr wrap="square" lIns="45720" rIns="45720">
             <a:spAutoFit/>
           </a:bodyPr>
           <a:lstStyle/>
@@ -5677,14 +7770,14 @@
       </p:sp>
       <p:sp>
         <p:nvSpPr>
-          <p:cNvPr id="12" name="TextBox 11"/>
+          <p:cNvPr id="14" name="TextBox 13"/>
           <p:cNvSpPr txBox="1"/>
           <p:nvPr/>
         </p:nvSpPr>
         <p:spPr>
           <a:xfrm>
-            <a:off x="4297680" y="6492240"/>
-            <a:ext cx="3657600" cy="274320"/>
+            <a:off x="3108960" y="6492240"/>
+            <a:ext cx="5943600" cy="274320"/>
           </a:xfrm>
           <a:prstGeom prst="rect">
             <a:avLst/>
@@ -5692,7 +7785,7 @@
           <a:noFill/>
         </p:spPr>
         <p:txBody>
-          <a:bodyPr wrap="square">
+          <a:bodyPr wrap="square" lIns="45720" rIns="45720">
             <a:spAutoFit/>
           </a:bodyPr>
           <a:lstStyle/>
@@ -5709,14 +7802,14 @@
                 </a:solidFill>
                 <a:latin typeface="Roboto"/>
               </a:rPr>
-              <a:t>Data retrieved 2pm, Tue 6 Oct 2026 · Sample data</a:t>
-            </a:r>
-          </a:p>
-        </p:txBody>
-      </p:sp>
-      <p:sp>
-        <p:nvSpPr>
-          <p:cNvPr id="13" name="TextBox 12"/>
+              <a:t>Data retrieved 2pm, Tue 6 Oct 2026 · Generated 8 Oct 2026, 9:35am · Sample data · Made with Python (python-pptx)</a:t>
+            </a:r>
+          </a:p>
+        </p:txBody>
+      </p:sp>
+      <p:sp>
+        <p:nvSpPr>
+          <p:cNvPr id="15" name="TextBox 14"/>
           <p:cNvSpPr txBox="1"/>
           <p:nvPr/>
         </p:nvSpPr>
@@ -5731,7 +7824,7 @@
           <a:noFill/>
         </p:spPr>
         <p:txBody>
-          <a:bodyPr wrap="square">
+          <a:bodyPr wrap="square" lIns="45720" rIns="45720">
             <a:spAutoFit/>
           </a:bodyPr>
           <a:lstStyle/>
@@ -5748,7 +7841,7 @@
                 </a:solidFill>
                 <a:latin typeface="Roboto"/>
               </a:rPr>
-              <a:t>Slide 5 of 9</a:t>
+              <a:t>Slide 5 of 6</a:t>
             </a:r>
           </a:p>
         </p:txBody>
@@ -5773,7 +7866,44 @@
       <p:grpSpPr/>
       <p:sp>
         <p:nvSpPr>
-          <p:cNvPr id="2" name="Rectangle 1"/>
+          <p:cNvPr id="2" name="Title 1"/>
+          <p:cNvSpPr>
+            <a:spLocks noGrp="1"/>
+          </p:cNvSpPr>
+          <p:nvPr>
+            <p:ph type="title"/>
+          </p:nvPr>
+        </p:nvSpPr>
+        <p:spPr>
+          <a:xfrm>
+            <a:off x="457200" y="384048"/>
+            <a:ext cx="11277295" cy="475488"/>
+          </a:xfrm>
+        </p:spPr>
+        <p:txBody>
+          <a:bodyPr wrap="square" lIns="45720" rIns="45720" tIns="0" bIns="0" anchor="t"/>
+          <a:lstStyle/>
+          <a:p>
+            <a:pPr algn="l">
+              <a:defRPr>
+                <a:latin typeface="Roboto"/>
+              </a:defRPr>
+            </a:pPr>
+            <a:r>
+              <a:rPr sz="2400" b="1">
+                <a:solidFill>
+                  <a:srgbClr val="25342A"/>
+                </a:solidFill>
+                <a:latin typeface="Roboto"/>
+              </a:rPr>
+              <a:t>Community meals (2025-26)</a:t>
+            </a:r>
+          </a:p>
+        </p:txBody>
+      </p:sp>
+      <p:sp>
+        <p:nvSpPr>
+          <p:cNvPr id="3" name="Rectangle 2"/>
           <p:cNvSpPr/>
           <p:nvPr/>
         </p:nvSpPr>
@@ -5820,14 +7950,14 @@
       </p:sp>
       <p:sp>
         <p:nvSpPr>
-          <p:cNvPr id="3" name="TextBox 2"/>
+          <p:cNvPr id="4" name="TextBox 3"/>
           <p:cNvSpPr txBox="1"/>
           <p:nvPr/>
         </p:nvSpPr>
         <p:spPr>
           <a:xfrm>
-            <a:off x="457200" y="164592"/>
-            <a:ext cx="7315200" cy="274320"/>
+            <a:off x="457200" y="146304"/>
+            <a:ext cx="8229600" cy="256032"/>
           </a:xfrm>
           <a:prstGeom prst="rect">
             <a:avLst/>
@@ -5835,7 +7965,7 @@
           <a:noFill/>
         </p:spPr>
         <p:txBody>
-          <a:bodyPr wrap="square">
+          <a:bodyPr wrap="square" lIns="45720" rIns="45720">
             <a:spAutoFit/>
           </a:bodyPr>
           <a:lstStyle/>
@@ -5859,14 +7989,14 @@
       </p:sp>
       <p:sp>
         <p:nvSpPr>
-          <p:cNvPr id="4" name="TextBox 3"/>
+          <p:cNvPr id="5" name="TextBox 4"/>
           <p:cNvSpPr txBox="1"/>
           <p:nvPr/>
         </p:nvSpPr>
         <p:spPr>
           <a:xfrm>
-            <a:off x="457200" y="411480"/>
-            <a:ext cx="11247120" cy="548640"/>
+            <a:off x="457200" y="914400"/>
+            <a:ext cx="11277295" cy="263652"/>
           </a:xfrm>
           <a:prstGeom prst="rect">
             <a:avLst/>
@@ -5874,7 +8004,7 @@
           <a:noFill/>
         </p:spPr>
         <p:txBody>
-          <a:bodyPr wrap="square">
+          <a:bodyPr wrap="square" lIns="45720" rIns="45720">
             <a:spAutoFit/>
           </a:bodyPr>
           <a:lstStyle/>
@@ -5885,27 +8015,45 @@
               </a:defRPr>
             </a:pPr>
             <a:r>
-              <a:rPr sz="2400" b="1">
+              <a:rPr sz="1200" b="0">
                 <a:solidFill>
-                  <a:srgbClr val="25342A"/>
+                  <a:srgbClr val="5F6F63"/>
                 </a:solidFill>
                 <a:latin typeface="Roboto"/>
               </a:rPr>
-              <a:t>What it shows · Program: Youth outreach</a:t>
-            </a:r>
-          </a:p>
-        </p:txBody>
-      </p:sp>
-      <p:sp>
-        <p:nvSpPr>
-          <p:cNvPr id="5" name="Rectangle 4"/>
+              <a:t>Grant spending, by month · Community meals (2025-26)</a:t>
+            </a:r>
+          </a:p>
+        </p:txBody>
+      </p:sp>
+      <p:graphicFrame>
+        <p:nvGraphicFramePr>
+          <p:cNvPr id="6" name="Chart 5"/>
+          <p:cNvGraphicFramePr>
+            <a:graphicFrameLocks noGrp="1"/>
+          </p:cNvGraphicFramePr>
+          <p:nvPr/>
+        </p:nvGraphicFramePr>
+        <p:xfrm>
+          <a:off x="457200" y="1278636"/>
+          <a:ext cx="11277295" cy="3643884"/>
+        </p:xfrm>
+        <a:graphic>
+          <a:graphicData uri="http://schemas.openxmlformats.org/drawingml/2006/chart">
+            <c:chart xmlns:c="http://schemas.openxmlformats.org/drawingml/2006/chart" r:id="rId3"/>
+          </a:graphicData>
+        </a:graphic>
+      </p:graphicFrame>
+      <p:sp>
+        <p:nvSpPr>
+          <p:cNvPr id="7" name="Rectangle 6"/>
           <p:cNvSpPr/>
           <p:nvPr/>
         </p:nvSpPr>
         <p:spPr>
           <a:xfrm>
-            <a:off x="457200" y="1554480"/>
-            <a:ext cx="5501487" cy="4389120"/>
+            <a:off x="457200" y="5013960"/>
+            <a:ext cx="5501487" cy="1295400"/>
           </a:xfrm>
           <a:prstGeom prst="rect">
             <a:avLst/>
@@ -5947,14 +8095,14 @@
       </p:sp>
       <p:sp>
         <p:nvSpPr>
-          <p:cNvPr id="6" name="TextBox 5"/>
+          <p:cNvPr id="8" name="TextBox 7"/>
           <p:cNvSpPr txBox="1"/>
           <p:nvPr/>
         </p:nvSpPr>
         <p:spPr>
           <a:xfrm>
-            <a:off x="685800" y="1691640"/>
-            <a:ext cx="5044287" cy="365760"/>
+            <a:off x="594360" y="5068824"/>
+            <a:ext cx="5227167" cy="274320"/>
           </a:xfrm>
           <a:prstGeom prst="rect">
             <a:avLst/>
@@ -5962,7 +8110,7 @@
           <a:noFill/>
         </p:spPr>
         <p:txBody>
-          <a:bodyPr wrap="square">
+          <a:bodyPr wrap="square" lIns="45720" rIns="45720">
             <a:spAutoFit/>
           </a:bodyPr>
           <a:lstStyle/>
@@ -5973,7 +8121,7 @@
               </a:defRPr>
             </a:pPr>
             <a:r>
-              <a:rPr sz="1100" b="1">
+              <a:rPr sz="1000" b="1">
                 <a:solidFill>
                   <a:srgbClr val="5F6F63"/>
                 </a:solidFill>
@@ -5986,14 +8134,14 @@
       </p:sp>
       <p:sp>
         <p:nvSpPr>
-          <p:cNvPr id="7" name="TextBox 6"/>
+          <p:cNvPr id="9" name="TextBox 8"/>
           <p:cNvSpPr txBox="1"/>
           <p:nvPr/>
         </p:nvSpPr>
         <p:spPr>
           <a:xfrm>
-            <a:off x="685800" y="2103120"/>
-            <a:ext cx="5044287" cy="3749039"/>
+            <a:off x="594360" y="5343144"/>
+            <a:ext cx="5227167" cy="929640"/>
           </a:xfrm>
           <a:prstGeom prst="rect">
             <a:avLst/>
@@ -6001,7 +8149,7 @@
           <a:noFill/>
         </p:spPr>
         <p:txBody>
-          <a:bodyPr wrap="square">
+          <a:bodyPr wrap="square" lIns="45720" rIns="45720">
             <a:spAutoFit/>
           </a:bodyPr>
           <a:lstStyle/>
@@ -6012,27 +8160,27 @@
               </a:defRPr>
             </a:pPr>
             <a:r>
-              <a:rPr sz="1600" b="0">
+              <a:rPr sz="1200" b="0">
                 <a:solidFill>
                   <a:srgbClr val="25342A"/>
                 </a:solidFill>
                 <a:latin typeface="Roboto"/>
               </a:rPr>
-              <a:t>Youth outreach cost $39,701 in full in January: $21,157 paid by the State Department of Families grant, and $18,544 of shared costs no grant covers. It has spent 99.6% of its budget to date, with $340,523 left and 17 months to go.</a:t>
-            </a:r>
-          </a:p>
-        </p:txBody>
-      </p:sp>
-      <p:sp>
-        <p:nvSpPr>
-          <p:cNvPr id="8" name="Rectangle 7"/>
+              <a:t>Community meals (2025-26) cost $6,943 in full in January: $3,700 paid by the Local council community grant grant, and $3,243 of shared costs no grant covers. It has spent 96.2% of its budget to date, with $19,300 left and 5 months to go.</a:t>
+            </a:r>
+          </a:p>
+        </p:txBody>
+      </p:sp>
+      <p:sp>
+        <p:nvSpPr>
+          <p:cNvPr id="10" name="Rectangle 9"/>
           <p:cNvSpPr/>
           <p:nvPr/>
         </p:nvSpPr>
         <p:spPr>
           <a:xfrm>
-            <a:off x="6233007" y="1554480"/>
-            <a:ext cx="5501487" cy="4389120"/>
+            <a:off x="6233007" y="5013960"/>
+            <a:ext cx="5501487" cy="1295400"/>
           </a:xfrm>
           <a:prstGeom prst="rect">
             <a:avLst/>
@@ -6074,14 +8222,14 @@
       </p:sp>
       <p:sp>
         <p:nvSpPr>
-          <p:cNvPr id="9" name="TextBox 8"/>
+          <p:cNvPr id="11" name="TextBox 10"/>
           <p:cNvSpPr txBox="1"/>
           <p:nvPr/>
         </p:nvSpPr>
         <p:spPr>
           <a:xfrm>
-            <a:off x="6461607" y="1691640"/>
-            <a:ext cx="5044287" cy="365760"/>
+            <a:off x="6370167" y="5068824"/>
+            <a:ext cx="5227167" cy="274320"/>
           </a:xfrm>
           <a:prstGeom prst="rect">
             <a:avLst/>
@@ -6089,7 +8237,7 @@
           <a:noFill/>
         </p:spPr>
         <p:txBody>
-          <a:bodyPr wrap="square">
+          <a:bodyPr wrap="square" lIns="45720" rIns="45720">
             <a:spAutoFit/>
           </a:bodyPr>
           <a:lstStyle/>
@@ -6100,7 +8248,7 @@
               </a:defRPr>
             </a:pPr>
             <a:r>
-              <a:rPr sz="1100" b="1">
+              <a:rPr sz="1000" b="1">
                 <a:solidFill>
                   <a:srgbClr val="5F6F63"/>
                 </a:solidFill>
@@ -6113,14 +8261,14 @@
       </p:sp>
       <p:sp>
         <p:nvSpPr>
-          <p:cNvPr id="10" name="TextBox 9"/>
+          <p:cNvPr id="12" name="TextBox 11"/>
           <p:cNvSpPr txBox="1"/>
           <p:nvPr/>
         </p:nvSpPr>
         <p:spPr>
           <a:xfrm>
-            <a:off x="6461607" y="2103120"/>
-            <a:ext cx="5044287" cy="3749039"/>
+            <a:off x="6370167" y="5343144"/>
+            <a:ext cx="5227167" cy="929640"/>
           </a:xfrm>
           <a:prstGeom prst="rect">
             <a:avLst/>
@@ -6128,7 +8276,7 @@
           <a:noFill/>
         </p:spPr>
         <p:txBody>
-          <a:bodyPr wrap="square">
+          <a:bodyPr wrap="square" lIns="45720" rIns="45720">
             <a:spAutoFit/>
           </a:bodyPr>
           <a:lstStyle/>
@@ -6139,27 +8287,27 @@
               </a:defRPr>
             </a:pPr>
             <a:r>
-              <a:rPr sz="1600" b="0">
+              <a:rPr sz="1200" b="0">
                 <a:solidFill>
                   <a:srgbClr val="25342A"/>
                 </a:solidFill>
                 <a:latin typeface="Roboto"/>
               </a:rPr>
-              <a:t>The full cost is $39,701 a month; $18,544 of it is shared cost the grant doesn't pay for. Worth asking for as much of it as the funder allows at renewal.</a:t>
-            </a:r>
-          </a:p>
-        </p:txBody>
-      </p:sp>
-      <p:sp>
-        <p:nvSpPr>
-          <p:cNvPr id="11" name="TextBox 10"/>
+              <a:t>The full cost is $6,943 a month; $3,243 of it is shared cost the grant doesn't pay for. Worth asking for as much of it as the funder allows at renewal.</a:t>
+            </a:r>
+          </a:p>
+        </p:txBody>
+      </p:sp>
+      <p:sp>
+        <p:nvSpPr>
+          <p:cNvPr id="13" name="TextBox 12"/>
           <p:cNvSpPr txBox="1"/>
           <p:nvPr/>
         </p:nvSpPr>
         <p:spPr>
           <a:xfrm>
             <a:off x="457200" y="6492240"/>
-            <a:ext cx="3657600" cy="274320"/>
+            <a:ext cx="2926080" cy="274320"/>
           </a:xfrm>
           <a:prstGeom prst="rect">
             <a:avLst/>
@@ -6167,7 +8315,7 @@
           <a:noFill/>
         </p:spPr>
         <p:txBody>
-          <a:bodyPr wrap="square">
+          <a:bodyPr wrap="square" lIns="45720" rIns="45720">
             <a:spAutoFit/>
           </a:bodyPr>
           <a:lstStyle/>
@@ -6191,14 +8339,14 @@
       </p:sp>
       <p:sp>
         <p:nvSpPr>
-          <p:cNvPr id="12" name="TextBox 11"/>
+          <p:cNvPr id="14" name="TextBox 13"/>
           <p:cNvSpPr txBox="1"/>
           <p:nvPr/>
         </p:nvSpPr>
         <p:spPr>
           <a:xfrm>
-            <a:off x="4297680" y="6492240"/>
-            <a:ext cx="3657600" cy="274320"/>
+            <a:off x="3108960" y="6492240"/>
+            <a:ext cx="5943600" cy="274320"/>
           </a:xfrm>
           <a:prstGeom prst="rect">
             <a:avLst/>
@@ -6206,7 +8354,7 @@
           <a:noFill/>
         </p:spPr>
         <p:txBody>
-          <a:bodyPr wrap="square">
+          <a:bodyPr wrap="square" lIns="45720" rIns="45720">
             <a:spAutoFit/>
           </a:bodyPr>
           <a:lstStyle/>
@@ -6223,14 +8371,14 @@
                 </a:solidFill>
                 <a:latin typeface="Roboto"/>
               </a:rPr>
-              <a:t>Data retrieved 2pm, Tue 6 Oct 2026 · Sample data</a:t>
-            </a:r>
-          </a:p>
-        </p:txBody>
-      </p:sp>
-      <p:sp>
-        <p:nvSpPr>
-          <p:cNvPr id="13" name="TextBox 12"/>
+              <a:t>Data retrieved 2pm, Tue 6 Oct 2026 · Generated 8 Oct 2026, 9:35am · Sample data · Made with Python (python-pptx)</a:t>
+            </a:r>
+          </a:p>
+        </p:txBody>
+      </p:sp>
+      <p:sp>
+        <p:nvSpPr>
+          <p:cNvPr id="15" name="TextBox 14"/>
           <p:cNvSpPr txBox="1"/>
           <p:nvPr/>
         </p:nvSpPr>
@@ -6245,7 +8393,7 @@
           <a:noFill/>
         </p:spPr>
         <p:txBody>
-          <a:bodyPr wrap="square">
+          <a:bodyPr wrap="square" lIns="45720" rIns="45720">
             <a:spAutoFit/>
           </a:bodyPr>
           <a:lstStyle/>
@@ -6262,1352 +8410,7 @@
                 </a:solidFill>
                 <a:latin typeface="Roboto"/>
               </a:rPr>
-              <a:t>Slide 6 of 9</a:t>
-            </a:r>
-          </a:p>
-        </p:txBody>
-      </p:sp>
-    </p:spTree>
-  </p:cSld>
-  <p:clrMapOvr>
-    <a:masterClrMapping/>
-  </p:clrMapOvr>
-</p:sld>
-</file>
-
-<file path=ppt/slides/slide7.xml><?xml version="1.0" encoding="utf-8"?>
-<p:sld xmlns:a="http://schemas.openxmlformats.org/drawingml/2006/main" xmlns:p="http://schemas.openxmlformats.org/presentationml/2006/main" xmlns:r="http://schemas.openxmlformats.org/officeDocument/2006/relationships">
-  <p:cSld>
-    <p:spTree>
-      <p:nvGrpSpPr>
-        <p:cNvPr id="1" name=""/>
-        <p:cNvGrpSpPr/>
-        <p:nvPr/>
-      </p:nvGrpSpPr>
-      <p:grpSpPr/>
-      <p:sp>
-        <p:nvSpPr>
-          <p:cNvPr id="2" name="Rectangle 1"/>
-          <p:cNvSpPr/>
-          <p:nvPr/>
-        </p:nvSpPr>
-        <p:spPr>
-          <a:xfrm>
-            <a:off x="0" y="0"/>
-            <a:ext cx="12191695" cy="73152"/>
-          </a:xfrm>
-          <a:prstGeom prst="rect">
-            <a:avLst/>
-          </a:prstGeom>
-          <a:solidFill>
-            <a:srgbClr val="2F7A5D"/>
-          </a:solidFill>
-          <a:ln>
-            <a:noFill/>
-          </a:ln>
-        </p:spPr>
-        <p:style>
-          <a:lnRef idx="1">
-            <a:schemeClr val="accent1"/>
-          </a:lnRef>
-          <a:fillRef idx="3">
-            <a:schemeClr val="accent1"/>
-          </a:fillRef>
-          <a:effectRef idx="2">
-            <a:schemeClr val="accent1"/>
-          </a:effectRef>
-          <a:fontRef idx="minor">
-            <a:schemeClr val="lt1"/>
-          </a:fontRef>
-        </p:style>
-        <p:txBody>
-          <a:bodyPr rtlCol="0" anchor="ctr"/>
-          <a:lstStyle/>
-          <a:p>
-            <a:pPr algn="ctr">
-              <a:defRPr>
-                <a:latin typeface="Roboto"/>
-              </a:defRPr>
-            </a:pPr>
-          </a:p>
-        </p:txBody>
-      </p:sp>
-      <p:sp>
-        <p:nvSpPr>
-          <p:cNvPr id="3" name="TextBox 2"/>
-          <p:cNvSpPr txBox="1"/>
-          <p:nvPr/>
-        </p:nvSpPr>
-        <p:spPr>
-          <a:xfrm>
-            <a:off x="457200" y="164592"/>
-            <a:ext cx="7315200" cy="274320"/>
-          </a:xfrm>
-          <a:prstGeom prst="rect">
-            <a:avLst/>
-          </a:prstGeom>
-          <a:noFill/>
-        </p:spPr>
-        <p:txBody>
-          <a:bodyPr wrap="square">
-            <a:spAutoFit/>
-          </a:bodyPr>
-          <a:lstStyle/>
-          <a:p>
-            <a:pPr>
-              <a:defRPr>
-                <a:latin typeface="Roboto"/>
-              </a:defRPr>
-            </a:pPr>
-            <a:r>
-              <a:rPr sz="1000" b="0">
-                <a:solidFill>
-                  <a:srgbClr val="5F6F63"/>
-                </a:solidFill>
-                <a:latin typeface="Roboto"/>
-              </a:rPr>
-              <a:t>Sample Community Services Ltd · What does each program really cost?</a:t>
-            </a:r>
-          </a:p>
-        </p:txBody>
-      </p:sp>
-      <p:sp>
-        <p:nvSpPr>
-          <p:cNvPr id="4" name="TextBox 3"/>
-          <p:cNvSpPr txBox="1"/>
-          <p:nvPr/>
-        </p:nvSpPr>
-        <p:spPr>
-          <a:xfrm>
-            <a:off x="457200" y="411480"/>
-            <a:ext cx="11247120" cy="548640"/>
-          </a:xfrm>
-          <a:prstGeom prst="rect">
-            <a:avLst/>
-          </a:prstGeom>
-          <a:noFill/>
-        </p:spPr>
-        <p:txBody>
-          <a:bodyPr wrap="square">
-            <a:spAutoFit/>
-          </a:bodyPr>
-          <a:lstStyle/>
-          <a:p>
-            <a:pPr>
-              <a:defRPr>
-                <a:latin typeface="Roboto"/>
-              </a:defRPr>
-            </a:pPr>
-            <a:r>
-              <a:rPr sz="2400" b="1">
-                <a:solidFill>
-                  <a:srgbClr val="25342A"/>
-                </a:solidFill>
-                <a:latin typeface="Roboto"/>
-              </a:rPr>
-              <a:t>What it shows · Program: Digital literacy</a:t>
-            </a:r>
-          </a:p>
-        </p:txBody>
-      </p:sp>
-      <p:sp>
-        <p:nvSpPr>
-          <p:cNvPr id="5" name="Rectangle 4"/>
-          <p:cNvSpPr/>
-          <p:nvPr/>
-        </p:nvSpPr>
-        <p:spPr>
-          <a:xfrm>
-            <a:off x="457200" y="1554480"/>
-            <a:ext cx="5501487" cy="4389120"/>
-          </a:xfrm>
-          <a:prstGeom prst="rect">
-            <a:avLst/>
-          </a:prstGeom>
-          <a:solidFill>
-            <a:srgbClr val="FFFFFF"/>
-          </a:solidFill>
-          <a:ln>
-            <a:solidFill>
-              <a:srgbClr val="DCE8DC"/>
-            </a:solidFill>
-          </a:ln>
-        </p:spPr>
-        <p:style>
-          <a:lnRef idx="1">
-            <a:schemeClr val="accent1"/>
-          </a:lnRef>
-          <a:fillRef idx="3">
-            <a:schemeClr val="accent1"/>
-          </a:fillRef>
-          <a:effectRef idx="2">
-            <a:schemeClr val="accent1"/>
-          </a:effectRef>
-          <a:fontRef idx="minor">
-            <a:schemeClr val="lt1"/>
-          </a:fontRef>
-        </p:style>
-        <p:txBody>
-          <a:bodyPr rtlCol="0" anchor="ctr"/>
-          <a:lstStyle/>
-          <a:p>
-            <a:pPr algn="ctr">
-              <a:defRPr>
-                <a:latin typeface="Roboto"/>
-              </a:defRPr>
-            </a:pPr>
-          </a:p>
-        </p:txBody>
-      </p:sp>
-      <p:sp>
-        <p:nvSpPr>
-          <p:cNvPr id="6" name="TextBox 5"/>
-          <p:cNvSpPr txBox="1"/>
-          <p:nvPr/>
-        </p:nvSpPr>
-        <p:spPr>
-          <a:xfrm>
-            <a:off x="685800" y="1691640"/>
-            <a:ext cx="5044287" cy="365760"/>
-          </a:xfrm>
-          <a:prstGeom prst="rect">
-            <a:avLst/>
-          </a:prstGeom>
-          <a:noFill/>
-        </p:spPr>
-        <p:txBody>
-          <a:bodyPr wrap="square">
-            <a:spAutoFit/>
-          </a:bodyPr>
-          <a:lstStyle/>
-          <a:p>
-            <a:pPr>
-              <a:defRPr>
-                <a:latin typeface="Roboto"/>
-              </a:defRPr>
-            </a:pPr>
-            <a:r>
-              <a:rPr sz="1100" b="1">
-                <a:solidFill>
-                  <a:srgbClr val="5F6F63"/>
-                </a:solidFill>
-                <a:latin typeface="Roboto"/>
-              </a:rPr>
-              <a:t>WHAT IT SHOWS</a:t>
-            </a:r>
-          </a:p>
-        </p:txBody>
-      </p:sp>
-      <p:sp>
-        <p:nvSpPr>
-          <p:cNvPr id="7" name="TextBox 6"/>
-          <p:cNvSpPr txBox="1"/>
-          <p:nvPr/>
-        </p:nvSpPr>
-        <p:spPr>
-          <a:xfrm>
-            <a:off x="685800" y="2103120"/>
-            <a:ext cx="5044287" cy="3749039"/>
-          </a:xfrm>
-          <a:prstGeom prst="rect">
-            <a:avLst/>
-          </a:prstGeom>
-          <a:noFill/>
-        </p:spPr>
-        <p:txBody>
-          <a:bodyPr wrap="square">
-            <a:spAutoFit/>
-          </a:bodyPr>
-          <a:lstStyle/>
-          <a:p>
-            <a:pPr>
-              <a:defRPr>
-                <a:latin typeface="Roboto"/>
-              </a:defRPr>
-            </a:pPr>
-            <a:r>
-              <a:rPr sz="1600" b="0">
-                <a:solidFill>
-                  <a:srgbClr val="25342A"/>
-                </a:solidFill>
-                <a:latin typeface="Roboto"/>
-              </a:rPr>
-              <a:t>Digital literacy cost $8,305 in full in January: $4,426 paid by the Philanthropic foundation grant, and $3,879 of shared costs no grant covers. It has spent 97.0% of its budget to date, with $70,608 left and 14 months to go.</a:t>
-            </a:r>
-          </a:p>
-        </p:txBody>
-      </p:sp>
-      <p:sp>
-        <p:nvSpPr>
-          <p:cNvPr id="8" name="Rectangle 7"/>
-          <p:cNvSpPr/>
-          <p:nvPr/>
-        </p:nvSpPr>
-        <p:spPr>
-          <a:xfrm>
-            <a:off x="6233007" y="1554480"/>
-            <a:ext cx="5501487" cy="4389120"/>
-          </a:xfrm>
-          <a:prstGeom prst="rect">
-            <a:avLst/>
-          </a:prstGeom>
-          <a:solidFill>
-            <a:srgbClr val="EEF5F0"/>
-          </a:solidFill>
-          <a:ln>
-            <a:solidFill>
-              <a:srgbClr val="DCE8DC"/>
-            </a:solidFill>
-          </a:ln>
-        </p:spPr>
-        <p:style>
-          <a:lnRef idx="1">
-            <a:schemeClr val="accent1"/>
-          </a:lnRef>
-          <a:fillRef idx="3">
-            <a:schemeClr val="accent1"/>
-          </a:fillRef>
-          <a:effectRef idx="2">
-            <a:schemeClr val="accent1"/>
-          </a:effectRef>
-          <a:fontRef idx="minor">
-            <a:schemeClr val="lt1"/>
-          </a:fontRef>
-        </p:style>
-        <p:txBody>
-          <a:bodyPr rtlCol="0" anchor="ctr"/>
-          <a:lstStyle/>
-          <a:p>
-            <a:pPr algn="ctr">
-              <a:defRPr>
-                <a:latin typeface="Roboto"/>
-              </a:defRPr>
-            </a:pPr>
-          </a:p>
-        </p:txBody>
-      </p:sp>
-      <p:sp>
-        <p:nvSpPr>
-          <p:cNvPr id="9" name="TextBox 8"/>
-          <p:cNvSpPr txBox="1"/>
-          <p:nvPr/>
-        </p:nvSpPr>
-        <p:spPr>
-          <a:xfrm>
-            <a:off x="6461607" y="1691640"/>
-            <a:ext cx="5044287" cy="365760"/>
-          </a:xfrm>
-          <a:prstGeom prst="rect">
-            <a:avLst/>
-          </a:prstGeom>
-          <a:noFill/>
-        </p:spPr>
-        <p:txBody>
-          <a:bodyPr wrap="square">
-            <a:spAutoFit/>
-          </a:bodyPr>
-          <a:lstStyle/>
-          <a:p>
-            <a:pPr>
-              <a:defRPr>
-                <a:latin typeface="Roboto"/>
-              </a:defRPr>
-            </a:pPr>
-            <a:r>
-              <a:rPr sz="1100" b="1">
-                <a:solidFill>
-                  <a:srgbClr val="5F6F63"/>
-                </a:solidFill>
-                <a:latin typeface="Roboto"/>
-              </a:rPr>
-              <a:t>WHAT YOU'D DO ABOUT IT</a:t>
-            </a:r>
-          </a:p>
-        </p:txBody>
-      </p:sp>
-      <p:sp>
-        <p:nvSpPr>
-          <p:cNvPr id="10" name="TextBox 9"/>
-          <p:cNvSpPr txBox="1"/>
-          <p:nvPr/>
-        </p:nvSpPr>
-        <p:spPr>
-          <a:xfrm>
-            <a:off x="6461607" y="2103120"/>
-            <a:ext cx="5044287" cy="3749039"/>
-          </a:xfrm>
-          <a:prstGeom prst="rect">
-            <a:avLst/>
-          </a:prstGeom>
-          <a:noFill/>
-        </p:spPr>
-        <p:txBody>
-          <a:bodyPr wrap="square">
-            <a:spAutoFit/>
-          </a:bodyPr>
-          <a:lstStyle/>
-          <a:p>
-            <a:pPr>
-              <a:defRPr>
-                <a:latin typeface="Roboto"/>
-              </a:defRPr>
-            </a:pPr>
-            <a:r>
-              <a:rPr sz="1600" b="0">
-                <a:solidFill>
-                  <a:srgbClr val="25342A"/>
-                </a:solidFill>
-                <a:latin typeface="Roboto"/>
-              </a:rPr>
-              <a:t>The full cost is $8,305 a month; $3,879 of it is shared cost the grant doesn't pay for. Worth asking for as much of it as the funder allows at renewal.</a:t>
-            </a:r>
-          </a:p>
-        </p:txBody>
-      </p:sp>
-      <p:sp>
-        <p:nvSpPr>
-          <p:cNvPr id="11" name="TextBox 10"/>
-          <p:cNvSpPr txBox="1"/>
-          <p:nvPr/>
-        </p:nvSpPr>
-        <p:spPr>
-          <a:xfrm>
-            <a:off x="457200" y="6492240"/>
-            <a:ext cx="3657600" cy="274320"/>
-          </a:xfrm>
-          <a:prstGeom prst="rect">
-            <a:avLst/>
-          </a:prstGeom>
-          <a:noFill/>
-        </p:spPr>
-        <p:txBody>
-          <a:bodyPr wrap="square">
-            <a:spAutoFit/>
-          </a:bodyPr>
-          <a:lstStyle/>
-          <a:p>
-            <a:pPr>
-              <a:defRPr>
-                <a:latin typeface="Roboto"/>
-              </a:defRPr>
-            </a:pPr>
-            <a:r>
-              <a:rPr sz="900" b="0">
-                <a:solidFill>
-                  <a:srgbClr val="5F6F63"/>
-                </a:solidFill>
-                <a:latin typeface="Roboto"/>
-              </a:rPr>
-              <a:t>program-cost.pptx</a:t>
-            </a:r>
-          </a:p>
-        </p:txBody>
-      </p:sp>
-      <p:sp>
-        <p:nvSpPr>
-          <p:cNvPr id="12" name="TextBox 11"/>
-          <p:cNvSpPr txBox="1"/>
-          <p:nvPr/>
-        </p:nvSpPr>
-        <p:spPr>
-          <a:xfrm>
-            <a:off x="4297680" y="6492240"/>
-            <a:ext cx="3657600" cy="274320"/>
-          </a:xfrm>
-          <a:prstGeom prst="rect">
-            <a:avLst/>
-          </a:prstGeom>
-          <a:noFill/>
-        </p:spPr>
-        <p:txBody>
-          <a:bodyPr wrap="square">
-            <a:spAutoFit/>
-          </a:bodyPr>
-          <a:lstStyle/>
-          <a:p>
-            <a:pPr algn="ctr">
-              <a:defRPr>
-                <a:latin typeface="Roboto"/>
-              </a:defRPr>
-            </a:pPr>
-            <a:r>
-              <a:rPr sz="900" b="0">
-                <a:solidFill>
-                  <a:srgbClr val="5F6F63"/>
-                </a:solidFill>
-                <a:latin typeface="Roboto"/>
-              </a:rPr>
-              <a:t>Data retrieved 2pm, Tue 6 Oct 2026 · Sample data</a:t>
-            </a:r>
-          </a:p>
-        </p:txBody>
-      </p:sp>
-      <p:sp>
-        <p:nvSpPr>
-          <p:cNvPr id="13" name="TextBox 12"/>
-          <p:cNvSpPr txBox="1"/>
-          <p:nvPr/>
-        </p:nvSpPr>
-        <p:spPr>
-          <a:xfrm>
-            <a:off x="8503920" y="6492240"/>
-            <a:ext cx="3200400" cy="274320"/>
-          </a:xfrm>
-          <a:prstGeom prst="rect">
-            <a:avLst/>
-          </a:prstGeom>
-          <a:noFill/>
-        </p:spPr>
-        <p:txBody>
-          <a:bodyPr wrap="square">
-            <a:spAutoFit/>
-          </a:bodyPr>
-          <a:lstStyle/>
-          <a:p>
-            <a:pPr algn="r">
-              <a:defRPr>
-                <a:latin typeface="Roboto"/>
-              </a:defRPr>
-            </a:pPr>
-            <a:r>
-              <a:rPr sz="900" b="0">
-                <a:solidFill>
-                  <a:srgbClr val="5F6F63"/>
-                </a:solidFill>
-                <a:latin typeface="Roboto"/>
-              </a:rPr>
-              <a:t>Slide 7 of 9</a:t>
-            </a:r>
-          </a:p>
-        </p:txBody>
-      </p:sp>
-    </p:spTree>
-  </p:cSld>
-  <p:clrMapOvr>
-    <a:masterClrMapping/>
-  </p:clrMapOvr>
-</p:sld>
-</file>
-
-<file path=ppt/slides/slide8.xml><?xml version="1.0" encoding="utf-8"?>
-<p:sld xmlns:a="http://schemas.openxmlformats.org/drawingml/2006/main" xmlns:p="http://schemas.openxmlformats.org/presentationml/2006/main" xmlns:r="http://schemas.openxmlformats.org/officeDocument/2006/relationships">
-  <p:cSld>
-    <p:spTree>
-      <p:nvGrpSpPr>
-        <p:cNvPr id="1" name=""/>
-        <p:cNvGrpSpPr/>
-        <p:nvPr/>
-      </p:nvGrpSpPr>
-      <p:grpSpPr/>
-      <p:sp>
-        <p:nvSpPr>
-          <p:cNvPr id="2" name="Rectangle 1"/>
-          <p:cNvSpPr/>
-          <p:nvPr/>
-        </p:nvSpPr>
-        <p:spPr>
-          <a:xfrm>
-            <a:off x="0" y="0"/>
-            <a:ext cx="12191695" cy="73152"/>
-          </a:xfrm>
-          <a:prstGeom prst="rect">
-            <a:avLst/>
-          </a:prstGeom>
-          <a:solidFill>
-            <a:srgbClr val="2F7A5D"/>
-          </a:solidFill>
-          <a:ln>
-            <a:noFill/>
-          </a:ln>
-        </p:spPr>
-        <p:style>
-          <a:lnRef idx="1">
-            <a:schemeClr val="accent1"/>
-          </a:lnRef>
-          <a:fillRef idx="3">
-            <a:schemeClr val="accent1"/>
-          </a:fillRef>
-          <a:effectRef idx="2">
-            <a:schemeClr val="accent1"/>
-          </a:effectRef>
-          <a:fontRef idx="minor">
-            <a:schemeClr val="lt1"/>
-          </a:fontRef>
-        </p:style>
-        <p:txBody>
-          <a:bodyPr rtlCol="0" anchor="ctr"/>
-          <a:lstStyle/>
-          <a:p>
-            <a:pPr algn="ctr">
-              <a:defRPr>
-                <a:latin typeface="Roboto"/>
-              </a:defRPr>
-            </a:pPr>
-          </a:p>
-        </p:txBody>
-      </p:sp>
-      <p:sp>
-        <p:nvSpPr>
-          <p:cNvPr id="3" name="TextBox 2"/>
-          <p:cNvSpPr txBox="1"/>
-          <p:nvPr/>
-        </p:nvSpPr>
-        <p:spPr>
-          <a:xfrm>
-            <a:off x="457200" y="164592"/>
-            <a:ext cx="7315200" cy="274320"/>
-          </a:xfrm>
-          <a:prstGeom prst="rect">
-            <a:avLst/>
-          </a:prstGeom>
-          <a:noFill/>
-        </p:spPr>
-        <p:txBody>
-          <a:bodyPr wrap="square">
-            <a:spAutoFit/>
-          </a:bodyPr>
-          <a:lstStyle/>
-          <a:p>
-            <a:pPr>
-              <a:defRPr>
-                <a:latin typeface="Roboto"/>
-              </a:defRPr>
-            </a:pPr>
-            <a:r>
-              <a:rPr sz="1000" b="0">
-                <a:solidFill>
-                  <a:srgbClr val="5F6F63"/>
-                </a:solidFill>
-                <a:latin typeface="Roboto"/>
-              </a:rPr>
-              <a:t>Sample Community Services Ltd · What does each program really cost?</a:t>
-            </a:r>
-          </a:p>
-        </p:txBody>
-      </p:sp>
-      <p:sp>
-        <p:nvSpPr>
-          <p:cNvPr id="4" name="TextBox 3"/>
-          <p:cNvSpPr txBox="1"/>
-          <p:nvPr/>
-        </p:nvSpPr>
-        <p:spPr>
-          <a:xfrm>
-            <a:off x="457200" y="411480"/>
-            <a:ext cx="11247120" cy="548640"/>
-          </a:xfrm>
-          <a:prstGeom prst="rect">
-            <a:avLst/>
-          </a:prstGeom>
-          <a:noFill/>
-        </p:spPr>
-        <p:txBody>
-          <a:bodyPr wrap="square">
-            <a:spAutoFit/>
-          </a:bodyPr>
-          <a:lstStyle/>
-          <a:p>
-            <a:pPr>
-              <a:defRPr>
-                <a:latin typeface="Roboto"/>
-              </a:defRPr>
-            </a:pPr>
-            <a:r>
-              <a:rPr sz="2400" b="1">
-                <a:solidFill>
-                  <a:srgbClr val="25342A"/>
-                </a:solidFill>
-                <a:latin typeface="Roboto"/>
-              </a:rPr>
-              <a:t>What it shows · Program: Community meals (2025-26)</a:t>
-            </a:r>
-          </a:p>
-        </p:txBody>
-      </p:sp>
-      <p:sp>
-        <p:nvSpPr>
-          <p:cNvPr id="5" name="Rectangle 4"/>
-          <p:cNvSpPr/>
-          <p:nvPr/>
-        </p:nvSpPr>
-        <p:spPr>
-          <a:xfrm>
-            <a:off x="457200" y="1554480"/>
-            <a:ext cx="5501487" cy="4389120"/>
-          </a:xfrm>
-          <a:prstGeom prst="rect">
-            <a:avLst/>
-          </a:prstGeom>
-          <a:solidFill>
-            <a:srgbClr val="FFFFFF"/>
-          </a:solidFill>
-          <a:ln>
-            <a:solidFill>
-              <a:srgbClr val="DCE8DC"/>
-            </a:solidFill>
-          </a:ln>
-        </p:spPr>
-        <p:style>
-          <a:lnRef idx="1">
-            <a:schemeClr val="accent1"/>
-          </a:lnRef>
-          <a:fillRef idx="3">
-            <a:schemeClr val="accent1"/>
-          </a:fillRef>
-          <a:effectRef idx="2">
-            <a:schemeClr val="accent1"/>
-          </a:effectRef>
-          <a:fontRef idx="minor">
-            <a:schemeClr val="lt1"/>
-          </a:fontRef>
-        </p:style>
-        <p:txBody>
-          <a:bodyPr rtlCol="0" anchor="ctr"/>
-          <a:lstStyle/>
-          <a:p>
-            <a:pPr algn="ctr">
-              <a:defRPr>
-                <a:latin typeface="Roboto"/>
-              </a:defRPr>
-            </a:pPr>
-          </a:p>
-        </p:txBody>
-      </p:sp>
-      <p:sp>
-        <p:nvSpPr>
-          <p:cNvPr id="6" name="TextBox 5"/>
-          <p:cNvSpPr txBox="1"/>
-          <p:nvPr/>
-        </p:nvSpPr>
-        <p:spPr>
-          <a:xfrm>
-            <a:off x="685800" y="1691640"/>
-            <a:ext cx="5044287" cy="365760"/>
-          </a:xfrm>
-          <a:prstGeom prst="rect">
-            <a:avLst/>
-          </a:prstGeom>
-          <a:noFill/>
-        </p:spPr>
-        <p:txBody>
-          <a:bodyPr wrap="square">
-            <a:spAutoFit/>
-          </a:bodyPr>
-          <a:lstStyle/>
-          <a:p>
-            <a:pPr>
-              <a:defRPr>
-                <a:latin typeface="Roboto"/>
-              </a:defRPr>
-            </a:pPr>
-            <a:r>
-              <a:rPr sz="1100" b="1">
-                <a:solidFill>
-                  <a:srgbClr val="5F6F63"/>
-                </a:solidFill>
-                <a:latin typeface="Roboto"/>
-              </a:rPr>
-              <a:t>WHAT IT SHOWS</a:t>
-            </a:r>
-          </a:p>
-        </p:txBody>
-      </p:sp>
-      <p:sp>
-        <p:nvSpPr>
-          <p:cNvPr id="7" name="TextBox 6"/>
-          <p:cNvSpPr txBox="1"/>
-          <p:nvPr/>
-        </p:nvSpPr>
-        <p:spPr>
-          <a:xfrm>
-            <a:off x="685800" y="2103120"/>
-            <a:ext cx="5044287" cy="3749039"/>
-          </a:xfrm>
-          <a:prstGeom prst="rect">
-            <a:avLst/>
-          </a:prstGeom>
-          <a:noFill/>
-        </p:spPr>
-        <p:txBody>
-          <a:bodyPr wrap="square">
-            <a:spAutoFit/>
-          </a:bodyPr>
-          <a:lstStyle/>
-          <a:p>
-            <a:pPr>
-              <a:defRPr>
-                <a:latin typeface="Roboto"/>
-              </a:defRPr>
-            </a:pPr>
-            <a:r>
-              <a:rPr sz="1600" b="0">
-                <a:solidFill>
-                  <a:srgbClr val="25342A"/>
-                </a:solidFill>
-                <a:latin typeface="Roboto"/>
-              </a:rPr>
-              <a:t>Community meals (2025-26) cost $6,943 in full in January: $3,700 paid by the Local council community grant grant, and $3,243 of shared costs no grant covers. It has spent 96.2% of its budget to date, with $19,300 left and 5 months to go.</a:t>
-            </a:r>
-          </a:p>
-        </p:txBody>
-      </p:sp>
-      <p:sp>
-        <p:nvSpPr>
-          <p:cNvPr id="8" name="Rectangle 7"/>
-          <p:cNvSpPr/>
-          <p:nvPr/>
-        </p:nvSpPr>
-        <p:spPr>
-          <a:xfrm>
-            <a:off x="6233007" y="1554480"/>
-            <a:ext cx="5501487" cy="4389120"/>
-          </a:xfrm>
-          <a:prstGeom prst="rect">
-            <a:avLst/>
-          </a:prstGeom>
-          <a:solidFill>
-            <a:srgbClr val="EEF5F0"/>
-          </a:solidFill>
-          <a:ln>
-            <a:solidFill>
-              <a:srgbClr val="DCE8DC"/>
-            </a:solidFill>
-          </a:ln>
-        </p:spPr>
-        <p:style>
-          <a:lnRef idx="1">
-            <a:schemeClr val="accent1"/>
-          </a:lnRef>
-          <a:fillRef idx="3">
-            <a:schemeClr val="accent1"/>
-          </a:fillRef>
-          <a:effectRef idx="2">
-            <a:schemeClr val="accent1"/>
-          </a:effectRef>
-          <a:fontRef idx="minor">
-            <a:schemeClr val="lt1"/>
-          </a:fontRef>
-        </p:style>
-        <p:txBody>
-          <a:bodyPr rtlCol="0" anchor="ctr"/>
-          <a:lstStyle/>
-          <a:p>
-            <a:pPr algn="ctr">
-              <a:defRPr>
-                <a:latin typeface="Roboto"/>
-              </a:defRPr>
-            </a:pPr>
-          </a:p>
-        </p:txBody>
-      </p:sp>
-      <p:sp>
-        <p:nvSpPr>
-          <p:cNvPr id="9" name="TextBox 8"/>
-          <p:cNvSpPr txBox="1"/>
-          <p:nvPr/>
-        </p:nvSpPr>
-        <p:spPr>
-          <a:xfrm>
-            <a:off x="6461607" y="1691640"/>
-            <a:ext cx="5044287" cy="365760"/>
-          </a:xfrm>
-          <a:prstGeom prst="rect">
-            <a:avLst/>
-          </a:prstGeom>
-          <a:noFill/>
-        </p:spPr>
-        <p:txBody>
-          <a:bodyPr wrap="square">
-            <a:spAutoFit/>
-          </a:bodyPr>
-          <a:lstStyle/>
-          <a:p>
-            <a:pPr>
-              <a:defRPr>
-                <a:latin typeface="Roboto"/>
-              </a:defRPr>
-            </a:pPr>
-            <a:r>
-              <a:rPr sz="1100" b="1">
-                <a:solidFill>
-                  <a:srgbClr val="5F6F63"/>
-                </a:solidFill>
-                <a:latin typeface="Roboto"/>
-              </a:rPr>
-              <a:t>WHAT YOU'D DO ABOUT IT</a:t>
-            </a:r>
-          </a:p>
-        </p:txBody>
-      </p:sp>
-      <p:sp>
-        <p:nvSpPr>
-          <p:cNvPr id="10" name="TextBox 9"/>
-          <p:cNvSpPr txBox="1"/>
-          <p:nvPr/>
-        </p:nvSpPr>
-        <p:spPr>
-          <a:xfrm>
-            <a:off x="6461607" y="2103120"/>
-            <a:ext cx="5044287" cy="3749039"/>
-          </a:xfrm>
-          <a:prstGeom prst="rect">
-            <a:avLst/>
-          </a:prstGeom>
-          <a:noFill/>
-        </p:spPr>
-        <p:txBody>
-          <a:bodyPr wrap="square">
-            <a:spAutoFit/>
-          </a:bodyPr>
-          <a:lstStyle/>
-          <a:p>
-            <a:pPr>
-              <a:defRPr>
-                <a:latin typeface="Roboto"/>
-              </a:defRPr>
-            </a:pPr>
-            <a:r>
-              <a:rPr sz="1600" b="0">
-                <a:solidFill>
-                  <a:srgbClr val="25342A"/>
-                </a:solidFill>
-                <a:latin typeface="Roboto"/>
-              </a:rPr>
-              <a:t>The full cost is $6,943 a month; $3,243 of it is shared cost the grant doesn't pay for. Worth asking for as much of it as the funder allows at renewal.</a:t>
-            </a:r>
-          </a:p>
-        </p:txBody>
-      </p:sp>
-      <p:sp>
-        <p:nvSpPr>
-          <p:cNvPr id="11" name="TextBox 10"/>
-          <p:cNvSpPr txBox="1"/>
-          <p:nvPr/>
-        </p:nvSpPr>
-        <p:spPr>
-          <a:xfrm>
-            <a:off x="457200" y="6492240"/>
-            <a:ext cx="3657600" cy="274320"/>
-          </a:xfrm>
-          <a:prstGeom prst="rect">
-            <a:avLst/>
-          </a:prstGeom>
-          <a:noFill/>
-        </p:spPr>
-        <p:txBody>
-          <a:bodyPr wrap="square">
-            <a:spAutoFit/>
-          </a:bodyPr>
-          <a:lstStyle/>
-          <a:p>
-            <a:pPr>
-              <a:defRPr>
-                <a:latin typeface="Roboto"/>
-              </a:defRPr>
-            </a:pPr>
-            <a:r>
-              <a:rPr sz="900" b="0">
-                <a:solidFill>
-                  <a:srgbClr val="5F6F63"/>
-                </a:solidFill>
-                <a:latin typeface="Roboto"/>
-              </a:rPr>
-              <a:t>program-cost.pptx</a:t>
-            </a:r>
-          </a:p>
-        </p:txBody>
-      </p:sp>
-      <p:sp>
-        <p:nvSpPr>
-          <p:cNvPr id="12" name="TextBox 11"/>
-          <p:cNvSpPr txBox="1"/>
-          <p:nvPr/>
-        </p:nvSpPr>
-        <p:spPr>
-          <a:xfrm>
-            <a:off x="4297680" y="6492240"/>
-            <a:ext cx="3657600" cy="274320"/>
-          </a:xfrm>
-          <a:prstGeom prst="rect">
-            <a:avLst/>
-          </a:prstGeom>
-          <a:noFill/>
-        </p:spPr>
-        <p:txBody>
-          <a:bodyPr wrap="square">
-            <a:spAutoFit/>
-          </a:bodyPr>
-          <a:lstStyle/>
-          <a:p>
-            <a:pPr algn="ctr">
-              <a:defRPr>
-                <a:latin typeface="Roboto"/>
-              </a:defRPr>
-            </a:pPr>
-            <a:r>
-              <a:rPr sz="900" b="0">
-                <a:solidFill>
-                  <a:srgbClr val="5F6F63"/>
-                </a:solidFill>
-                <a:latin typeface="Roboto"/>
-              </a:rPr>
-              <a:t>Data retrieved 2pm, Tue 6 Oct 2026 · Sample data</a:t>
-            </a:r>
-          </a:p>
-        </p:txBody>
-      </p:sp>
-      <p:sp>
-        <p:nvSpPr>
-          <p:cNvPr id="13" name="TextBox 12"/>
-          <p:cNvSpPr txBox="1"/>
-          <p:nvPr/>
-        </p:nvSpPr>
-        <p:spPr>
-          <a:xfrm>
-            <a:off x="8503920" y="6492240"/>
-            <a:ext cx="3200400" cy="274320"/>
-          </a:xfrm>
-          <a:prstGeom prst="rect">
-            <a:avLst/>
-          </a:prstGeom>
-          <a:noFill/>
-        </p:spPr>
-        <p:txBody>
-          <a:bodyPr wrap="square">
-            <a:spAutoFit/>
-          </a:bodyPr>
-          <a:lstStyle/>
-          <a:p>
-            <a:pPr algn="r">
-              <a:defRPr>
-                <a:latin typeface="Roboto"/>
-              </a:defRPr>
-            </a:pPr>
-            <a:r>
-              <a:rPr sz="900" b="0">
-                <a:solidFill>
-                  <a:srgbClr val="5F6F63"/>
-                </a:solidFill>
-                <a:latin typeface="Roboto"/>
-              </a:rPr>
-              <a:t>Slide 8 of 9</a:t>
-            </a:r>
-          </a:p>
-        </p:txBody>
-      </p:sp>
-    </p:spTree>
-  </p:cSld>
-  <p:clrMapOvr>
-    <a:masterClrMapping/>
-  </p:clrMapOvr>
-</p:sld>
-</file>
-
-<file path=ppt/slides/slide9.xml><?xml version="1.0" encoding="utf-8"?>
-<p:sld xmlns:a="http://schemas.openxmlformats.org/drawingml/2006/main" xmlns:p="http://schemas.openxmlformats.org/presentationml/2006/main" xmlns:r="http://schemas.openxmlformats.org/officeDocument/2006/relationships">
-  <p:cSld>
-    <p:spTree>
-      <p:nvGrpSpPr>
-        <p:cNvPr id="1" name=""/>
-        <p:cNvGrpSpPr/>
-        <p:nvPr/>
-      </p:nvGrpSpPr>
-      <p:grpSpPr/>
-      <p:sp>
-        <p:nvSpPr>
-          <p:cNvPr id="2" name="Rectangle 1"/>
-          <p:cNvSpPr/>
-          <p:nvPr/>
-        </p:nvSpPr>
-        <p:spPr>
-          <a:xfrm>
-            <a:off x="0" y="0"/>
-            <a:ext cx="12191695" cy="73152"/>
-          </a:xfrm>
-          <a:prstGeom prst="rect">
-            <a:avLst/>
-          </a:prstGeom>
-          <a:solidFill>
-            <a:srgbClr val="2F7A5D"/>
-          </a:solidFill>
-          <a:ln>
-            <a:noFill/>
-          </a:ln>
-        </p:spPr>
-        <p:style>
-          <a:lnRef idx="1">
-            <a:schemeClr val="accent1"/>
-          </a:lnRef>
-          <a:fillRef idx="3">
-            <a:schemeClr val="accent1"/>
-          </a:fillRef>
-          <a:effectRef idx="2">
-            <a:schemeClr val="accent1"/>
-          </a:effectRef>
-          <a:fontRef idx="minor">
-            <a:schemeClr val="lt1"/>
-          </a:fontRef>
-        </p:style>
-        <p:txBody>
-          <a:bodyPr rtlCol="0" anchor="ctr"/>
-          <a:lstStyle/>
-          <a:p>
-            <a:pPr algn="ctr">
-              <a:defRPr>
-                <a:latin typeface="Roboto"/>
-              </a:defRPr>
-            </a:pPr>
-          </a:p>
-        </p:txBody>
-      </p:sp>
-      <p:sp>
-        <p:nvSpPr>
-          <p:cNvPr id="3" name="TextBox 2"/>
-          <p:cNvSpPr txBox="1"/>
-          <p:nvPr/>
-        </p:nvSpPr>
-        <p:spPr>
-          <a:xfrm>
-            <a:off x="457200" y="164592"/>
-            <a:ext cx="7315200" cy="274320"/>
-          </a:xfrm>
-          <a:prstGeom prst="rect">
-            <a:avLst/>
-          </a:prstGeom>
-          <a:noFill/>
-        </p:spPr>
-        <p:txBody>
-          <a:bodyPr wrap="square">
-            <a:spAutoFit/>
-          </a:bodyPr>
-          <a:lstStyle/>
-          <a:p>
-            <a:pPr>
-              <a:defRPr>
-                <a:latin typeface="Roboto"/>
-              </a:defRPr>
-            </a:pPr>
-            <a:r>
-              <a:rPr sz="1000" b="0">
-                <a:solidFill>
-                  <a:srgbClr val="5F6F63"/>
-                </a:solidFill>
-                <a:latin typeface="Roboto"/>
-              </a:rPr>
-              <a:t>Sample Community Services Ltd · What does each program really cost?</a:t>
-            </a:r>
-          </a:p>
-        </p:txBody>
-      </p:sp>
-      <p:sp>
-        <p:nvSpPr>
-          <p:cNvPr id="4" name="TextBox 3"/>
-          <p:cNvSpPr txBox="1"/>
-          <p:nvPr/>
-        </p:nvSpPr>
-        <p:spPr>
-          <a:xfrm>
-            <a:off x="457200" y="411480"/>
-            <a:ext cx="11247120" cy="548640"/>
-          </a:xfrm>
-          <a:prstGeom prst="rect">
-            <a:avLst/>
-          </a:prstGeom>
-          <a:noFill/>
-        </p:spPr>
-        <p:txBody>
-          <a:bodyPr wrap="square">
-            <a:spAutoFit/>
-          </a:bodyPr>
-          <a:lstStyle/>
-          <a:p>
-            <a:pPr>
-              <a:defRPr>
-                <a:latin typeface="Roboto"/>
-              </a:defRPr>
-            </a:pPr>
-            <a:r>
-              <a:rPr sz="2400" b="1">
-                <a:solidFill>
-                  <a:srgbClr val="25342A"/>
-                </a:solidFill>
-                <a:latin typeface="Roboto"/>
-              </a:rPr>
-              <a:t>Grant spending, by month · Spend $ · Every program at once</a:t>
-            </a:r>
-          </a:p>
-        </p:txBody>
-      </p:sp>
-      <p:sp>
-        <p:nvSpPr>
-          <p:cNvPr id="5" name="TextBox 4"/>
-          <p:cNvSpPr txBox="1"/>
-          <p:nvPr/>
-        </p:nvSpPr>
-        <p:spPr>
-          <a:xfrm>
-            <a:off x="457200" y="960120"/>
-            <a:ext cx="11247120" cy="457200"/>
-          </a:xfrm>
-          <a:prstGeom prst="rect">
-            <a:avLst/>
-          </a:prstGeom>
-          <a:noFill/>
-        </p:spPr>
-        <p:txBody>
-          <a:bodyPr wrap="square">
-            <a:spAutoFit/>
-          </a:bodyPr>
-          <a:lstStyle/>
-          <a:p>
-            <a:pPr>
-              <a:defRPr>
-                <a:latin typeface="Roboto"/>
-              </a:defRPr>
-            </a:pPr>
-            <a:r>
-              <a:rPr sz="1200" b="0">
-                <a:solidFill>
-                  <a:srgbClr val="5F6F63"/>
-                </a:solidFill>
-                <a:latin typeface="Roboto"/>
-              </a:rPr>
-              <a:t>Grant spending only (the program's direct cost). All programs includes grants that have finished.</a:t>
-            </a:r>
-          </a:p>
-        </p:txBody>
-      </p:sp>
-      <p:graphicFrame>
-        <p:nvGraphicFramePr>
-          <p:cNvPr id="6" name="Chart 5"/>
-          <p:cNvGraphicFramePr>
-            <a:graphicFrameLocks noGrp="1"/>
-          </p:cNvGraphicFramePr>
-          <p:nvPr/>
-        </p:nvGraphicFramePr>
-        <p:xfrm>
-          <a:off x="457200" y="1463040"/>
-          <a:ext cx="11247120" cy="4754880"/>
-        </p:xfrm>
-        <a:graphic>
-          <a:graphicData uri="http://schemas.openxmlformats.org/drawingml/2006/chart">
-            <c:chart xmlns:c="http://schemas.openxmlformats.org/drawingml/2006/chart" r:id="rId2"/>
-          </a:graphicData>
-        </a:graphic>
-      </p:graphicFrame>
-      <p:sp>
-        <p:nvSpPr>
-          <p:cNvPr id="7" name="TextBox 6"/>
-          <p:cNvSpPr txBox="1"/>
-          <p:nvPr/>
-        </p:nvSpPr>
-        <p:spPr>
-          <a:xfrm>
-            <a:off x="457200" y="6492240"/>
-            <a:ext cx="3657600" cy="274320"/>
-          </a:xfrm>
-          <a:prstGeom prst="rect">
-            <a:avLst/>
-          </a:prstGeom>
-          <a:noFill/>
-        </p:spPr>
-        <p:txBody>
-          <a:bodyPr wrap="square">
-            <a:spAutoFit/>
-          </a:bodyPr>
-          <a:lstStyle/>
-          <a:p>
-            <a:pPr>
-              <a:defRPr>
-                <a:latin typeface="Roboto"/>
-              </a:defRPr>
-            </a:pPr>
-            <a:r>
-              <a:rPr sz="900" b="0">
-                <a:solidFill>
-                  <a:srgbClr val="5F6F63"/>
-                </a:solidFill>
-                <a:latin typeface="Roboto"/>
-              </a:rPr>
-              <a:t>program-cost.pptx</a:t>
-            </a:r>
-          </a:p>
-        </p:txBody>
-      </p:sp>
-      <p:sp>
-        <p:nvSpPr>
-          <p:cNvPr id="8" name="TextBox 7"/>
-          <p:cNvSpPr txBox="1"/>
-          <p:nvPr/>
-        </p:nvSpPr>
-        <p:spPr>
-          <a:xfrm>
-            <a:off x="4297680" y="6492240"/>
-            <a:ext cx="3657600" cy="274320"/>
-          </a:xfrm>
-          <a:prstGeom prst="rect">
-            <a:avLst/>
-          </a:prstGeom>
-          <a:noFill/>
-        </p:spPr>
-        <p:txBody>
-          <a:bodyPr wrap="square">
-            <a:spAutoFit/>
-          </a:bodyPr>
-          <a:lstStyle/>
-          <a:p>
-            <a:pPr algn="ctr">
-              <a:defRPr>
-                <a:latin typeface="Roboto"/>
-              </a:defRPr>
-            </a:pPr>
-            <a:r>
-              <a:rPr sz="900" b="0">
-                <a:solidFill>
-                  <a:srgbClr val="5F6F63"/>
-                </a:solidFill>
-                <a:latin typeface="Roboto"/>
-              </a:rPr>
-              <a:t>Data retrieved 2pm, Tue 6 Oct 2026 · Sample data</a:t>
-            </a:r>
-          </a:p>
-        </p:txBody>
-      </p:sp>
-      <p:sp>
-        <p:nvSpPr>
-          <p:cNvPr id="9" name="TextBox 8"/>
-          <p:cNvSpPr txBox="1"/>
-          <p:nvPr/>
-        </p:nvSpPr>
-        <p:spPr>
-          <a:xfrm>
-            <a:off x="8503920" y="6492240"/>
-            <a:ext cx="3200400" cy="274320"/>
-          </a:xfrm>
-          <a:prstGeom prst="rect">
-            <a:avLst/>
-          </a:prstGeom>
-          <a:noFill/>
-        </p:spPr>
-        <p:txBody>
-          <a:bodyPr wrap="square">
-            <a:spAutoFit/>
-          </a:bodyPr>
-          <a:lstStyle/>
-          <a:p>
-            <a:pPr algn="r">
-              <a:defRPr>
-                <a:latin typeface="Roboto"/>
-              </a:defRPr>
-            </a:pPr>
-            <a:r>
-              <a:rPr sz="900" b="0">
-                <a:solidFill>
-                  <a:srgbClr val="5F6F63"/>
-                </a:solidFill>
-                <a:latin typeface="Roboto"/>
-              </a:rPr>
-              <a:t>Slide 9 of 9</a:t>
+              <a:t>Slide 6 of 6</a:t>
             </a:r>
           </a:p>
         </p:txBody>
@@ -7621,6 +8424,326 @@
 </file>
 
 <file path=ppt/theme/theme1.xml><?xml version="1.0" encoding="utf-8"?>
+<a:theme xmlns:a="http://schemas.openxmlformats.org/drawingml/2006/main" name="Office Theme">
+  <a:themeElements>
+    <a:clrScheme name="Office">
+      <a:dk1>
+        <a:sysClr val="windowText" lastClr="000000"/>
+      </a:dk1>
+      <a:lt1>
+        <a:sysClr val="window" lastClr="FFFFFF"/>
+      </a:lt1>
+      <a:dk2>
+        <a:srgbClr val="25342A"/>
+      </a:dk2>
+      <a:lt2>
+        <a:srgbClr val="F4F7F2"/>
+      </a:lt2>
+      <a:accent1>
+        <a:srgbClr val="2F7A5D"/>
+      </a:accent1>
+      <a:accent2>
+        <a:srgbClr val="0E9F6E"/>
+      </a:accent2>
+      <a:accent3>
+        <a:srgbClr val="7D8790"/>
+      </a:accent3>
+      <a:accent4>
+        <a:srgbClr val="8A6D3B"/>
+      </a:accent4>
+      <a:accent5>
+        <a:srgbClr val="B42318"/>
+      </a:accent5>
+      <a:accent6>
+        <a:srgbClr val="8E9CAB"/>
+      </a:accent6>
+      <a:hlink>
+        <a:srgbClr val="0000FF"/>
+      </a:hlink>
+      <a:folHlink>
+        <a:srgbClr val="800080"/>
+      </a:folHlink>
+    </a:clrScheme>
+    <a:fontScheme name="Office">
+      <a:majorFont>
+        <a:latin typeface="Roboto"/>
+        <a:ea typeface=""/>
+        <a:cs typeface=""/>
+        <a:font script="Jpan" typeface="ＭＳ Ｐゴシック"/>
+        <a:font script="Hang" typeface="맑은 고딕"/>
+        <a:font script="Hans" typeface="宋体"/>
+        <a:font script="Hant" typeface="新細明體"/>
+        <a:font script="Arab" typeface="Times New Roman"/>
+        <a:font script="Hebr" typeface="Times New Roman"/>
+        <a:font script="Thai" typeface="Angsana New"/>
+        <a:font script="Ethi" typeface="Nyala"/>
+        <a:font script="Beng" typeface="Vrinda"/>
+        <a:font script="Gujr" typeface="Shruti"/>
+        <a:font script="Khmr" typeface="MoolBoran"/>
+        <a:font script="Knda" typeface="Tunga"/>
+        <a:font script="Guru" typeface="Raavi"/>
+        <a:font script="Cans" typeface="Euphemia"/>
+        <a:font script="Cher" typeface="Plantagenet Cherokee"/>
+        <a:font script="Yiii" typeface="Microsoft Yi Baiti"/>
+        <a:font script="Tibt" typeface="Microsoft Himalaya"/>
+        <a:font script="Thaa" typeface="MV Boli"/>
+        <a:font script="Deva" typeface="Mangal"/>
+        <a:font script="Telu" typeface="Gautami"/>
+        <a:font script="Taml" typeface="Latha"/>
+        <a:font script="Syrc" typeface="Estrangelo Edessa"/>
+        <a:font script="Orya" typeface="Kalinga"/>
+        <a:font script="Mlym" typeface="Kartika"/>
+        <a:font script="Laoo" typeface="DokChampa"/>
+        <a:font script="Sinh" typeface="Iskoola Pota"/>
+        <a:font script="Mong" typeface="Mongolian Baiti"/>
+        <a:font script="Viet" typeface="Times New Roman"/>
+        <a:font script="Uigh" typeface="Microsoft Uighur"/>
+        <a:font script="Geor" typeface="Sylfaen"/>
+      </a:majorFont>
+      <a:minorFont>
+        <a:latin typeface="Roboto"/>
+        <a:ea typeface=""/>
+        <a:cs typeface=""/>
+        <a:font script="Jpan" typeface="ＭＳ Ｐゴシック"/>
+        <a:font script="Hang" typeface="맑은 고딕"/>
+        <a:font script="Hans" typeface="宋体"/>
+        <a:font script="Hant" typeface="新細明體"/>
+        <a:font script="Arab" typeface="Arial"/>
+        <a:font script="Hebr" typeface="Arial"/>
+        <a:font script="Thai" typeface="Cordia New"/>
+        <a:font script="Ethi" typeface="Nyala"/>
+        <a:font script="Beng" typeface="Vrinda"/>
+        <a:font script="Gujr" typeface="Shruti"/>
+        <a:font script="Khmr" typeface="DaunPenh"/>
+        <a:font script="Knda" typeface="Tunga"/>
+        <a:font script="Guru" typeface="Raavi"/>
+        <a:font script="Cans" typeface="Euphemia"/>
+        <a:font script="Cher" typeface="Plantagenet Cherokee"/>
+        <a:font script="Yiii" typeface="Microsoft Yi Baiti"/>
+        <a:font script="Tibt" typeface="Microsoft Himalaya"/>
+        <a:font script="Thaa" typeface="MV Boli"/>
+        <a:font script="Deva" typeface="Mangal"/>
+        <a:font script="Telu" typeface="Gautami"/>
+        <a:font script="Taml" typeface="Latha"/>
+        <a:font script="Syrc" typeface="Estrangelo Edessa"/>
+        <a:font script="Orya" typeface="Kalinga"/>
+        <a:font script="Mlym" typeface="Kartika"/>
+        <a:font script="Laoo" typeface="DokChampa"/>
+        <a:font script="Sinh" typeface="Iskoola Pota"/>
+        <a:font script="Mong" typeface="Mongolian Baiti"/>
+        <a:font script="Viet" typeface="Arial"/>
+        <a:font script="Uigh" typeface="Microsoft Uighur"/>
+        <a:font script="Geor" typeface="Sylfaen"/>
+      </a:minorFont>
+    </a:fontScheme>
+    <a:fmtScheme name="Office">
+      <a:fillStyleLst>
+        <a:solidFill>
+          <a:schemeClr val="phClr"/>
+        </a:solidFill>
+        <a:gradFill rotWithShape="1">
+          <a:gsLst>
+            <a:gs pos="0">
+              <a:schemeClr val="phClr">
+                <a:tint val="50000"/>
+                <a:satMod val="300000"/>
+              </a:schemeClr>
+            </a:gs>
+            <a:gs pos="35000">
+              <a:schemeClr val="phClr">
+                <a:tint val="37000"/>
+                <a:satMod val="300000"/>
+              </a:schemeClr>
+            </a:gs>
+            <a:gs pos="100000">
+              <a:schemeClr val="phClr">
+                <a:tint val="15000"/>
+                <a:satMod val="350000"/>
+              </a:schemeClr>
+            </a:gs>
+          </a:gsLst>
+          <a:lin ang="16200000" scaled="1"/>
+        </a:gradFill>
+        <a:gradFill rotWithShape="1">
+          <a:gsLst>
+            <a:gs pos="0">
+              <a:schemeClr val="phClr">
+                <a:tint val="100000"/>
+                <a:shade val="100000"/>
+                <a:satMod val="130000"/>
+              </a:schemeClr>
+            </a:gs>
+            <a:gs pos="100000">
+              <a:schemeClr val="phClr">
+                <a:tint val="50000"/>
+                <a:shade val="100000"/>
+                <a:satMod val="350000"/>
+              </a:schemeClr>
+            </a:gs>
+          </a:gsLst>
+          <a:lin ang="16200000" scaled="0"/>
+        </a:gradFill>
+      </a:fillStyleLst>
+      <a:lnStyleLst>
+        <a:ln w="9525" cap="flat" cmpd="sng" algn="ctr">
+          <a:solidFill>
+            <a:schemeClr val="phClr">
+              <a:shade val="95000"/>
+              <a:satMod val="105000"/>
+            </a:schemeClr>
+          </a:solidFill>
+          <a:prstDash val="solid"/>
+        </a:ln>
+        <a:ln w="25400" cap="flat" cmpd="sng" algn="ctr">
+          <a:solidFill>
+            <a:schemeClr val="phClr"/>
+          </a:solidFill>
+          <a:prstDash val="solid"/>
+        </a:ln>
+        <a:ln w="38100" cap="flat" cmpd="sng" algn="ctr">
+          <a:solidFill>
+            <a:schemeClr val="phClr"/>
+          </a:solidFill>
+          <a:prstDash val="solid"/>
+        </a:ln>
+      </a:lnStyleLst>
+      <a:effectStyleLst>
+        <a:effectStyle>
+          <a:effectLst>
+            <a:outerShdw blurRad="40000" dist="20000" dir="5400000" rotWithShape="0">
+              <a:srgbClr val="000000">
+                <a:alpha val="38000"/>
+              </a:srgbClr>
+            </a:outerShdw>
+          </a:effectLst>
+        </a:effectStyle>
+        <a:effectStyle>
+          <a:effectLst>
+            <a:outerShdw blurRad="40000" dist="23000" dir="5400000" rotWithShape="0">
+              <a:srgbClr val="000000">
+                <a:alpha val="35000"/>
+              </a:srgbClr>
+            </a:outerShdw>
+          </a:effectLst>
+        </a:effectStyle>
+        <a:effectStyle>
+          <a:effectLst>
+            <a:outerShdw blurRad="40000" dist="23000" dir="5400000" rotWithShape="0">
+              <a:srgbClr val="000000">
+                <a:alpha val="35000"/>
+              </a:srgbClr>
+            </a:outerShdw>
+          </a:effectLst>
+          <a:scene3d>
+            <a:camera prst="orthographicFront">
+              <a:rot lat="0" lon="0" rev="0"/>
+            </a:camera>
+            <a:lightRig rig="threePt" dir="t">
+              <a:rot lat="0" lon="0" rev="1200000"/>
+            </a:lightRig>
+          </a:scene3d>
+          <a:sp3d>
+            <a:bevelT w="63500" h="25400"/>
+          </a:sp3d>
+        </a:effectStyle>
+      </a:effectStyleLst>
+      <a:bgFillStyleLst>
+        <a:solidFill>
+          <a:schemeClr val="phClr"/>
+        </a:solidFill>
+        <a:gradFill rotWithShape="1">
+          <a:gsLst>
+            <a:gs pos="0">
+              <a:schemeClr val="phClr">
+                <a:tint val="40000"/>
+                <a:satMod val="350000"/>
+              </a:schemeClr>
+            </a:gs>
+            <a:gs pos="40000">
+              <a:schemeClr val="phClr">
+                <a:tint val="45000"/>
+                <a:shade val="99000"/>
+                <a:satMod val="350000"/>
+              </a:schemeClr>
+            </a:gs>
+            <a:gs pos="100000">
+              <a:schemeClr val="phClr">
+                <a:shade val="20000"/>
+                <a:satMod val="255000"/>
+              </a:schemeClr>
+            </a:gs>
+          </a:gsLst>
+          <a:path path="circle">
+            <a:fillToRect l="50000" t="-80000" r="50000" b="180000"/>
+          </a:path>
+        </a:gradFill>
+        <a:gradFill rotWithShape="1">
+          <a:gsLst>
+            <a:gs pos="0">
+              <a:schemeClr val="phClr">
+                <a:tint val="80000"/>
+                <a:satMod val="300000"/>
+              </a:schemeClr>
+            </a:gs>
+            <a:gs pos="100000">
+              <a:schemeClr val="phClr">
+                <a:shade val="30000"/>
+                <a:satMod val="200000"/>
+              </a:schemeClr>
+            </a:gs>
+          </a:gsLst>
+          <a:path path="circle">
+            <a:fillToRect l="50000" t="50000" r="50000" b="50000"/>
+          </a:path>
+        </a:gradFill>
+      </a:bgFillStyleLst>
+    </a:fmtScheme>
+  </a:themeElements>
+  <a:objectDefaults>
+    <a:spDef>
+      <a:spPr/>
+      <a:bodyPr/>
+      <a:lstStyle/>
+      <a:style>
+        <a:lnRef idx="1">
+          <a:schemeClr val="accent1"/>
+        </a:lnRef>
+        <a:fillRef idx="3">
+          <a:schemeClr val="accent1"/>
+        </a:fillRef>
+        <a:effectRef idx="2">
+          <a:schemeClr val="accent1"/>
+        </a:effectRef>
+        <a:fontRef idx="minor">
+          <a:schemeClr val="lt1"/>
+        </a:fontRef>
+      </a:style>
+    </a:spDef>
+    <a:lnDef>
+      <a:spPr/>
+      <a:bodyPr/>
+      <a:lstStyle/>
+      <a:style>
+        <a:lnRef idx="2">
+          <a:schemeClr val="accent1"/>
+        </a:lnRef>
+        <a:fillRef idx="0">
+          <a:schemeClr val="accent1"/>
+        </a:fillRef>
+        <a:effectRef idx="1">
+          <a:schemeClr val="accent1"/>
+        </a:effectRef>
+        <a:fontRef idx="minor">
+          <a:schemeClr val="tx1"/>
+        </a:fontRef>
+      </a:style>
+    </a:lnDef>
+  </a:objectDefaults>
+  <a:extraClrSchemeLst/>
+</a:theme>
+</file>
+
+<file path=ppt/theme/theme2.xml><?xml version="1.0" encoding="utf-8"?>
 <a:theme xmlns:a="http://schemas.openxmlformats.org/drawingml/2006/main" name="Office Theme">
   <a:themeElements>
     <a:clrScheme name="Office">

--- a/media/exports/reports/2026-01/program-cost.pptx
+++ b/media/exports/reports/2026-01/program-cost.pptx
@@ -1761,7 +1761,7 @@
           <a:lstStyle/>
           <a:p>
             <a:r>
-              <a:t>What does each program really cost?. Sample Community Services Ltd. Period: January 2026. Each program's full cost: what its grant pays for, plus its fair share of the costs no single grant covers (untied program costs and administration, shared by grant spending). Pick a program and every chart and note follows it.</a:t>
+              <a:t>What does each program really cost?. Sample Community Services Ltd. Period: January 2026. In short: Housing support costs $57,236 in full in January: $26,734 more than its grant spending, once its share of shared costs is added. Each program's full cost: what its grant pays for, plus its fair share of the costs no single grant covers (untied program costs and administration, shared by grant spending). Pick a program and every chart and note follows it.</a:t>
             </a:r>
           </a:p>
         </p:txBody>
@@ -5336,7 +5336,7 @@
         <p:spPr>
           <a:xfrm>
             <a:off x="457200" y="3703320"/>
-            <a:ext cx="11277295" cy="535940"/>
+            <a:ext cx="11277295" cy="980440"/>
           </a:xfrm>
           <a:prstGeom prst="rect">
             <a:avLst/>
@@ -5361,7 +5361,7 @@
                 </a:solidFill>
                 <a:latin typeface="Roboto"/>
               </a:rPr>
-              <a:t>Period: January 2026. Each program's full cost: what its grant pays for, plus its fair share of the costs no single grant covers (untied program costs and administration, shared by grant spending). Pick a program and every chart and note follows it.</a:t>
+              <a:t>Period: January 2026. In short: Housing support costs $57,236 in full in January: $26,734 more than its grant spending, once its share of shared costs is added. Each program's full cost: what its grant pays for, plus its fair share of the costs no single grant covers (untied program costs and administration, shared by grant spending). Pick a program and every chart and note follows it.</a:t>
             </a:r>
           </a:p>
         </p:txBody>
@@ -5374,7 +5374,7 @@
         </p:nvSpPr>
         <p:spPr>
           <a:xfrm>
-            <a:off x="457200" y="4330700"/>
+            <a:off x="457200" y="4775200"/>
             <a:ext cx="11277295" cy="1097280"/>
           </a:xfrm>
           <a:prstGeom prst="rect">
@@ -5526,7 +5526,7 @@
                 </a:solidFill>
                 <a:latin typeface="Roboto"/>
               </a:rPr>
-              <a:t>Data retrieved 2pm, Tue 6 Oct 2026 · Generated 8 Oct 2026, 9:35am · Sample data · Made with Python (python-pptx)</a:t>
+              <a:t>Data retrieved 2pm, Tue 6 Oct 2026 · Generated 10 Oct 2026, 9:55pm · Sample data · Made with Python (python-pptx)</a:t>
             </a:r>
           </a:p>
         </p:txBody>
@@ -6095,7 +6095,7 @@
                 </a:solidFill>
                 <a:latin typeface="Roboto"/>
               </a:rPr>
-              <a:t>Data retrieved 2pm, Tue 6 Oct 2026 · Generated 8 Oct 2026, 9:35am · Sample data · Made with Python (python-pptx)</a:t>
+              <a:t>Data retrieved 2pm, Tue 6 Oct 2026 · Generated 10 Oct 2026, 9:55pm · Sample data · Made with Python (python-pptx)</a:t>
             </a:r>
           </a:p>
         </p:txBody>
@@ -6664,7 +6664,7 @@
                 </a:solidFill>
                 <a:latin typeface="Roboto"/>
               </a:rPr>
-              <a:t>Data retrieved 2pm, Tue 6 Oct 2026 · Generated 8 Oct 2026, 9:35am · Sample data · Made with Python (python-pptx)</a:t>
+              <a:t>Data retrieved 2pm, Tue 6 Oct 2026 · Generated 10 Oct 2026, 9:55pm · Sample data · Made with Python (python-pptx)</a:t>
             </a:r>
           </a:p>
         </p:txBody>
@@ -7233,7 +7233,7 @@
                 </a:solidFill>
                 <a:latin typeface="Roboto"/>
               </a:rPr>
-              <a:t>Data retrieved 2pm, Tue 6 Oct 2026 · Generated 8 Oct 2026, 9:35am · Sample data · Made with Python (python-pptx)</a:t>
+              <a:t>Data retrieved 2pm, Tue 6 Oct 2026 · Generated 10 Oct 2026, 9:55pm · Sample data · Made with Python (python-pptx)</a:t>
             </a:r>
           </a:p>
         </p:txBody>
@@ -7802,7 +7802,7 @@
                 </a:solidFill>
                 <a:latin typeface="Roboto"/>
               </a:rPr>
-              <a:t>Data retrieved 2pm, Tue 6 Oct 2026 · Generated 8 Oct 2026, 9:35am · Sample data · Made with Python (python-pptx)</a:t>
+              <a:t>Data retrieved 2pm, Tue 6 Oct 2026 · Generated 10 Oct 2026, 9:55pm · Sample data · Made with Python (python-pptx)</a:t>
             </a:r>
           </a:p>
         </p:txBody>
@@ -8371,7 +8371,7 @@
                 </a:solidFill>
                 <a:latin typeface="Roboto"/>
               </a:rPr>
-              <a:t>Data retrieved 2pm, Tue 6 Oct 2026 · Generated 8 Oct 2026, 9:35am · Sample data · Made with Python (python-pptx)</a:t>
+              <a:t>Data retrieved 2pm, Tue 6 Oct 2026 · Generated 10 Oct 2026, 9:55pm · Sample data · Made with Python (python-pptx)</a:t>
             </a:r>
           </a:p>
         </p:txBody>
